--- a/PhishGuard.pptx
+++ b/PhishGuard.pptx
@@ -288,7 +288,7 @@
           <a:p>
             <a:fld id="{B04D14A0-AE39-4FDC-BCBA-1D6173085475}" type="datetimeFigureOut">
               <a:rPr lang="en-GB" smtClean="0"/>
-              <a:t>15/04/2026</a:t>
+              <a:t>17/04/2026</a:t>
             </a:fld>
             <a:endParaRPr lang="en-GB"/>
           </a:p>
@@ -516,7 +516,7 @@
           <a:p>
             <a:fld id="{B04D14A0-AE39-4FDC-BCBA-1D6173085475}" type="datetimeFigureOut">
               <a:rPr lang="en-GB" smtClean="0"/>
-              <a:t>15/04/2026</a:t>
+              <a:t>17/04/2026</a:t>
             </a:fld>
             <a:endParaRPr lang="en-GB"/>
           </a:p>
@@ -696,7 +696,7 @@
           <a:p>
             <a:fld id="{B04D14A0-AE39-4FDC-BCBA-1D6173085475}" type="datetimeFigureOut">
               <a:rPr lang="en-GB" smtClean="0"/>
-              <a:t>15/04/2026</a:t>
+              <a:t>17/04/2026</a:t>
             </a:fld>
             <a:endParaRPr lang="en-GB"/>
           </a:p>
@@ -866,7 +866,7 @@
           <a:p>
             <a:fld id="{B04D14A0-AE39-4FDC-BCBA-1D6173085475}" type="datetimeFigureOut">
               <a:rPr lang="en-GB" smtClean="0"/>
-              <a:t>15/04/2026</a:t>
+              <a:t>17/04/2026</a:t>
             </a:fld>
             <a:endParaRPr lang="en-GB"/>
           </a:p>
@@ -1120,7 +1120,7 @@
           <a:p>
             <a:fld id="{B04D14A0-AE39-4FDC-BCBA-1D6173085475}" type="datetimeFigureOut">
               <a:rPr lang="en-GB" smtClean="0"/>
-              <a:t>15/04/2026</a:t>
+              <a:t>17/04/2026</a:t>
             </a:fld>
             <a:endParaRPr lang="en-GB"/>
           </a:p>
@@ -1446,7 +1446,7 @@
           <a:p>
             <a:fld id="{B04D14A0-AE39-4FDC-BCBA-1D6173085475}" type="datetimeFigureOut">
               <a:rPr lang="en-GB" smtClean="0"/>
-              <a:t>15/04/2026</a:t>
+              <a:t>17/04/2026</a:t>
             </a:fld>
             <a:endParaRPr lang="en-GB"/>
           </a:p>
@@ -1897,7 +1897,7 @@
           <a:p>
             <a:fld id="{B04D14A0-AE39-4FDC-BCBA-1D6173085475}" type="datetimeFigureOut">
               <a:rPr lang="en-GB" smtClean="0"/>
-              <a:t>15/04/2026</a:t>
+              <a:t>17/04/2026</a:t>
             </a:fld>
             <a:endParaRPr lang="en-GB"/>
           </a:p>
@@ -2015,7 +2015,7 @@
           <a:p>
             <a:fld id="{B04D14A0-AE39-4FDC-BCBA-1D6173085475}" type="datetimeFigureOut">
               <a:rPr lang="en-GB" smtClean="0"/>
-              <a:t>15/04/2026</a:t>
+              <a:t>17/04/2026</a:t>
             </a:fld>
             <a:endParaRPr lang="en-GB"/>
           </a:p>
@@ -2110,7 +2110,7 @@
           <a:p>
             <a:fld id="{B04D14A0-AE39-4FDC-BCBA-1D6173085475}" type="datetimeFigureOut">
               <a:rPr lang="en-GB" smtClean="0"/>
-              <a:t>15/04/2026</a:t>
+              <a:t>17/04/2026</a:t>
             </a:fld>
             <a:endParaRPr lang="en-GB"/>
           </a:p>
@@ -2397,7 +2397,7 @@
           <a:p>
             <a:fld id="{B04D14A0-AE39-4FDC-BCBA-1D6173085475}" type="datetimeFigureOut">
               <a:rPr lang="en-GB" smtClean="0"/>
-              <a:t>15/04/2026</a:t>
+              <a:t>17/04/2026</a:t>
             </a:fld>
             <a:endParaRPr lang="en-GB"/>
           </a:p>
@@ -2719,7 +2719,7 @@
           <a:p>
             <a:fld id="{B04D14A0-AE39-4FDC-BCBA-1D6173085475}" type="datetimeFigureOut">
               <a:rPr lang="en-GB" smtClean="0"/>
-              <a:t>15/04/2026</a:t>
+              <a:t>17/04/2026</a:t>
             </a:fld>
             <a:endParaRPr lang="en-GB"/>
           </a:p>
@@ -2973,7 +2973,7 @@
           <a:p>
             <a:fld id="{B04D14A0-AE39-4FDC-BCBA-1D6173085475}" type="datetimeFigureOut">
               <a:rPr lang="en-GB" smtClean="0"/>
-              <a:t>15/04/2026</a:t>
+              <a:t>17/04/2026</a:t>
             </a:fld>
             <a:endParaRPr lang="en-GB"/>
           </a:p>
@@ -6708,15 +6708,16 @@
           <a:lstStyle/>
           <a:p>
             <a:r>
-              <a:rPr lang="en-US" sz="3200" b="1" dirty="0">
+              <a:rPr lang="en-GB" sz="3200" b="1" dirty="0">
                 <a:latin typeface="Times New Roman" panose="02020603050405020304" pitchFamily="18" charset="0"/>
                 <a:ea typeface="Calibri" pitchFamily="34" charset="-122"/>
                 <a:cs typeface="Times New Roman" panose="02020603050405020304" pitchFamily="18" charset="0"/>
               </a:rPr>
-              <a:t>SPF &amp; DKIM — EMAIL AUTHENTICATION CHECKS</a:t>
+              <a:t>INGRESS &amp; EGRESS FILTERING IN PHISHGUARD</a:t>
             </a:r>
-            <a:endParaRPr lang="en-US" sz="3200" dirty="0">
+            <a:endParaRPr lang="en-US" sz="3200" b="1" dirty="0">
               <a:latin typeface="Times New Roman" panose="02020603050405020304" pitchFamily="18" charset="0"/>
+              <a:ea typeface="Calibri" pitchFamily="34" charset="-122"/>
               <a:cs typeface="Times New Roman" panose="02020603050405020304" pitchFamily="18" charset="0"/>
             </a:endParaRPr>
           </a:p>
@@ -6766,39 +6767,6 @@
               </a:rPr>
               <a:t> parses the Authentication-Results header on every incoming email. Each failed protocol adds +2 to the risk score. </a:t>
             </a:r>
-            <a:r>
-              <a:rPr lang="en-US" dirty="0" err="1">
-                <a:solidFill>
-                  <a:srgbClr val="FF0000"/>
-                </a:solidFill>
-                <a:latin typeface="Times New Roman" panose="02020603050405020304" pitchFamily="18" charset="0"/>
-                <a:ea typeface="Calibri" pitchFamily="34" charset="-122"/>
-                <a:cs typeface="Times New Roman" panose="02020603050405020304" pitchFamily="18" charset="0"/>
-              </a:rPr>
-              <a:t>Egrace</a:t>
-            </a:r>
-            <a:r>
-              <a:rPr lang="en-US" dirty="0">
-                <a:solidFill>
-                  <a:srgbClr val="FF0000"/>
-                </a:solidFill>
-                <a:latin typeface="Times New Roman" panose="02020603050405020304" pitchFamily="18" charset="0"/>
-                <a:ea typeface="Calibri" pitchFamily="34" charset="-122"/>
-                <a:cs typeface="Times New Roman" panose="02020603050405020304" pitchFamily="18" charset="0"/>
-              </a:rPr>
-              <a:t> and </a:t>
-            </a:r>
-            <a:r>
-              <a:rPr lang="en-US" dirty="0" err="1">
-                <a:solidFill>
-                  <a:srgbClr val="FF0000"/>
-                </a:solidFill>
-                <a:latin typeface="Times New Roman" panose="02020603050405020304" pitchFamily="18" charset="0"/>
-                <a:ea typeface="Calibri" pitchFamily="34" charset="-122"/>
-                <a:cs typeface="Times New Roman" panose="02020603050405020304" pitchFamily="18" charset="0"/>
-              </a:rPr>
-              <a:t>ingrace</a:t>
-            </a:r>
             <a:endParaRPr lang="en-US" dirty="0">
               <a:solidFill>
                 <a:srgbClr val="FF0000"/>
@@ -6908,7 +6876,7 @@
           <p:spPr>
             <a:xfrm>
               <a:off x="530352" y="1591056"/>
-              <a:ext cx="3676478" cy="448688"/>
+              <a:ext cx="3785616" cy="448688"/>
             </a:xfrm>
             <a:prstGeom prst="rect">
               <a:avLst/>
@@ -6920,19 +6888,18 @@
             <a:bodyPr wrap="square" lIns="0" tIns="0" rIns="0" bIns="0" rtlCol="0" anchor="ctr"/>
             <a:lstStyle/>
             <a:p>
-              <a:pPr marL="0" indent="0" algn="ctr">
-                <a:buNone/>
-              </a:pPr>
+              <a:pPr algn="ctr"/>
               <a:r>
-                <a:rPr lang="en-US" sz="3200" dirty="0">
+                <a:rPr lang="en-GB" sz="3200" dirty="0">
                   <a:latin typeface="Times New Roman" panose="02020603050405020304" pitchFamily="18" charset="0"/>
-                  <a:ea typeface="Calibri" pitchFamily="34" charset="-122"/>
+                  <a:ea typeface="Tahoma" panose="020B0604030504040204" pitchFamily="34" charset="0"/>
                   <a:cs typeface="Times New Roman" panose="02020603050405020304" pitchFamily="18" charset="0"/>
                 </a:rPr>
-                <a:t>Sender Policy Framework</a:t>
+                <a:t>Ingress Filtering (Incoming)</a:t>
               </a:r>
               <a:endParaRPr lang="en-US" sz="3200" dirty="0">
                 <a:latin typeface="Times New Roman" panose="02020603050405020304" pitchFamily="18" charset="0"/>
+                <a:ea typeface="Tahoma" panose="020B0604030504040204" pitchFamily="34" charset="0"/>
                 <a:cs typeface="Times New Roman" panose="02020603050405020304" pitchFamily="18" charset="0"/>
               </a:endParaRPr>
             </a:p>
@@ -7185,7 +7152,7 @@
                   <a:ea typeface="Calibri" pitchFamily="34" charset="-122"/>
                   <a:cs typeface="Times New Roman" panose="02020603050405020304" pitchFamily="18" charset="0"/>
                 </a:rPr>
-                <a:t>Real Example from Sample Emails:</a:t>
+                <a:t>Ingress Detection Example:</a:t>
               </a:r>
               <a:endParaRPr lang="en-US" dirty="0">
                 <a:latin typeface="Times New Roman" panose="02020603050405020304" pitchFamily="18" charset="0"/>
@@ -7221,33 +7188,15 @@
             <a:bodyPr wrap="square" lIns="0" tIns="0" rIns="0" bIns="0" rtlCol="0" anchor="ctr"/>
             <a:lstStyle/>
             <a:p>
-              <a:pPr marL="0" indent="0">
-                <a:buNone/>
-              </a:pPr>
               <a:r>
-                <a:rPr lang="en-US" sz="1400" dirty="0">
-                  <a:latin typeface="Times New Roman" panose="02020603050405020304" pitchFamily="18" charset="0"/>
-                  <a:ea typeface="Consolas" pitchFamily="34" charset="-122"/>
-                  <a:cs typeface="Times New Roman" panose="02020603050405020304" pitchFamily="18" charset="0"/>
-                </a:rPr>
-                <a:t>paypal-security@hotmail.com</a:t>
+                <a:rPr lang="en-GB" sz="1400" dirty="0"/>
+                <a:t>paypal_spoof.eml </a:t>
               </a:r>
-              <a:endParaRPr lang="en-US" sz="1400" dirty="0">
-                <a:latin typeface="Times New Roman" panose="02020603050405020304" pitchFamily="18" charset="0"/>
-                <a:cs typeface="Times New Roman" panose="02020603050405020304" pitchFamily="18" charset="0"/>
-              </a:endParaRPr>
             </a:p>
             <a:p>
-              <a:pPr marL="0" indent="0">
-                <a:buNone/>
-              </a:pPr>
               <a:r>
-                <a:rPr lang="en-US" sz="1400" dirty="0">
-                  <a:latin typeface="Times New Roman" panose="02020603050405020304" pitchFamily="18" charset="0"/>
-                  <a:ea typeface="Consolas" pitchFamily="34" charset="-122"/>
-                  <a:cs typeface="Times New Roman" panose="02020603050405020304" pitchFamily="18" charset="0"/>
-                </a:rPr>
-                <a:t>spf=fail</a:t>
+                <a:rPr lang="en-GB" sz="1400" dirty="0"/>
+                <a:t>Score: 23 | Severity: CRITICAL</a:t>
               </a:r>
               <a:endParaRPr lang="en-US" sz="1400" dirty="0">
                 <a:latin typeface="Times New Roman" panose="02020603050405020304" pitchFamily="18" charset="0"/>
@@ -7346,16 +7295,13 @@
             <a:bodyPr wrap="square" lIns="0" tIns="0" rIns="0" bIns="0" rtlCol="0" anchor="ctr"/>
             <a:lstStyle/>
             <a:p>
-              <a:pPr marL="0" indent="0" algn="ctr">
-                <a:buNone/>
-              </a:pPr>
+              <a:pPr algn="ctr"/>
               <a:r>
-                <a:rPr lang="en-US" sz="3200" dirty="0">
+                <a:rPr lang="en-GB" sz="3200" dirty="0">
                   <a:latin typeface="Times New Roman" panose="02020603050405020304" pitchFamily="18" charset="0"/>
-                  <a:ea typeface="Calibri" pitchFamily="34" charset="-122"/>
                   <a:cs typeface="Times New Roman" panose="02020603050405020304" pitchFamily="18" charset="0"/>
                 </a:rPr>
-                <a:t>DomainKeys Identified Mail</a:t>
+                <a:t>Egress Filtering (Outgoing)</a:t>
               </a:r>
               <a:endParaRPr lang="en-US" sz="3200" dirty="0">
                 <a:latin typeface="Times New Roman" panose="02020603050405020304" pitchFamily="18" charset="0"/>
@@ -7611,7 +7557,7 @@
                   <a:ea typeface="Calibri" pitchFamily="34" charset="-122"/>
                   <a:cs typeface="Times New Roman" panose="02020603050405020304" pitchFamily="18" charset="0"/>
                 </a:rPr>
-                <a:t>Real Example from Sample Emails:</a:t>
+                <a:t>Egress Detection Example:</a:t>
               </a:r>
               <a:endParaRPr lang="en-US" dirty="0">
                 <a:latin typeface="Times New Roman" panose="02020603050405020304" pitchFamily="18" charset="0"/>
@@ -7656,12 +7602,8 @@
                   <a:ea typeface="Consolas" pitchFamily="34" charset="-122"/>
                   <a:cs typeface="Times New Roman" panose="02020603050405020304" pitchFamily="18" charset="0"/>
                 </a:rPr>
-                <a:t>elonmusk@gmail.com</a:t>
+                <a:t>Pan_aadhar_leak.eml</a:t>
               </a:r>
-              <a:endParaRPr lang="en-US" sz="1400" dirty="0">
-                <a:latin typeface="Times New Roman" panose="02020603050405020304" pitchFamily="18" charset="0"/>
-                <a:cs typeface="Times New Roman" panose="02020603050405020304" pitchFamily="18" charset="0"/>
-              </a:endParaRPr>
             </a:p>
             <a:p>
               <a:pPr marL="0" indent="0">
@@ -7670,15 +7612,10 @@
               <a:r>
                 <a:rPr lang="en-US" sz="1400" dirty="0">
                   <a:latin typeface="Times New Roman" panose="02020603050405020304" pitchFamily="18" charset="0"/>
-                  <a:ea typeface="Consolas" pitchFamily="34" charset="-122"/>
                   <a:cs typeface="Times New Roman" panose="02020603050405020304" pitchFamily="18" charset="0"/>
                 </a:rPr>
-                <a:t>dkim=fail</a:t>
+                <a:t>4x PAN + 4x Aadhar | Blocked</a:t>
               </a:r>
-              <a:endParaRPr lang="en-US" sz="1400" dirty="0">
-                <a:latin typeface="Times New Roman" panose="02020603050405020304" pitchFamily="18" charset="0"/>
-                <a:cs typeface="Times New Roman" panose="02020603050405020304" pitchFamily="18" charset="0"/>
-              </a:endParaRPr>
             </a:p>
           </p:txBody>
         </p:sp>

--- a/PhishGuard.pptx
+++ b/PhishGuard.pptx
@@ -288,7 +288,7 @@
           <a:p>
             <a:fld id="{B04D14A0-AE39-4FDC-BCBA-1D6173085475}" type="datetimeFigureOut">
               <a:rPr lang="en-GB" smtClean="0"/>
-              <a:t>17/04/2026</a:t>
+              <a:t>22/04/2026</a:t>
             </a:fld>
             <a:endParaRPr lang="en-GB"/>
           </a:p>
@@ -516,7 +516,7 @@
           <a:p>
             <a:fld id="{B04D14A0-AE39-4FDC-BCBA-1D6173085475}" type="datetimeFigureOut">
               <a:rPr lang="en-GB" smtClean="0"/>
-              <a:t>17/04/2026</a:t>
+              <a:t>22/04/2026</a:t>
             </a:fld>
             <a:endParaRPr lang="en-GB"/>
           </a:p>
@@ -696,7 +696,7 @@
           <a:p>
             <a:fld id="{B04D14A0-AE39-4FDC-BCBA-1D6173085475}" type="datetimeFigureOut">
               <a:rPr lang="en-GB" smtClean="0"/>
-              <a:t>17/04/2026</a:t>
+              <a:t>22/04/2026</a:t>
             </a:fld>
             <a:endParaRPr lang="en-GB"/>
           </a:p>
@@ -866,7 +866,7 @@
           <a:p>
             <a:fld id="{B04D14A0-AE39-4FDC-BCBA-1D6173085475}" type="datetimeFigureOut">
               <a:rPr lang="en-GB" smtClean="0"/>
-              <a:t>17/04/2026</a:t>
+              <a:t>22/04/2026</a:t>
             </a:fld>
             <a:endParaRPr lang="en-GB"/>
           </a:p>
@@ -1120,7 +1120,7 @@
           <a:p>
             <a:fld id="{B04D14A0-AE39-4FDC-BCBA-1D6173085475}" type="datetimeFigureOut">
               <a:rPr lang="en-GB" smtClean="0"/>
-              <a:t>17/04/2026</a:t>
+              <a:t>22/04/2026</a:t>
             </a:fld>
             <a:endParaRPr lang="en-GB"/>
           </a:p>
@@ -1446,7 +1446,7 @@
           <a:p>
             <a:fld id="{B04D14A0-AE39-4FDC-BCBA-1D6173085475}" type="datetimeFigureOut">
               <a:rPr lang="en-GB" smtClean="0"/>
-              <a:t>17/04/2026</a:t>
+              <a:t>22/04/2026</a:t>
             </a:fld>
             <a:endParaRPr lang="en-GB"/>
           </a:p>
@@ -1897,7 +1897,7 @@
           <a:p>
             <a:fld id="{B04D14A0-AE39-4FDC-BCBA-1D6173085475}" type="datetimeFigureOut">
               <a:rPr lang="en-GB" smtClean="0"/>
-              <a:t>17/04/2026</a:t>
+              <a:t>22/04/2026</a:t>
             </a:fld>
             <a:endParaRPr lang="en-GB"/>
           </a:p>
@@ -2015,7 +2015,7 @@
           <a:p>
             <a:fld id="{B04D14A0-AE39-4FDC-BCBA-1D6173085475}" type="datetimeFigureOut">
               <a:rPr lang="en-GB" smtClean="0"/>
-              <a:t>17/04/2026</a:t>
+              <a:t>22/04/2026</a:t>
             </a:fld>
             <a:endParaRPr lang="en-GB"/>
           </a:p>
@@ -2110,7 +2110,7 @@
           <a:p>
             <a:fld id="{B04D14A0-AE39-4FDC-BCBA-1D6173085475}" type="datetimeFigureOut">
               <a:rPr lang="en-GB" smtClean="0"/>
-              <a:t>17/04/2026</a:t>
+              <a:t>22/04/2026</a:t>
             </a:fld>
             <a:endParaRPr lang="en-GB"/>
           </a:p>
@@ -2397,7 +2397,7 @@
           <a:p>
             <a:fld id="{B04D14A0-AE39-4FDC-BCBA-1D6173085475}" type="datetimeFigureOut">
               <a:rPr lang="en-GB" smtClean="0"/>
-              <a:t>17/04/2026</a:t>
+              <a:t>22/04/2026</a:t>
             </a:fld>
             <a:endParaRPr lang="en-GB"/>
           </a:p>
@@ -2719,7 +2719,7 @@
           <a:p>
             <a:fld id="{B04D14A0-AE39-4FDC-BCBA-1D6173085475}" type="datetimeFigureOut">
               <a:rPr lang="en-GB" smtClean="0"/>
-              <a:t>17/04/2026</a:t>
+              <a:t>22/04/2026</a:t>
             </a:fld>
             <a:endParaRPr lang="en-GB"/>
           </a:p>
@@ -2973,7 +2973,7 @@
           <a:p>
             <a:fld id="{B04D14A0-AE39-4FDC-BCBA-1D6173085475}" type="datetimeFigureOut">
               <a:rPr lang="en-GB" smtClean="0"/>
-              <a:t>17/04/2026</a:t>
+              <a:t>22/04/2026</a:t>
             </a:fld>
             <a:endParaRPr lang="en-GB"/>
           </a:p>
@@ -8046,7 +8046,7 @@
                 <a:ea typeface="Calibri" pitchFamily="34" charset="-122"/>
                 <a:cs typeface="Times New Roman" panose="02020603050405020304" pitchFamily="18" charset="0"/>
               </a:rPr>
-              <a:t>DETECTION PIPELINE — END TO END</a:t>
+              <a:t>DETECTION PIPELINE </a:t>
             </a:r>
             <a:endParaRPr lang="en-US" sz="3200" dirty="0">
               <a:latin typeface="Times New Roman" panose="02020603050405020304" pitchFamily="18" charset="0"/>

--- a/PhishGuard.pptx
+++ b/PhishGuard.pptx
@@ -4,6 +4,9 @@
   <p:sldMasterIdLst>
     <p:sldMasterId id="2147483660" r:id="rId1"/>
   </p:sldMasterIdLst>
+  <p:notesMasterIdLst>
+    <p:notesMasterId r:id="rId11"/>
+  </p:notesMasterIdLst>
   <p:sldIdLst>
     <p:sldId id="258" r:id="rId2"/>
     <p:sldId id="256" r:id="rId3"/>
@@ -120,6 +123,452 @@
 </p:presentation>
 </file>
 
+<file path=ppt/notesMasters/notesMaster1.xml><?xml version="1.0" encoding="utf-8"?>
+<p:notesMaster xmlns:a="http://schemas.openxmlformats.org/drawingml/2006/main" xmlns:r="http://schemas.openxmlformats.org/officeDocument/2006/relationships" xmlns:p="http://schemas.openxmlformats.org/presentationml/2006/main">
+  <p:cSld>
+    <p:bg>
+      <p:bgRef idx="1001">
+        <a:schemeClr val="bg1"/>
+      </p:bgRef>
+    </p:bg>
+    <p:spTree>
+      <p:nvGrpSpPr>
+        <p:cNvPr id="1" name=""/>
+        <p:cNvGrpSpPr/>
+        <p:nvPr/>
+      </p:nvGrpSpPr>
+      <p:grpSpPr>
+        <a:xfrm>
+          <a:off x="0" y="0"/>
+          <a:ext cx="0" cy="0"/>
+          <a:chOff x="0" y="0"/>
+          <a:chExt cx="0" cy="0"/>
+        </a:xfrm>
+      </p:grpSpPr>
+      <p:sp>
+        <p:nvSpPr>
+          <p:cNvPr id="2" name="Header Placeholder 1"/>
+          <p:cNvSpPr>
+            <a:spLocks noGrp="1"/>
+          </p:cNvSpPr>
+          <p:nvPr>
+            <p:ph type="hdr" sz="quarter"/>
+          </p:nvPr>
+        </p:nvSpPr>
+        <p:spPr>
+          <a:xfrm>
+            <a:off x="0" y="0"/>
+            <a:ext cx="2971800" cy="458788"/>
+          </a:xfrm>
+          <a:prstGeom prst="rect">
+            <a:avLst/>
+          </a:prstGeom>
+        </p:spPr>
+        <p:txBody>
+          <a:bodyPr vert="horz" lIns="91440" tIns="45720" rIns="91440" bIns="45720" rtlCol="0"/>
+          <a:lstStyle>
+            <a:lvl1pPr algn="l">
+              <a:defRPr sz="1200"/>
+            </a:lvl1pPr>
+          </a:lstStyle>
+          <a:p>
+            <a:endParaRPr lang="en-GB"/>
+          </a:p>
+        </p:txBody>
+      </p:sp>
+      <p:sp>
+        <p:nvSpPr>
+          <p:cNvPr id="3" name="Date Placeholder 2"/>
+          <p:cNvSpPr>
+            <a:spLocks noGrp="1"/>
+          </p:cNvSpPr>
+          <p:nvPr>
+            <p:ph type="dt" idx="1"/>
+          </p:nvPr>
+        </p:nvSpPr>
+        <p:spPr>
+          <a:xfrm>
+            <a:off x="3884613" y="0"/>
+            <a:ext cx="2971800" cy="458788"/>
+          </a:xfrm>
+          <a:prstGeom prst="rect">
+            <a:avLst/>
+          </a:prstGeom>
+        </p:spPr>
+        <p:txBody>
+          <a:bodyPr vert="horz" lIns="91440" tIns="45720" rIns="91440" bIns="45720" rtlCol="0"/>
+          <a:lstStyle>
+            <a:lvl1pPr algn="r">
+              <a:defRPr sz="1200"/>
+            </a:lvl1pPr>
+          </a:lstStyle>
+          <a:p>
+            <a:fld id="{AE422D38-099D-4CB3-96FB-8395CF8B76A9}" type="datetimeFigureOut">
+              <a:rPr lang="en-GB" smtClean="0"/>
+              <a:t>25/04/2026</a:t>
+            </a:fld>
+            <a:endParaRPr lang="en-GB"/>
+          </a:p>
+        </p:txBody>
+      </p:sp>
+      <p:sp>
+        <p:nvSpPr>
+          <p:cNvPr id="4" name="Slide Image Placeholder 3"/>
+          <p:cNvSpPr>
+            <a:spLocks noGrp="1" noRot="1" noChangeAspect="1"/>
+          </p:cNvSpPr>
+          <p:nvPr>
+            <p:ph type="sldImg" idx="2"/>
+          </p:nvPr>
+        </p:nvSpPr>
+        <p:spPr>
+          <a:xfrm>
+            <a:off x="685800" y="1143000"/>
+            <a:ext cx="5486400" cy="3086100"/>
+          </a:xfrm>
+          <a:prstGeom prst="rect">
+            <a:avLst/>
+          </a:prstGeom>
+          <a:noFill/>
+          <a:ln w="12700">
+            <a:solidFill>
+              <a:prstClr val="black"/>
+            </a:solidFill>
+          </a:ln>
+        </p:spPr>
+        <p:txBody>
+          <a:bodyPr vert="horz" lIns="91440" tIns="45720" rIns="91440" bIns="45720" rtlCol="0" anchor="ctr"/>
+          <a:lstStyle/>
+          <a:p>
+            <a:endParaRPr lang="en-GB"/>
+          </a:p>
+        </p:txBody>
+      </p:sp>
+      <p:sp>
+        <p:nvSpPr>
+          <p:cNvPr id="5" name="Notes Placeholder 4"/>
+          <p:cNvSpPr>
+            <a:spLocks noGrp="1"/>
+          </p:cNvSpPr>
+          <p:nvPr>
+            <p:ph type="body" sz="quarter" idx="3"/>
+          </p:nvPr>
+        </p:nvSpPr>
+        <p:spPr>
+          <a:xfrm>
+            <a:off x="685800" y="4400550"/>
+            <a:ext cx="5486400" cy="3600450"/>
+          </a:xfrm>
+          <a:prstGeom prst="rect">
+            <a:avLst/>
+          </a:prstGeom>
+        </p:spPr>
+        <p:txBody>
+          <a:bodyPr vert="horz" lIns="91440" tIns="45720" rIns="91440" bIns="45720" rtlCol="0"/>
+          <a:lstStyle/>
+          <a:p>
+            <a:pPr lvl="0"/>
+            <a:r>
+              <a:rPr lang="en-US"/>
+              <a:t>Click to edit Master text styles</a:t>
+            </a:r>
+          </a:p>
+          <a:p>
+            <a:pPr lvl="1"/>
+            <a:r>
+              <a:rPr lang="en-US"/>
+              <a:t>Second level</a:t>
+            </a:r>
+          </a:p>
+          <a:p>
+            <a:pPr lvl="2"/>
+            <a:r>
+              <a:rPr lang="en-US"/>
+              <a:t>Third level</a:t>
+            </a:r>
+          </a:p>
+          <a:p>
+            <a:pPr lvl="3"/>
+            <a:r>
+              <a:rPr lang="en-US"/>
+              <a:t>Fourth level</a:t>
+            </a:r>
+          </a:p>
+          <a:p>
+            <a:pPr lvl="4"/>
+            <a:r>
+              <a:rPr lang="en-US"/>
+              <a:t>Fifth level</a:t>
+            </a:r>
+            <a:endParaRPr lang="en-GB"/>
+          </a:p>
+        </p:txBody>
+      </p:sp>
+      <p:sp>
+        <p:nvSpPr>
+          <p:cNvPr id="6" name="Footer Placeholder 5"/>
+          <p:cNvSpPr>
+            <a:spLocks noGrp="1"/>
+          </p:cNvSpPr>
+          <p:nvPr>
+            <p:ph type="ftr" sz="quarter" idx="4"/>
+          </p:nvPr>
+        </p:nvSpPr>
+        <p:spPr>
+          <a:xfrm>
+            <a:off x="0" y="8685213"/>
+            <a:ext cx="2971800" cy="458787"/>
+          </a:xfrm>
+          <a:prstGeom prst="rect">
+            <a:avLst/>
+          </a:prstGeom>
+        </p:spPr>
+        <p:txBody>
+          <a:bodyPr vert="horz" lIns="91440" tIns="45720" rIns="91440" bIns="45720" rtlCol="0" anchor="b"/>
+          <a:lstStyle>
+            <a:lvl1pPr algn="l">
+              <a:defRPr sz="1200"/>
+            </a:lvl1pPr>
+          </a:lstStyle>
+          <a:p>
+            <a:endParaRPr lang="en-GB"/>
+          </a:p>
+        </p:txBody>
+      </p:sp>
+      <p:sp>
+        <p:nvSpPr>
+          <p:cNvPr id="7" name="Slide Number Placeholder 6"/>
+          <p:cNvSpPr>
+            <a:spLocks noGrp="1"/>
+          </p:cNvSpPr>
+          <p:nvPr>
+            <p:ph type="sldNum" sz="quarter" idx="5"/>
+          </p:nvPr>
+        </p:nvSpPr>
+        <p:spPr>
+          <a:xfrm>
+            <a:off x="3884613" y="8685213"/>
+            <a:ext cx="2971800" cy="458787"/>
+          </a:xfrm>
+          <a:prstGeom prst="rect">
+            <a:avLst/>
+          </a:prstGeom>
+        </p:spPr>
+        <p:txBody>
+          <a:bodyPr vert="horz" lIns="91440" tIns="45720" rIns="91440" bIns="45720" rtlCol="0" anchor="b"/>
+          <a:lstStyle>
+            <a:lvl1pPr algn="r">
+              <a:defRPr sz="1200"/>
+            </a:lvl1pPr>
+          </a:lstStyle>
+          <a:p>
+            <a:fld id="{10AD07CF-CCD2-4BBE-9D05-93A1889B57FC}" type="slidenum">
+              <a:rPr lang="en-GB" smtClean="0"/>
+              <a:t>‹#›</a:t>
+            </a:fld>
+            <a:endParaRPr lang="en-GB"/>
+          </a:p>
+        </p:txBody>
+      </p:sp>
+    </p:spTree>
+    <p:extLst>
+      <p:ext uri="{BB962C8B-B14F-4D97-AF65-F5344CB8AC3E}">
+        <p14:creationId xmlns:p14="http://schemas.microsoft.com/office/powerpoint/2010/main" val="235732078"/>
+      </p:ext>
+    </p:extLst>
+  </p:cSld>
+  <p:clrMap bg1="lt1" tx1="dk1" bg2="lt2" tx2="dk2" accent1="accent1" accent2="accent2" accent3="accent3" accent4="accent4" accent5="accent5" accent6="accent6" hlink="hlink" folHlink="folHlink"/>
+  <p:notesStyle>
+    <a:lvl1pPr marL="0" algn="l" defTabSz="914400" rtl="0" eaLnBrk="1" latinLnBrk="0" hangingPunct="1">
+      <a:defRPr sz="1200" kern="1200">
+        <a:solidFill>
+          <a:schemeClr val="tx1"/>
+        </a:solidFill>
+        <a:latin typeface="+mn-lt"/>
+        <a:ea typeface="+mn-ea"/>
+        <a:cs typeface="+mn-cs"/>
+      </a:defRPr>
+    </a:lvl1pPr>
+    <a:lvl2pPr marL="457200" algn="l" defTabSz="914400" rtl="0" eaLnBrk="1" latinLnBrk="0" hangingPunct="1">
+      <a:defRPr sz="1200" kern="1200">
+        <a:solidFill>
+          <a:schemeClr val="tx1"/>
+        </a:solidFill>
+        <a:latin typeface="+mn-lt"/>
+        <a:ea typeface="+mn-ea"/>
+        <a:cs typeface="+mn-cs"/>
+      </a:defRPr>
+    </a:lvl2pPr>
+    <a:lvl3pPr marL="914400" algn="l" defTabSz="914400" rtl="0" eaLnBrk="1" latinLnBrk="0" hangingPunct="1">
+      <a:defRPr sz="1200" kern="1200">
+        <a:solidFill>
+          <a:schemeClr val="tx1"/>
+        </a:solidFill>
+        <a:latin typeface="+mn-lt"/>
+        <a:ea typeface="+mn-ea"/>
+        <a:cs typeface="+mn-cs"/>
+      </a:defRPr>
+    </a:lvl3pPr>
+    <a:lvl4pPr marL="1371600" algn="l" defTabSz="914400" rtl="0" eaLnBrk="1" latinLnBrk="0" hangingPunct="1">
+      <a:defRPr sz="1200" kern="1200">
+        <a:solidFill>
+          <a:schemeClr val="tx1"/>
+        </a:solidFill>
+        <a:latin typeface="+mn-lt"/>
+        <a:ea typeface="+mn-ea"/>
+        <a:cs typeface="+mn-cs"/>
+      </a:defRPr>
+    </a:lvl4pPr>
+    <a:lvl5pPr marL="1828800" algn="l" defTabSz="914400" rtl="0" eaLnBrk="1" latinLnBrk="0" hangingPunct="1">
+      <a:defRPr sz="1200" kern="1200">
+        <a:solidFill>
+          <a:schemeClr val="tx1"/>
+        </a:solidFill>
+        <a:latin typeface="+mn-lt"/>
+        <a:ea typeface="+mn-ea"/>
+        <a:cs typeface="+mn-cs"/>
+      </a:defRPr>
+    </a:lvl5pPr>
+    <a:lvl6pPr marL="2286000" algn="l" defTabSz="914400" rtl="0" eaLnBrk="1" latinLnBrk="0" hangingPunct="1">
+      <a:defRPr sz="1200" kern="1200">
+        <a:solidFill>
+          <a:schemeClr val="tx1"/>
+        </a:solidFill>
+        <a:latin typeface="+mn-lt"/>
+        <a:ea typeface="+mn-ea"/>
+        <a:cs typeface="+mn-cs"/>
+      </a:defRPr>
+    </a:lvl6pPr>
+    <a:lvl7pPr marL="2743200" algn="l" defTabSz="914400" rtl="0" eaLnBrk="1" latinLnBrk="0" hangingPunct="1">
+      <a:defRPr sz="1200" kern="1200">
+        <a:solidFill>
+          <a:schemeClr val="tx1"/>
+        </a:solidFill>
+        <a:latin typeface="+mn-lt"/>
+        <a:ea typeface="+mn-ea"/>
+        <a:cs typeface="+mn-cs"/>
+      </a:defRPr>
+    </a:lvl7pPr>
+    <a:lvl8pPr marL="3200400" algn="l" defTabSz="914400" rtl="0" eaLnBrk="1" latinLnBrk="0" hangingPunct="1">
+      <a:defRPr sz="1200" kern="1200">
+        <a:solidFill>
+          <a:schemeClr val="tx1"/>
+        </a:solidFill>
+        <a:latin typeface="+mn-lt"/>
+        <a:ea typeface="+mn-ea"/>
+        <a:cs typeface="+mn-cs"/>
+      </a:defRPr>
+    </a:lvl8pPr>
+    <a:lvl9pPr marL="3657600" algn="l" defTabSz="914400" rtl="0" eaLnBrk="1" latinLnBrk="0" hangingPunct="1">
+      <a:defRPr sz="1200" kern="1200">
+        <a:solidFill>
+          <a:schemeClr val="tx1"/>
+        </a:solidFill>
+        <a:latin typeface="+mn-lt"/>
+        <a:ea typeface="+mn-ea"/>
+        <a:cs typeface="+mn-cs"/>
+      </a:defRPr>
+    </a:lvl9pPr>
+  </p:notesStyle>
+</p:notesMaster>
+</file>
+
+<file path=ppt/notesSlides/notesSlide1.xml><?xml version="1.0" encoding="utf-8"?>
+<p:notes xmlns:a="http://schemas.openxmlformats.org/drawingml/2006/main" xmlns:r="http://schemas.openxmlformats.org/officeDocument/2006/relationships" xmlns:p="http://schemas.openxmlformats.org/presentationml/2006/main">
+  <p:cSld>
+    <p:spTree>
+      <p:nvGrpSpPr>
+        <p:cNvPr id="1" name=""/>
+        <p:cNvGrpSpPr/>
+        <p:nvPr/>
+      </p:nvGrpSpPr>
+      <p:grpSpPr>
+        <a:xfrm>
+          <a:off x="0" y="0"/>
+          <a:ext cx="0" cy="0"/>
+          <a:chOff x="0" y="0"/>
+          <a:chExt cx="0" cy="0"/>
+        </a:xfrm>
+      </p:grpSpPr>
+      <p:sp>
+        <p:nvSpPr>
+          <p:cNvPr id="2" name="Slide Image Placeholder 1"/>
+          <p:cNvSpPr>
+            <a:spLocks noGrp="1" noRot="1" noChangeAspect="1"/>
+          </p:cNvSpPr>
+          <p:nvPr>
+            <p:ph type="sldImg"/>
+          </p:nvPr>
+        </p:nvSpPr>
+        <p:spPr/>
+      </p:sp>
+      <p:sp>
+        <p:nvSpPr>
+          <p:cNvPr id="3" name="Notes Placeholder 2"/>
+          <p:cNvSpPr>
+            <a:spLocks noGrp="1"/>
+          </p:cNvSpPr>
+          <p:nvPr>
+            <p:ph type="body" idx="1"/>
+          </p:nvPr>
+        </p:nvSpPr>
+        <p:spPr/>
+        <p:txBody>
+          <a:bodyPr/>
+          <a:lstStyle/>
+          <a:p>
+            <a:r>
+              <a:rPr lang="en-GB" sz="1200" b="1" i="0" kern="1200" dirty="0">
+                <a:solidFill>
+                  <a:schemeClr val="tx1"/>
+                </a:solidFill>
+                <a:effectLst/>
+                <a:latin typeface="+mn-lt"/>
+                <a:ea typeface="+mn-ea"/>
+                <a:cs typeface="+mn-cs"/>
+              </a:rPr>
+              <a:t>Phishing is a type of cyberattack where attackers trick people into revealing sensitive information or installing malware by pretending to be a trusted source.</a:t>
+            </a:r>
+            <a:endParaRPr lang="en-GB" dirty="0"/>
+          </a:p>
+        </p:txBody>
+      </p:sp>
+      <p:sp>
+        <p:nvSpPr>
+          <p:cNvPr id="4" name="Slide Number Placeholder 3"/>
+          <p:cNvSpPr>
+            <a:spLocks noGrp="1"/>
+          </p:cNvSpPr>
+          <p:nvPr>
+            <p:ph type="sldNum" sz="quarter" idx="5"/>
+          </p:nvPr>
+        </p:nvSpPr>
+        <p:spPr/>
+        <p:txBody>
+          <a:bodyPr/>
+          <a:lstStyle/>
+          <a:p>
+            <a:fld id="{10AD07CF-CCD2-4BBE-9D05-93A1889B57FC}" type="slidenum">
+              <a:rPr lang="en-GB" smtClean="0"/>
+              <a:t>1</a:t>
+            </a:fld>
+            <a:endParaRPr lang="en-GB"/>
+          </a:p>
+        </p:txBody>
+      </p:sp>
+    </p:spTree>
+    <p:extLst>
+      <p:ext uri="{BB962C8B-B14F-4D97-AF65-F5344CB8AC3E}">
+        <p14:creationId xmlns:p14="http://schemas.microsoft.com/office/powerpoint/2010/main" val="174943395"/>
+      </p:ext>
+    </p:extLst>
+  </p:cSld>
+  <p:clrMapOvr>
+    <a:masterClrMapping/>
+  </p:clrMapOvr>
+</p:notes>
+</file>
+
 <file path=ppt/slideLayouts/slideLayout1.xml><?xml version="1.0" encoding="utf-8"?>
 <p:sldLayout xmlns:a="http://schemas.openxmlformats.org/drawingml/2006/main" xmlns:r="http://schemas.openxmlformats.org/officeDocument/2006/relationships" xmlns:p="http://schemas.openxmlformats.org/presentationml/2006/main" showMasterSp="0" type="title" preserve="1">
   <p:cSld name="Title Slide">
@@ -288,7 +737,7 @@
           <a:p>
             <a:fld id="{B04D14A0-AE39-4FDC-BCBA-1D6173085475}" type="datetimeFigureOut">
               <a:rPr lang="en-GB" smtClean="0"/>
-              <a:t>22/04/2026</a:t>
+              <a:t>25/04/2026</a:t>
             </a:fld>
             <a:endParaRPr lang="en-GB"/>
           </a:p>
@@ -516,7 +965,7 @@
           <a:p>
             <a:fld id="{B04D14A0-AE39-4FDC-BCBA-1D6173085475}" type="datetimeFigureOut">
               <a:rPr lang="en-GB" smtClean="0"/>
-              <a:t>22/04/2026</a:t>
+              <a:t>25/04/2026</a:t>
             </a:fld>
             <a:endParaRPr lang="en-GB"/>
           </a:p>
@@ -696,7 +1145,7 @@
           <a:p>
             <a:fld id="{B04D14A0-AE39-4FDC-BCBA-1D6173085475}" type="datetimeFigureOut">
               <a:rPr lang="en-GB" smtClean="0"/>
-              <a:t>22/04/2026</a:t>
+              <a:t>25/04/2026</a:t>
             </a:fld>
             <a:endParaRPr lang="en-GB"/>
           </a:p>
@@ -866,7 +1315,7 @@
           <a:p>
             <a:fld id="{B04D14A0-AE39-4FDC-BCBA-1D6173085475}" type="datetimeFigureOut">
               <a:rPr lang="en-GB" smtClean="0"/>
-              <a:t>22/04/2026</a:t>
+              <a:t>25/04/2026</a:t>
             </a:fld>
             <a:endParaRPr lang="en-GB"/>
           </a:p>
@@ -1120,7 +1569,7 @@
           <a:p>
             <a:fld id="{B04D14A0-AE39-4FDC-BCBA-1D6173085475}" type="datetimeFigureOut">
               <a:rPr lang="en-GB" smtClean="0"/>
-              <a:t>22/04/2026</a:t>
+              <a:t>25/04/2026</a:t>
             </a:fld>
             <a:endParaRPr lang="en-GB"/>
           </a:p>
@@ -1446,7 +1895,7 @@
           <a:p>
             <a:fld id="{B04D14A0-AE39-4FDC-BCBA-1D6173085475}" type="datetimeFigureOut">
               <a:rPr lang="en-GB" smtClean="0"/>
-              <a:t>22/04/2026</a:t>
+              <a:t>25/04/2026</a:t>
             </a:fld>
             <a:endParaRPr lang="en-GB"/>
           </a:p>
@@ -1897,7 +2346,7 @@
           <a:p>
             <a:fld id="{B04D14A0-AE39-4FDC-BCBA-1D6173085475}" type="datetimeFigureOut">
               <a:rPr lang="en-GB" smtClean="0"/>
-              <a:t>22/04/2026</a:t>
+              <a:t>25/04/2026</a:t>
             </a:fld>
             <a:endParaRPr lang="en-GB"/>
           </a:p>
@@ -2015,7 +2464,7 @@
           <a:p>
             <a:fld id="{B04D14A0-AE39-4FDC-BCBA-1D6173085475}" type="datetimeFigureOut">
               <a:rPr lang="en-GB" smtClean="0"/>
-              <a:t>22/04/2026</a:t>
+              <a:t>25/04/2026</a:t>
             </a:fld>
             <a:endParaRPr lang="en-GB"/>
           </a:p>
@@ -2110,7 +2559,7 @@
           <a:p>
             <a:fld id="{B04D14A0-AE39-4FDC-BCBA-1D6173085475}" type="datetimeFigureOut">
               <a:rPr lang="en-GB" smtClean="0"/>
-              <a:t>22/04/2026</a:t>
+              <a:t>25/04/2026</a:t>
             </a:fld>
             <a:endParaRPr lang="en-GB"/>
           </a:p>
@@ -2397,7 +2846,7 @@
           <a:p>
             <a:fld id="{B04D14A0-AE39-4FDC-BCBA-1D6173085475}" type="datetimeFigureOut">
               <a:rPr lang="en-GB" smtClean="0"/>
-              <a:t>22/04/2026</a:t>
+              <a:t>25/04/2026</a:t>
             </a:fld>
             <a:endParaRPr lang="en-GB"/>
           </a:p>
@@ -2719,7 +3168,7 @@
           <a:p>
             <a:fld id="{B04D14A0-AE39-4FDC-BCBA-1D6173085475}" type="datetimeFigureOut">
               <a:rPr lang="en-GB" smtClean="0"/>
-              <a:t>22/04/2026</a:t>
+              <a:t>25/04/2026</a:t>
             </a:fld>
             <a:endParaRPr lang="en-GB"/>
           </a:p>
@@ -2973,7 +3422,7 @@
           <a:p>
             <a:fld id="{B04D14A0-AE39-4FDC-BCBA-1D6173085475}" type="datetimeFigureOut">
               <a:rPr lang="en-GB" smtClean="0"/>
-              <a:t>22/04/2026</a:t>
+              <a:t>25/04/2026</a:t>
             </a:fld>
             <a:endParaRPr lang="en-GB"/>
           </a:p>
@@ -3694,7 +4143,7 @@
           <p:nvPr/>
         </p:nvPicPr>
         <p:blipFill>
-          <a:blip r:embed="rId2"/>
+          <a:blip r:embed="rId3"/>
           <a:stretch>
             <a:fillRect/>
           </a:stretch>
@@ -4645,7 +5094,7 @@
                   <a:ea typeface="Calibri" pitchFamily="34" charset="-122"/>
                   <a:cs typeface="Calibri" pitchFamily="34" charset="-120"/>
                 </a:rPr>
-                <a:t>3.  Delivery &amp; Lure</a:t>
+                <a:t>3.  Delivery Trap</a:t>
               </a:r>
               <a:endParaRPr lang="en-US" sz="1600" dirty="0"/>
             </a:p>
@@ -4917,7 +5366,7 @@
                 <a:ea typeface="Calibri" pitchFamily="34" charset="-122"/>
                 <a:cs typeface="Times New Roman" panose="02020603050405020304" pitchFamily="18" charset="0"/>
               </a:rPr>
-              <a:t>EMAIL KILL CHAIN</a:t>
+              <a:t>EMAIL LIFECYCLE</a:t>
             </a:r>
             <a:endParaRPr lang="en-US" sz="2000" dirty="0">
               <a:solidFill>
@@ -5007,18 +5456,31 @@
             <a:bodyPr wrap="square" lIns="0" tIns="0" rIns="0" bIns="0" rtlCol="0" anchor="ctr"/>
             <a:lstStyle/>
             <a:p>
-              <a:pPr marL="0" indent="0">
-                <a:buNone/>
-              </a:pPr>
               <a:r>
-                <a:rPr lang="en-US" sz="1600" b="1" dirty="0">
+                <a:rPr lang="en-GB" sz="1600" b="1" dirty="0">
                   <a:latin typeface="Calibri" pitchFamily="34" charset="0"/>
                   <a:ea typeface="Calibri" pitchFamily="34" charset="-122"/>
                   <a:cs typeface="Calibri" pitchFamily="34" charset="-120"/>
                 </a:rPr>
-                <a:t>Spear Phishing</a:t>
+                <a:t>Targeted</a:t>
               </a:r>
-              <a:endParaRPr lang="en-US" sz="1600" dirty="0"/>
+              <a:r>
+                <a:rPr lang="en-GB" sz="1600" dirty="0"/>
+                <a:t> </a:t>
+              </a:r>
+              <a:r>
+                <a:rPr lang="en-GB" sz="1600" b="1" dirty="0">
+                  <a:latin typeface="Calibri" pitchFamily="34" charset="0"/>
+                  <a:ea typeface="Calibri" pitchFamily="34" charset="-122"/>
+                  <a:cs typeface="Calibri" pitchFamily="34" charset="-120"/>
+                </a:rPr>
+                <a:t>Attack</a:t>
+              </a:r>
+              <a:endParaRPr lang="en-US" sz="1600" b="1" dirty="0">
+                <a:latin typeface="Calibri" pitchFamily="34" charset="0"/>
+                <a:ea typeface="Calibri" pitchFamily="34" charset="-122"/>
+                <a:cs typeface="Calibri" pitchFamily="34" charset="-120"/>
+              </a:endParaRPr>
             </a:p>
           </p:txBody>
         </p:sp>
@@ -5049,18 +5511,19 @@
             <a:bodyPr wrap="square" lIns="0" tIns="0" rIns="0" bIns="0" rtlCol="0" anchor="ctr"/>
             <a:lstStyle/>
             <a:p>
-              <a:pPr marL="0" indent="0">
-                <a:buNone/>
-              </a:pPr>
               <a:r>
-                <a:rPr lang="en-US" sz="1600" dirty="0">
+                <a:rPr lang="en-GB" sz="1600" dirty="0">
                   <a:latin typeface="Calibri" pitchFamily="34" charset="0"/>
                   <a:ea typeface="Calibri" pitchFamily="34" charset="-122"/>
                   <a:cs typeface="Calibri" pitchFamily="34" charset="-120"/>
                 </a:rPr>
-                <a:t>Targeted, personalised lure using victim context</a:t>
+                <a:t>Highly targeted phishing aimed at a specific person or organization</a:t>
               </a:r>
-              <a:endParaRPr lang="en-US" sz="1600" dirty="0"/>
+              <a:endParaRPr lang="en-US" sz="1600" dirty="0">
+                <a:latin typeface="Calibri" pitchFamily="34" charset="0"/>
+                <a:ea typeface="Calibri" pitchFamily="34" charset="-122"/>
+                <a:cs typeface="Calibri" pitchFamily="34" charset="-120"/>
+              </a:endParaRPr>
             </a:p>
           </p:txBody>
         </p:sp>
@@ -5279,18 +5742,19 @@
             <a:bodyPr wrap="square" lIns="0" tIns="0" rIns="0" bIns="0" rtlCol="0" anchor="ctr"/>
             <a:lstStyle/>
             <a:p>
-              <a:pPr marL="0" indent="0">
-                <a:buNone/>
-              </a:pPr>
               <a:r>
-                <a:rPr lang="en-US" sz="1600" dirty="0">
+                <a:rPr lang="en-GB" sz="1600" dirty="0">
                   <a:latin typeface="Calibri" pitchFamily="34" charset="0"/>
                   <a:ea typeface="Calibri" pitchFamily="34" charset="-122"/>
                   <a:cs typeface="Calibri" pitchFamily="34" charset="-120"/>
                 </a:rPr>
-                <a:t>Social engineering via financial gain promise</a:t>
+                <a:t>Asking for a small payment upfront to receive a large reward later</a:t>
               </a:r>
-              <a:endParaRPr lang="en-US" sz="1600" dirty="0"/>
+              <a:endParaRPr lang="en-US" sz="1600" dirty="0">
+                <a:latin typeface="Calibri" pitchFamily="34" charset="0"/>
+                <a:ea typeface="Calibri" pitchFamily="34" charset="-122"/>
+                <a:cs typeface="Calibri" pitchFamily="34" charset="-120"/>
+              </a:endParaRPr>
             </a:p>
           </p:txBody>
         </p:sp>
@@ -5352,18 +5816,31 @@
             <a:bodyPr wrap="square" lIns="0" tIns="0" rIns="0" bIns="0" rtlCol="0" anchor="ctr"/>
             <a:lstStyle/>
             <a:p>
-              <a:pPr marL="0" indent="0">
-                <a:buNone/>
-              </a:pPr>
               <a:r>
-                <a:rPr lang="en-US" sz="1600" b="1" dirty="0">
+                <a:rPr lang="en-GB" sz="1600" b="1" dirty="0">
                   <a:latin typeface="Calibri" pitchFamily="34" charset="0"/>
                   <a:ea typeface="Calibri" pitchFamily="34" charset="-122"/>
                   <a:cs typeface="Calibri" pitchFamily="34" charset="-120"/>
                 </a:rPr>
-                <a:t>Crypto Bait</a:t>
+                <a:t>Cryptocurrency</a:t>
               </a:r>
-              <a:endParaRPr lang="en-US" sz="1600" dirty="0"/>
+              <a:r>
+                <a:rPr lang="en-GB" sz="1600" dirty="0"/>
+                <a:t> </a:t>
+              </a:r>
+              <a:r>
+                <a:rPr lang="en-GB" sz="1600" b="1" dirty="0">
+                  <a:latin typeface="Calibri" pitchFamily="34" charset="0"/>
+                  <a:ea typeface="Calibri" pitchFamily="34" charset="-122"/>
+                  <a:cs typeface="Calibri" pitchFamily="34" charset="-120"/>
+                </a:rPr>
+                <a:t>Scam</a:t>
+              </a:r>
+              <a:endParaRPr lang="en-US" sz="1600" b="1" dirty="0">
+                <a:latin typeface="Calibri" pitchFamily="34" charset="0"/>
+                <a:ea typeface="Calibri" pitchFamily="34" charset="-122"/>
+                <a:cs typeface="Calibri" pitchFamily="34" charset="-120"/>
+              </a:endParaRPr>
             </a:p>
           </p:txBody>
         </p:sp>
@@ -5540,7 +6017,7 @@
         <p:spPr>
           <a:xfrm>
             <a:off x="294054" y="2762542"/>
-            <a:ext cx="3583305" cy="400110"/>
+            <a:ext cx="4573510" cy="400110"/>
           </a:xfrm>
           <a:prstGeom prst="rect">
             <a:avLst/>
@@ -5565,8 +6042,31 @@
                 <a:ea typeface="Calibri" pitchFamily="34" charset="-122"/>
                 <a:cs typeface="Times New Roman" panose="02020603050405020304" pitchFamily="18" charset="0"/>
               </a:rPr>
-              <a:t>ATTACK TAXONOMY</a:t>
+              <a:t>ATTACK </a:t>
             </a:r>
+            <a:r>
+              <a:rPr lang="en-GB" sz="2000" b="1" kern="0" spc="300" dirty="0">
+                <a:solidFill>
+                  <a:srgbClr val="0070C0"/>
+                </a:solidFill>
+                <a:latin typeface="Times New Roman" panose="02020603050405020304" pitchFamily="18" charset="0"/>
+                <a:ea typeface="Calibri" pitchFamily="34" charset="-122"/>
+                <a:cs typeface="Times New Roman" panose="02020603050405020304" pitchFamily="18" charset="0"/>
+              </a:rPr>
+              <a:t>CLASSIFICATION</a:t>
+            </a:r>
+            <a:r>
+              <a:rPr lang="en-GB" sz="2000" dirty="0"/>
+              <a:t> </a:t>
+            </a:r>
+            <a:endParaRPr lang="en-US" sz="2000" b="1" kern="0" spc="300" dirty="0">
+              <a:solidFill>
+                <a:srgbClr val="0070C0"/>
+              </a:solidFill>
+              <a:latin typeface="Times New Roman" panose="02020603050405020304" pitchFamily="18" charset="0"/>
+              <a:ea typeface="Calibri" pitchFamily="34" charset="-122"/>
+              <a:cs typeface="Times New Roman" panose="02020603050405020304" pitchFamily="18" charset="0"/>
+            </a:endParaRPr>
           </a:p>
         </p:txBody>
       </p:sp>
@@ -6713,65 +7213,11 @@
                 <a:ea typeface="Calibri" pitchFamily="34" charset="-122"/>
                 <a:cs typeface="Times New Roman" panose="02020603050405020304" pitchFamily="18" charset="0"/>
               </a:rPr>
-              <a:t>INGRESS &amp; EGRESS FILTERING IN PHISHGUARD</a:t>
+              <a:t>INGRESS &amp; EGRESS FILTERING</a:t>
             </a:r>
             <a:endParaRPr lang="en-US" sz="3200" b="1" dirty="0">
               <a:latin typeface="Times New Roman" panose="02020603050405020304" pitchFamily="18" charset="0"/>
               <a:ea typeface="Calibri" pitchFamily="34" charset="-122"/>
-              <a:cs typeface="Times New Roman" panose="02020603050405020304" pitchFamily="18" charset="0"/>
-            </a:endParaRPr>
-          </a:p>
-        </p:txBody>
-      </p:sp>
-      <p:sp>
-        <p:nvSpPr>
-          <p:cNvPr id="4" name="TextBox 3">
-            <a:extLst>
-              <a:ext uri="{FF2B5EF4-FFF2-40B4-BE49-F238E27FC236}">
-                <a16:creationId xmlns:a16="http://schemas.microsoft.com/office/drawing/2014/main" id="{0B3C2BC6-653C-BD8C-7F66-B38D12C16EC8}"/>
-              </a:ext>
-            </a:extLst>
-          </p:cNvPr>
-          <p:cNvSpPr txBox="1"/>
-          <p:nvPr/>
-        </p:nvSpPr>
-        <p:spPr>
-          <a:xfrm>
-            <a:off x="349044" y="1485838"/>
-            <a:ext cx="10795206" cy="646331"/>
-          </a:xfrm>
-          <a:prstGeom prst="rect">
-            <a:avLst/>
-          </a:prstGeom>
-          <a:noFill/>
-        </p:spPr>
-        <p:txBody>
-          <a:bodyPr wrap="square">
-            <a:spAutoFit/>
-          </a:bodyPr>
-          <a:lstStyle/>
-          <a:p>
-            <a:r>
-              <a:rPr lang="en-US" dirty="0" err="1">
-                <a:latin typeface="Times New Roman" panose="02020603050405020304" pitchFamily="18" charset="0"/>
-                <a:ea typeface="Calibri" pitchFamily="34" charset="-122"/>
-                <a:cs typeface="Times New Roman" panose="02020603050405020304" pitchFamily="18" charset="0"/>
-              </a:rPr>
-              <a:t>PhishGuard</a:t>
-            </a:r>
-            <a:r>
-              <a:rPr lang="en-US" dirty="0">
-                <a:latin typeface="Times New Roman" panose="02020603050405020304" pitchFamily="18" charset="0"/>
-                <a:ea typeface="Calibri" pitchFamily="34" charset="-122"/>
-                <a:cs typeface="Times New Roman" panose="02020603050405020304" pitchFamily="18" charset="0"/>
-              </a:rPr>
-              <a:t> parses the Authentication-Results header on every incoming email. Each failed protocol adds +2 to the risk score. </a:t>
-            </a:r>
-            <a:endParaRPr lang="en-US" dirty="0">
-              <a:solidFill>
-                <a:srgbClr val="FF0000"/>
-              </a:solidFill>
-              <a:latin typeface="Times New Roman" panose="02020603050405020304" pitchFamily="18" charset="0"/>
               <a:cs typeface="Times New Roman" panose="02020603050405020304" pitchFamily="18" charset="0"/>
             </a:endParaRPr>
           </a:p>
@@ -6791,8 +7237,8 @@
         </p:nvGrpSpPr>
         <p:grpSpPr>
           <a:xfrm>
-            <a:off x="432435" y="2132169"/>
-            <a:ext cx="10464166" cy="4438548"/>
+            <a:off x="349044" y="1143000"/>
+            <a:ext cx="10547557" cy="5427717"/>
             <a:chOff x="365760" y="1591056"/>
             <a:chExt cx="8412480" cy="3255264"/>
           </a:xfrm>
@@ -7712,8 +8158,8 @@
         </p:nvSpPr>
         <p:spPr>
           <a:xfrm>
-            <a:off x="219075" y="1225689"/>
-            <a:ext cx="11087100" cy="5355312"/>
+            <a:off x="139493" y="856357"/>
+            <a:ext cx="11087100" cy="6001643"/>
           </a:xfrm>
           <a:prstGeom prst="rect">
             <a:avLst/>
@@ -7729,14 +8175,7 @@
             <a:pPr>
               <a:buNone/>
             </a:pPr>
-            <a:r>
-              <a:rPr lang="en-GB" sz="1800" b="1" dirty="0">
-                <a:latin typeface="Times New Roman" panose="02020603050405020304" pitchFamily="18" charset="0"/>
-                <a:cs typeface="Times New Roman" panose="02020603050405020304" pitchFamily="18" charset="0"/>
-              </a:rPr>
-              <a:t>Detecting Coordinated Phishing Campaigns</a:t>
-            </a:r>
-            <a:endParaRPr lang="en-GB" sz="1800" dirty="0">
+            <a:endParaRPr lang="en-GB" sz="2400" dirty="0">
               <a:latin typeface="Times New Roman" panose="02020603050405020304" pitchFamily="18" charset="0"/>
               <a:cs typeface="Times New Roman" panose="02020603050405020304" pitchFamily="18" charset="0"/>
             </a:endParaRPr>
@@ -7746,56 +8185,7 @@
               <a:buNone/>
             </a:pPr>
             <a:r>
-              <a:rPr lang="en-GB" sz="1800" dirty="0">
-                <a:latin typeface="Times New Roman" panose="02020603050405020304" pitchFamily="18" charset="0"/>
-                <a:cs typeface="Times New Roman" panose="02020603050405020304" pitchFamily="18" charset="0"/>
-              </a:rPr>
-              <a:t>Beyond </a:t>
-            </a:r>
-            <a:r>
-              <a:rPr lang="en-GB" sz="1800" dirty="0" err="1">
-                <a:latin typeface="Times New Roman" panose="02020603050405020304" pitchFamily="18" charset="0"/>
-                <a:cs typeface="Times New Roman" panose="02020603050405020304" pitchFamily="18" charset="0"/>
-              </a:rPr>
-              <a:t>analyzing</a:t>
-            </a:r>
-            <a:r>
-              <a:rPr lang="en-GB" sz="1800" dirty="0">
-                <a:latin typeface="Times New Roman" panose="02020603050405020304" pitchFamily="18" charset="0"/>
-                <a:cs typeface="Times New Roman" panose="02020603050405020304" pitchFamily="18" charset="0"/>
-              </a:rPr>
-              <a:t> individual emails, </a:t>
-            </a:r>
-            <a:r>
-              <a:rPr lang="en-GB" sz="1800" dirty="0" err="1">
-                <a:latin typeface="Times New Roman" panose="02020603050405020304" pitchFamily="18" charset="0"/>
-                <a:cs typeface="Times New Roman" panose="02020603050405020304" pitchFamily="18" charset="0"/>
-              </a:rPr>
-              <a:t>PhishGuard</a:t>
-            </a:r>
-            <a:r>
-              <a:rPr lang="en-GB" sz="1800" dirty="0">
-                <a:latin typeface="Times New Roman" panose="02020603050405020304" pitchFamily="18" charset="0"/>
-                <a:cs typeface="Times New Roman" panose="02020603050405020304" pitchFamily="18" charset="0"/>
-              </a:rPr>
-              <a:t> identifies large-scale phishing campaigns by recognizing recurring patterns across multiple messages.</a:t>
-            </a:r>
-          </a:p>
-          <a:p>
-            <a:pPr>
-              <a:buNone/>
-            </a:pPr>
-            <a:endParaRPr lang="en-GB" dirty="0">
-              <a:latin typeface="Times New Roman" panose="02020603050405020304" pitchFamily="18" charset="0"/>
-              <a:cs typeface="Times New Roman" panose="02020603050405020304" pitchFamily="18" charset="0"/>
-            </a:endParaRPr>
-          </a:p>
-          <a:p>
-            <a:pPr>
-              <a:buNone/>
-            </a:pPr>
-            <a:r>
-              <a:rPr lang="en-GB" b="1" dirty="0">
+              <a:rPr lang="en-GB" sz="2400" b="1" dirty="0">
                 <a:latin typeface="Times New Roman" panose="02020603050405020304" pitchFamily="18" charset="0"/>
                 <a:cs typeface="Times New Roman" panose="02020603050405020304" pitchFamily="18" charset="0"/>
               </a:rPr>
@@ -7803,12 +8193,12 @@
             </a:r>
           </a:p>
           <a:p>
-            <a:pPr>
-              <a:buFont typeface="Arial" panose="020B0604020202020204" pitchFamily="34" charset="0"/>
-              <a:buChar char="•"/>
+            <a:pPr marL="800100" lvl="1" indent="-342900">
+              <a:buFont typeface="Wingdings" panose="05000000000000000000" pitchFamily="2" charset="2"/>
+              <a:buChar char="§"/>
             </a:pPr>
             <a:r>
-              <a:rPr lang="en-GB" dirty="0">
+              <a:rPr lang="en-GB" sz="2400" dirty="0">
                 <a:latin typeface="Times New Roman" panose="02020603050405020304" pitchFamily="18" charset="0"/>
                 <a:cs typeface="Times New Roman" panose="02020603050405020304" pitchFamily="18" charset="0"/>
               </a:rPr>
@@ -7816,12 +8206,12 @@
             </a:r>
           </a:p>
           <a:p>
-            <a:pPr>
-              <a:buFont typeface="Arial" panose="020B0604020202020204" pitchFamily="34" charset="0"/>
-              <a:buChar char="•"/>
+            <a:pPr marL="800100" lvl="1" indent="-342900">
+              <a:buFont typeface="Wingdings" panose="05000000000000000000" pitchFamily="2" charset="2"/>
+              <a:buChar char="§"/>
             </a:pPr>
             <a:r>
-              <a:rPr lang="en-GB" dirty="0">
+              <a:rPr lang="en-GB" sz="2400" dirty="0">
                 <a:latin typeface="Times New Roman" panose="02020603050405020304" pitchFamily="18" charset="0"/>
                 <a:cs typeface="Times New Roman" panose="02020603050405020304" pitchFamily="18" charset="0"/>
               </a:rPr>
@@ -7833,14 +8223,14 @@
               <a:buNone/>
             </a:pPr>
             <a:r>
-              <a:rPr lang="en-GB" b="1" dirty="0">
+              <a:rPr lang="en-GB" sz="2400" b="1" dirty="0">
                 <a:latin typeface="Times New Roman" panose="02020603050405020304" pitchFamily="18" charset="0"/>
                 <a:cs typeface="Times New Roman" panose="02020603050405020304" pitchFamily="18" charset="0"/>
               </a:rPr>
               <a:t>Example: </a:t>
             </a:r>
             <a:r>
-              <a:rPr lang="en-GB" dirty="0">
+              <a:rPr lang="en-GB" sz="2400" dirty="0">
                 <a:latin typeface="Times New Roman" panose="02020603050405020304" pitchFamily="18" charset="0"/>
                 <a:cs typeface="Times New Roman" panose="02020603050405020304" pitchFamily="18" charset="0"/>
               </a:rPr>
@@ -7851,14 +8241,14 @@
             <a:pPr>
               <a:buNone/>
             </a:pPr>
-            <a:endParaRPr lang="en-GB" dirty="0">
+            <a:endParaRPr lang="en-GB" sz="2400" dirty="0">
               <a:latin typeface="Times New Roman" panose="02020603050405020304" pitchFamily="18" charset="0"/>
               <a:cs typeface="Times New Roman" panose="02020603050405020304" pitchFamily="18" charset="0"/>
             </a:endParaRPr>
           </a:p>
           <a:p>
             <a:r>
-              <a:rPr lang="en-GB" b="1" dirty="0">
+              <a:rPr lang="en-GB" sz="2400" b="1" dirty="0">
                 <a:latin typeface="Times New Roman" panose="02020603050405020304" pitchFamily="18" charset="0"/>
                 <a:cs typeface="Times New Roman" panose="02020603050405020304" pitchFamily="18" charset="0"/>
               </a:rPr>
@@ -7866,8 +8256,12 @@
             </a:r>
           </a:p>
           <a:p>
+            <a:pPr marL="800100" lvl="1" indent="-342900">
+              <a:buFont typeface="Wingdings" panose="05000000000000000000" pitchFamily="2" charset="2"/>
+              <a:buChar char="§"/>
+            </a:pPr>
             <a:r>
-              <a:rPr lang="en-GB" dirty="0">
+              <a:rPr lang="en-GB" sz="2400" dirty="0">
                 <a:latin typeface="Times New Roman" panose="02020603050405020304" pitchFamily="18" charset="0"/>
                 <a:cs typeface="Times New Roman" panose="02020603050405020304" pitchFamily="18" charset="0"/>
               </a:rPr>
@@ -7875,8 +8269,12 @@
             </a:r>
           </a:p>
           <a:p>
+            <a:pPr marL="800100" lvl="1" indent="-342900">
+              <a:buFont typeface="Wingdings" panose="05000000000000000000" pitchFamily="2" charset="2"/>
+              <a:buChar char="§"/>
+            </a:pPr>
             <a:r>
-              <a:rPr lang="en-GB" dirty="0">
+              <a:rPr lang="en-GB" sz="2400" dirty="0">
                 <a:latin typeface="Times New Roman" panose="02020603050405020304" pitchFamily="18" charset="0"/>
                 <a:cs typeface="Times New Roman" panose="02020603050405020304" pitchFamily="18" charset="0"/>
               </a:rPr>
@@ -7885,14 +8283,14 @@
           </a:p>
           <a:p>
             <a:r>
-              <a:rPr lang="en-GB" b="1" dirty="0">
+              <a:rPr lang="en-GB" sz="2400" b="1" dirty="0">
                 <a:latin typeface="Times New Roman" panose="02020603050405020304" pitchFamily="18" charset="0"/>
                 <a:cs typeface="Times New Roman" panose="02020603050405020304" pitchFamily="18" charset="0"/>
               </a:rPr>
               <a:t>Example: </a:t>
             </a:r>
             <a:r>
-              <a:rPr lang="en-GB" dirty="0">
+              <a:rPr lang="en-GB" sz="2400" dirty="0">
                 <a:latin typeface="Times New Roman" panose="02020603050405020304" pitchFamily="18" charset="0"/>
                 <a:cs typeface="Times New Roman" panose="02020603050405020304" pitchFamily="18" charset="0"/>
               </a:rPr>
@@ -7903,7 +8301,7 @@
             <a:pPr>
               <a:buNone/>
             </a:pPr>
-            <a:endParaRPr lang="en-GB" dirty="0">
+            <a:endParaRPr lang="en-GB" sz="2400" dirty="0">
               <a:latin typeface="Times New Roman" panose="02020603050405020304" pitchFamily="18" charset="0"/>
               <a:cs typeface="Times New Roman" panose="02020603050405020304" pitchFamily="18" charset="0"/>
             </a:endParaRPr>
@@ -7913,7 +8311,7 @@
               <a:buNone/>
             </a:pPr>
             <a:r>
-              <a:rPr lang="en-GB" b="1" dirty="0">
+              <a:rPr lang="en-GB" sz="2400" b="1" dirty="0">
                 <a:latin typeface="Times New Roman" panose="02020603050405020304" pitchFamily="18" charset="0"/>
                 <a:cs typeface="Times New Roman" panose="02020603050405020304" pitchFamily="18" charset="0"/>
               </a:rPr>
@@ -7921,12 +8319,12 @@
             </a:r>
           </a:p>
           <a:p>
-            <a:pPr>
-              <a:buFont typeface="Arial" panose="020B0604020202020204" pitchFamily="34" charset="0"/>
-              <a:buChar char="•"/>
+            <a:pPr marL="800100" lvl="1" indent="-342900">
+              <a:buFont typeface="Wingdings" panose="05000000000000000000" pitchFamily="2" charset="2"/>
+              <a:buChar char="§"/>
             </a:pPr>
             <a:r>
-              <a:rPr lang="en-GB" dirty="0">
+              <a:rPr lang="en-GB" sz="2400" dirty="0">
                 <a:latin typeface="Times New Roman" panose="02020603050405020304" pitchFamily="18" charset="0"/>
                 <a:cs typeface="Times New Roman" panose="02020603050405020304" pitchFamily="18" charset="0"/>
               </a:rPr>
@@ -7934,12 +8332,12 @@
             </a:r>
           </a:p>
           <a:p>
-            <a:pPr>
-              <a:buFont typeface="Arial" panose="020B0604020202020204" pitchFamily="34" charset="0"/>
-              <a:buChar char="•"/>
+            <a:pPr marL="800100" lvl="1" indent="-342900">
+              <a:buFont typeface="Wingdings" panose="05000000000000000000" pitchFamily="2" charset="2"/>
+              <a:buChar char="§"/>
             </a:pPr>
             <a:r>
-              <a:rPr lang="en-GB" dirty="0">
+              <a:rPr lang="en-GB" sz="2400" dirty="0">
                 <a:latin typeface="Times New Roman" panose="02020603050405020304" pitchFamily="18" charset="0"/>
                 <a:cs typeface="Times New Roman" panose="02020603050405020304" pitchFamily="18" charset="0"/>
               </a:rPr>
@@ -7951,14 +8349,14 @@
               <a:buNone/>
             </a:pPr>
             <a:r>
-              <a:rPr lang="en-GB" b="1" dirty="0">
+              <a:rPr lang="en-GB" sz="2400" b="1" dirty="0">
                 <a:latin typeface="Times New Roman" panose="02020603050405020304" pitchFamily="18" charset="0"/>
                 <a:cs typeface="Times New Roman" panose="02020603050405020304" pitchFamily="18" charset="0"/>
               </a:rPr>
               <a:t>Example: </a:t>
             </a:r>
             <a:r>
-              <a:rPr lang="en-GB" dirty="0">
+              <a:rPr lang="en-GB" sz="2400" dirty="0">
                 <a:latin typeface="Times New Roman" panose="02020603050405020304" pitchFamily="18" charset="0"/>
                 <a:cs typeface="Times New Roman" panose="02020603050405020304" pitchFamily="18" charset="0"/>
               </a:rPr>
@@ -7969,7 +8367,7 @@
             <a:pPr>
               <a:buNone/>
             </a:pPr>
-            <a:endParaRPr lang="en-GB" sz="1800" dirty="0">
+            <a:endParaRPr lang="en-GB" sz="2400" dirty="0">
               <a:latin typeface="Times New Roman" panose="02020603050405020304" pitchFamily="18" charset="0"/>
               <a:cs typeface="Times New Roman" panose="02020603050405020304" pitchFamily="18" charset="0"/>
             </a:endParaRPr>
@@ -8069,10 +8467,10 @@
         </p:nvGrpSpPr>
         <p:grpSpPr>
           <a:xfrm>
-            <a:off x="365759" y="1164011"/>
-            <a:ext cx="10788015" cy="5513013"/>
+            <a:off x="365759" y="1164010"/>
+            <a:ext cx="10788015" cy="5274889"/>
             <a:chOff x="365759" y="1164011"/>
-            <a:chExt cx="10788015" cy="5513013"/>
+            <a:chExt cx="10788015" cy="4543896"/>
           </a:xfrm>
         </p:grpSpPr>
         <p:sp>
@@ -8261,7 +8659,7 @@
                 <a:buNone/>
               </a:pPr>
               <a:r>
-                <a:rPr lang="en-US" sz="1200" dirty="0">
+                <a:rPr lang="en-US" dirty="0">
                   <a:solidFill>
                     <a:srgbClr val="FFFFFF"/>
                   </a:solidFill>
@@ -8271,7 +8669,7 @@
                 </a:rPr>
                 <a:t>Parse Headers</a:t>
               </a:r>
-              <a:endParaRPr lang="en-US" sz="1200" dirty="0">
+              <a:endParaRPr lang="en-US" dirty="0">
                 <a:latin typeface="Times New Roman" panose="02020603050405020304" pitchFamily="18" charset="0"/>
                 <a:cs typeface="Times New Roman" panose="02020603050405020304" pitchFamily="18" charset="0"/>
               </a:endParaRPr>
@@ -8281,7 +8679,7 @@
                 <a:buNone/>
               </a:pPr>
               <a:r>
-                <a:rPr lang="en-US" sz="1200" dirty="0">
+                <a:rPr lang="en-US" dirty="0">
                   <a:solidFill>
                     <a:srgbClr val="FFFFFF"/>
                   </a:solidFill>
@@ -8291,7 +8689,7 @@
                 </a:rPr>
                 <a:t>&amp; Body</a:t>
               </a:r>
-              <a:endParaRPr lang="en-US" sz="1200" dirty="0">
+              <a:endParaRPr lang="en-US" dirty="0">
                 <a:latin typeface="Times New Roman" panose="02020603050405020304" pitchFamily="18" charset="0"/>
                 <a:cs typeface="Times New Roman" panose="02020603050405020304" pitchFamily="18" charset="0"/>
               </a:endParaRPr>
@@ -8908,7 +9306,7 @@
                 <a:buNone/>
               </a:pPr>
               <a:r>
-                <a:rPr lang="en-US" sz="1200" b="1" dirty="0">
+                <a:rPr lang="en-US" b="1" dirty="0">
                   <a:solidFill>
                     <a:srgbClr val="FFFFFF"/>
                   </a:solidFill>
@@ -8918,7 +9316,7 @@
                 </a:rPr>
                 <a:t>SAFE</a:t>
               </a:r>
-              <a:endParaRPr lang="en-US" sz="1200" dirty="0">
+              <a:endParaRPr lang="en-US" dirty="0">
                 <a:latin typeface="Times New Roman" panose="02020603050405020304" pitchFamily="18" charset="0"/>
                 <a:cs typeface="Times New Roman" panose="02020603050405020304" pitchFamily="18" charset="0"/>
               </a:endParaRPr>
@@ -8987,7 +9385,7 @@
                 <a:buNone/>
               </a:pPr>
               <a:r>
-                <a:rPr lang="en-US" sz="1200" b="1" dirty="0">
+                <a:rPr lang="en-US" b="1" dirty="0">
                   <a:solidFill>
                     <a:srgbClr val="FFFFFF"/>
                   </a:solidFill>
@@ -8997,7 +9395,7 @@
                 </a:rPr>
                 <a:t>LOW</a:t>
               </a:r>
-              <a:endParaRPr lang="en-US" sz="1200" dirty="0">
+              <a:endParaRPr lang="en-US" dirty="0">
                 <a:latin typeface="Times New Roman" panose="02020603050405020304" pitchFamily="18" charset="0"/>
                 <a:cs typeface="Times New Roman" panose="02020603050405020304" pitchFamily="18" charset="0"/>
               </a:endParaRPr>
@@ -9066,7 +9464,7 @@
                 <a:buNone/>
               </a:pPr>
               <a:r>
-                <a:rPr lang="en-US" sz="1200" b="1" dirty="0">
+                <a:rPr lang="en-US" b="1" dirty="0">
                   <a:solidFill>
                     <a:srgbClr val="FFFFFF"/>
                   </a:solidFill>
@@ -9076,7 +9474,7 @@
                 </a:rPr>
                 <a:t>MEDIUM</a:t>
               </a:r>
-              <a:endParaRPr lang="en-US" sz="1200" dirty="0">
+              <a:endParaRPr lang="en-US" dirty="0">
                 <a:latin typeface="Times New Roman" panose="02020603050405020304" pitchFamily="18" charset="0"/>
                 <a:cs typeface="Times New Roman" panose="02020603050405020304" pitchFamily="18" charset="0"/>
               </a:endParaRPr>
@@ -9145,7 +9543,7 @@
                 <a:buNone/>
               </a:pPr>
               <a:r>
-                <a:rPr lang="en-US" sz="1200" b="1" dirty="0">
+                <a:rPr lang="en-US" b="1" dirty="0">
                   <a:solidFill>
                     <a:srgbClr val="FFFFFF"/>
                   </a:solidFill>
@@ -9155,7 +9553,7 @@
                 </a:rPr>
                 <a:t>HIGH</a:t>
               </a:r>
-              <a:endParaRPr lang="en-US" sz="1200" dirty="0">
+              <a:endParaRPr lang="en-US" dirty="0">
                 <a:latin typeface="Times New Roman" panose="02020603050405020304" pitchFamily="18" charset="0"/>
                 <a:cs typeface="Times New Roman" panose="02020603050405020304" pitchFamily="18" charset="0"/>
               </a:endParaRPr>
@@ -9224,7 +9622,7 @@
                 <a:buNone/>
               </a:pPr>
               <a:r>
-                <a:rPr lang="en-US" sz="1200" b="1" dirty="0">
+                <a:rPr lang="en-US" b="1" dirty="0">
                   <a:solidFill>
                     <a:srgbClr val="FFFFFF"/>
                   </a:solidFill>
@@ -9234,7 +9632,7 @@
                 </a:rPr>
                 <a:t>CRITICAL</a:t>
               </a:r>
-              <a:endParaRPr lang="en-US" sz="1200" dirty="0">
+              <a:endParaRPr lang="en-US" dirty="0">
                 <a:latin typeface="Times New Roman" panose="02020603050405020304" pitchFamily="18" charset="0"/>
                 <a:cs typeface="Times New Roman" panose="02020603050405020304" pitchFamily="18" charset="0"/>
               </a:endParaRPr>
@@ -9256,7 +9654,7 @@
           <p:spPr>
             <a:xfrm>
               <a:off x="365759" y="3513143"/>
-              <a:ext cx="820827" cy="313538"/>
+              <a:ext cx="939166" cy="313538"/>
             </a:xfrm>
             <a:prstGeom prst="rect">
               <a:avLst/>
@@ -9272,7 +9670,7 @@
                 <a:buNone/>
               </a:pPr>
               <a:r>
-                <a:rPr lang="en-US" sz="1200" dirty="0">
+                <a:rPr lang="en-US" dirty="0">
                   <a:solidFill>
                     <a:srgbClr val="5A8FAA"/>
                   </a:solidFill>
@@ -9280,9 +9678,9 @@
                   <a:ea typeface="Calibri" pitchFamily="34" charset="-122"/>
                   <a:cs typeface="Times New Roman" panose="02020603050405020304" pitchFamily="18" charset="0"/>
                 </a:rPr>
-                <a:t>Score ≥</a:t>
+                <a:t>Score ≥ </a:t>
               </a:r>
-              <a:endParaRPr lang="en-US" sz="1200" dirty="0">
+              <a:endParaRPr lang="en-US" dirty="0">
                 <a:latin typeface="Times New Roman" panose="02020603050405020304" pitchFamily="18" charset="0"/>
                 <a:cs typeface="Times New Roman" panose="02020603050405020304" pitchFamily="18" charset="0"/>
               </a:endParaRPr>
@@ -9303,7 +9701,7 @@
           </p:nvSpPr>
           <p:spPr>
             <a:xfrm>
-              <a:off x="1069325" y="3513143"/>
+              <a:off x="1268668" y="3522959"/>
               <a:ext cx="1430585" cy="313538"/>
             </a:xfrm>
             <a:prstGeom prst="rect">
@@ -9320,7 +9718,7 @@
                 <a:buNone/>
               </a:pPr>
               <a:r>
-                <a:rPr lang="en-US" sz="1200" dirty="0">
+                <a:rPr lang="en-US" dirty="0">
                   <a:solidFill>
                     <a:srgbClr val="5A8FAA"/>
                   </a:solidFill>
@@ -9330,7 +9728,7 @@
                 </a:rPr>
                 <a:t>0</a:t>
               </a:r>
-              <a:endParaRPr lang="en-US" sz="1200" dirty="0">
+              <a:endParaRPr lang="en-US" dirty="0">
                 <a:latin typeface="Times New Roman" panose="02020603050405020304" pitchFamily="18" charset="0"/>
                 <a:cs typeface="Times New Roman" panose="02020603050405020304" pitchFamily="18" charset="0"/>
               </a:endParaRPr>
@@ -9368,7 +9766,7 @@
                 <a:buNone/>
               </a:pPr>
               <a:r>
-                <a:rPr lang="en-US" sz="1200" dirty="0">
+                <a:rPr lang="en-US" dirty="0">
                   <a:solidFill>
                     <a:srgbClr val="5A8FAA"/>
                   </a:solidFill>
@@ -9378,7 +9776,7 @@
                 </a:rPr>
                 <a:t>1</a:t>
               </a:r>
-              <a:endParaRPr lang="en-US" sz="1200" dirty="0">
+              <a:endParaRPr lang="en-US" dirty="0">
                 <a:latin typeface="Times New Roman" panose="02020603050405020304" pitchFamily="18" charset="0"/>
                 <a:cs typeface="Times New Roman" panose="02020603050405020304" pitchFamily="18" charset="0"/>
               </a:endParaRPr>
@@ -9416,7 +9814,7 @@
                 <a:buNone/>
               </a:pPr>
               <a:r>
-                <a:rPr lang="en-US" sz="1200" dirty="0">
+                <a:rPr lang="en-US" dirty="0">
                   <a:solidFill>
                     <a:srgbClr val="5A8FAA"/>
                   </a:solidFill>
@@ -9426,7 +9824,7 @@
                 </a:rPr>
                 <a:t>2–4</a:t>
               </a:r>
-              <a:endParaRPr lang="en-US" sz="1200" dirty="0">
+              <a:endParaRPr lang="en-US" dirty="0">
                 <a:latin typeface="Times New Roman" panose="02020603050405020304" pitchFamily="18" charset="0"/>
                 <a:cs typeface="Times New Roman" panose="02020603050405020304" pitchFamily="18" charset="0"/>
               </a:endParaRPr>
@@ -9464,7 +9862,7 @@
                 <a:buNone/>
               </a:pPr>
               <a:r>
-                <a:rPr lang="en-US" sz="1200" dirty="0">
+                <a:rPr lang="en-US" dirty="0">
                   <a:solidFill>
                     <a:srgbClr val="5A8FAA"/>
                   </a:solidFill>
@@ -9474,7 +9872,7 @@
                 </a:rPr>
                 <a:t>5–9</a:t>
               </a:r>
-              <a:endParaRPr lang="en-US" sz="1200" dirty="0">
+              <a:endParaRPr lang="en-US" dirty="0">
                 <a:latin typeface="Times New Roman" panose="02020603050405020304" pitchFamily="18" charset="0"/>
                 <a:cs typeface="Times New Roman" panose="02020603050405020304" pitchFamily="18" charset="0"/>
               </a:endParaRPr>
@@ -9512,7 +9910,7 @@
                 <a:buNone/>
               </a:pPr>
               <a:r>
-                <a:rPr lang="en-US" sz="1200" dirty="0">
+                <a:rPr lang="en-US" dirty="0">
                   <a:solidFill>
                     <a:srgbClr val="5A8FAA"/>
                   </a:solidFill>
@@ -9522,7 +9920,7 @@
                 </a:rPr>
                 <a:t>≥10</a:t>
               </a:r>
-              <a:endParaRPr lang="en-US" sz="1200" dirty="0">
+              <a:endParaRPr lang="en-US" dirty="0">
                 <a:latin typeface="Times New Roman" panose="02020603050405020304" pitchFamily="18" charset="0"/>
                 <a:cs typeface="Times New Roman" panose="02020603050405020304" pitchFamily="18" charset="0"/>
               </a:endParaRPr>
@@ -9560,7 +9958,7 @@
                 <a:buNone/>
               </a:pPr>
               <a:r>
-                <a:rPr lang="en-US" sz="1600" b="1" kern="0" spc="300" dirty="0">
+                <a:rPr lang="en-US" b="1" kern="0" spc="300" dirty="0">
                   <a:solidFill>
                     <a:srgbClr val="00B050"/>
                   </a:solidFill>
@@ -9570,7 +9968,7 @@
                 </a:rPr>
                 <a:t>OUTGOING EMAIL PATH (DLP)</a:t>
               </a:r>
-              <a:endParaRPr lang="en-US" sz="1600" dirty="0">
+              <a:endParaRPr lang="en-US" dirty="0">
                 <a:solidFill>
                   <a:srgbClr val="00B050"/>
                 </a:solidFill>
@@ -10177,7 +10575,7 @@
                 <a:buNone/>
               </a:pPr>
               <a:r>
-                <a:rPr lang="en-US" sz="2000" dirty="0">
+                <a:rPr lang="en-US" dirty="0">
                   <a:solidFill>
                     <a:srgbClr val="FFFFFF"/>
                   </a:solidFill>
@@ -10187,7 +10585,7 @@
                 </a:rPr>
                 <a:t>Filename</a:t>
               </a:r>
-              <a:endParaRPr lang="en-US" sz="2000" dirty="0">
+              <a:endParaRPr lang="en-US" dirty="0">
                 <a:latin typeface="Times New Roman" panose="02020603050405020304" pitchFamily="18" charset="0"/>
                 <a:cs typeface="Times New Roman" panose="02020603050405020304" pitchFamily="18" charset="0"/>
               </a:endParaRPr>
@@ -10197,7 +10595,7 @@
                 <a:buNone/>
               </a:pPr>
               <a:r>
-                <a:rPr lang="en-US" sz="2000" dirty="0">
+                <a:rPr lang="en-US" dirty="0">
                   <a:solidFill>
                     <a:srgbClr val="FFFFFF"/>
                   </a:solidFill>
@@ -10207,7 +10605,7 @@
                 </a:rPr>
                 <a:t>Check</a:t>
               </a:r>
-              <a:endParaRPr lang="en-US" sz="2000" dirty="0">
+              <a:endParaRPr lang="en-US" dirty="0">
                 <a:latin typeface="Times New Roman" panose="02020603050405020304" pitchFamily="18" charset="0"/>
                 <a:cs typeface="Times New Roman" panose="02020603050405020304" pitchFamily="18" charset="0"/>
               </a:endParaRPr>
@@ -10353,51 +10751,20 @@
         </p:sp>
         <p:sp>
           <p:nvSpPr>
-            <p:cNvPr id="55" name="Shape 58">
-              <a:extLst>
-                <a:ext uri="{FF2B5EF4-FFF2-40B4-BE49-F238E27FC236}">
-                  <a16:creationId xmlns:a16="http://schemas.microsoft.com/office/drawing/2014/main" id="{62A4E6C5-2EB0-3BF2-87B9-F305B31774D1}"/>
-                </a:ext>
-              </a:extLst>
-            </p:cNvPr>
-            <p:cNvSpPr/>
-            <p:nvPr/>
-          </p:nvSpPr>
-          <p:spPr>
-            <a:xfrm>
-              <a:off x="365759" y="6021445"/>
-              <a:ext cx="4455919" cy="655579"/>
-            </a:xfrm>
-            <a:prstGeom prst="rect">
-              <a:avLst/>
-            </a:prstGeom>
-            <a:solidFill>
-              <a:srgbClr val="E63946"/>
-            </a:solidFill>
-            <a:ln w="12700">
-              <a:solidFill>
-                <a:srgbClr val="E63946"/>
-              </a:solidFill>
-              <a:prstDash val="solid"/>
-            </a:ln>
-          </p:spPr>
-        </p:sp>
-        <p:sp>
-          <p:nvSpPr>
-            <p:cNvPr id="56" name="Text 59">
-              <a:extLst>
-                <a:ext uri="{FF2B5EF4-FFF2-40B4-BE49-F238E27FC236}">
-                  <a16:creationId xmlns:a16="http://schemas.microsoft.com/office/drawing/2014/main" id="{E7EB8F7F-2A3E-C200-D332-E55D9CD55D77}"/>
-                </a:ext>
-              </a:extLst>
-            </p:cNvPr>
-            <p:cNvSpPr/>
-            <p:nvPr/>
-          </p:nvSpPr>
-          <p:spPr>
-            <a:xfrm>
-              <a:off x="483020" y="6021445"/>
-              <a:ext cx="4338658" cy="655579"/>
+            <p:cNvPr id="60" name="Text 6">
+              <a:extLst>
+                <a:ext uri="{FF2B5EF4-FFF2-40B4-BE49-F238E27FC236}">
+                  <a16:creationId xmlns:a16="http://schemas.microsoft.com/office/drawing/2014/main" id="{9CF7B732-42E6-0571-0160-A1BD505E83E5}"/>
+                </a:ext>
+              </a:extLst>
+            </p:cNvPr>
+            <p:cNvSpPr/>
+            <p:nvPr/>
+          </p:nvSpPr>
+          <p:spPr>
+            <a:xfrm>
+              <a:off x="365759" y="1164011"/>
+              <a:ext cx="4572000" cy="201168"/>
             </a:xfrm>
             <a:prstGeom prst="rect">
               <a:avLst/>
@@ -10413,134 +10780,7 @@
                 <a:buNone/>
               </a:pPr>
               <a:r>
-                <a:rPr lang="en-US" sz="1200" b="1" dirty="0">
-                  <a:solidFill>
-                    <a:srgbClr val="FFFFFF"/>
-                  </a:solidFill>
-                  <a:latin typeface="Times New Roman" panose="02020603050405020304" pitchFamily="18" charset="0"/>
-                  <a:ea typeface="Calibri" pitchFamily="34" charset="-122"/>
-                  <a:cs typeface="Times New Roman" panose="02020603050405020304" pitchFamily="18" charset="0"/>
-                </a:rPr>
-                <a:t>🚫  BLOCKED — CRITICAL pattern detected (PAN / Aadhaar / Card / Password)</a:t>
-              </a:r>
-              <a:endParaRPr lang="en-US" sz="1200" dirty="0">
-                <a:latin typeface="Times New Roman" panose="02020603050405020304" pitchFamily="18" charset="0"/>
-                <a:cs typeface="Times New Roman" panose="02020603050405020304" pitchFamily="18" charset="0"/>
-              </a:endParaRPr>
-            </a:p>
-          </p:txBody>
-        </p:sp>
-        <p:sp>
-          <p:nvSpPr>
-            <p:cNvPr id="57" name="Shape 60">
-              <a:extLst>
-                <a:ext uri="{FF2B5EF4-FFF2-40B4-BE49-F238E27FC236}">
-                  <a16:creationId xmlns:a16="http://schemas.microsoft.com/office/drawing/2014/main" id="{55D431AD-6FE5-98B3-388F-B6D3E42D0664}"/>
-                </a:ext>
-              </a:extLst>
-            </p:cNvPr>
-            <p:cNvSpPr/>
-            <p:nvPr/>
-          </p:nvSpPr>
-          <p:spPr>
-            <a:xfrm>
-              <a:off x="5056200" y="6021445"/>
-              <a:ext cx="6097574" cy="655579"/>
-            </a:xfrm>
-            <a:prstGeom prst="rect">
-              <a:avLst/>
-            </a:prstGeom>
-            <a:solidFill>
-              <a:srgbClr val="2DC653"/>
-            </a:solidFill>
-            <a:ln w="12700">
-              <a:solidFill>
-                <a:srgbClr val="2DC653"/>
-              </a:solidFill>
-              <a:prstDash val="solid"/>
-            </a:ln>
-          </p:spPr>
-        </p:sp>
-        <p:sp>
-          <p:nvSpPr>
-            <p:cNvPr id="58" name="Text 61">
-              <a:extLst>
-                <a:ext uri="{FF2B5EF4-FFF2-40B4-BE49-F238E27FC236}">
-                  <a16:creationId xmlns:a16="http://schemas.microsoft.com/office/drawing/2014/main" id="{5E15F6CA-BF60-5D89-8814-514FDC3F2C25}"/>
-                </a:ext>
-              </a:extLst>
-            </p:cNvPr>
-            <p:cNvSpPr/>
-            <p:nvPr/>
-          </p:nvSpPr>
-          <p:spPr>
-            <a:xfrm>
-              <a:off x="5173461" y="6021445"/>
-              <a:ext cx="5863052" cy="655579"/>
-            </a:xfrm>
-            <a:prstGeom prst="rect">
-              <a:avLst/>
-            </a:prstGeom>
-            <a:noFill/>
-            <a:ln/>
-          </p:spPr>
-          <p:txBody>
-            <a:bodyPr wrap="square" lIns="0" tIns="0" rIns="0" bIns="0" rtlCol="0" anchor="ctr"/>
-            <a:lstStyle/>
-            <a:p>
-              <a:pPr marL="0" indent="0">
-                <a:buNone/>
-              </a:pPr>
-              <a:r>
-                <a:rPr lang="en-US" sz="1200" b="1" dirty="0">
-                  <a:solidFill>
-                    <a:srgbClr val="060F1E"/>
-                  </a:solidFill>
-                  <a:latin typeface="Times New Roman" panose="02020603050405020304" pitchFamily="18" charset="0"/>
-                  <a:ea typeface="Calibri" pitchFamily="34" charset="-122"/>
-                  <a:cs typeface="Times New Roman" panose="02020603050405020304" pitchFamily="18" charset="0"/>
-                </a:rPr>
-                <a:t>✅  CLEARED — No sensitive data found. Safe to transmit.</a:t>
-              </a:r>
-              <a:endParaRPr lang="en-US" sz="1200" dirty="0">
-                <a:latin typeface="Times New Roman" panose="02020603050405020304" pitchFamily="18" charset="0"/>
-                <a:cs typeface="Times New Roman" panose="02020603050405020304" pitchFamily="18" charset="0"/>
-              </a:endParaRPr>
-            </a:p>
-          </p:txBody>
-        </p:sp>
-        <p:sp>
-          <p:nvSpPr>
-            <p:cNvPr id="60" name="Text 6">
-              <a:extLst>
-                <a:ext uri="{FF2B5EF4-FFF2-40B4-BE49-F238E27FC236}">
-                  <a16:creationId xmlns:a16="http://schemas.microsoft.com/office/drawing/2014/main" id="{9CF7B732-42E6-0571-0160-A1BD505E83E5}"/>
-                </a:ext>
-              </a:extLst>
-            </p:cNvPr>
-            <p:cNvSpPr/>
-            <p:nvPr/>
-          </p:nvSpPr>
-          <p:spPr>
-            <a:xfrm>
-              <a:off x="365759" y="1164011"/>
-              <a:ext cx="4572000" cy="201168"/>
-            </a:xfrm>
-            <a:prstGeom prst="rect">
-              <a:avLst/>
-            </a:prstGeom>
-            <a:noFill/>
-            <a:ln/>
-          </p:spPr>
-          <p:txBody>
-            <a:bodyPr wrap="square" lIns="0" tIns="0" rIns="0" bIns="0" rtlCol="0" anchor="ctr"/>
-            <a:lstStyle/>
-            <a:p>
-              <a:pPr marL="0" indent="0">
-                <a:buNone/>
-              </a:pPr>
-              <a:r>
-                <a:rPr lang="en-US" sz="1600" b="1" kern="0" spc="300" dirty="0">
+                <a:rPr lang="en-US" b="1" kern="0" spc="300" dirty="0">
                   <a:solidFill>
                     <a:srgbClr val="00B4D8"/>
                   </a:solidFill>
@@ -10550,7 +10790,7 @@
                 </a:rPr>
                 <a:t>INCOMING EMAIL PATH</a:t>
               </a:r>
-              <a:endParaRPr lang="en-US" sz="1600" dirty="0">
+              <a:endParaRPr lang="en-US" dirty="0">
                 <a:latin typeface="Times New Roman" panose="02020603050405020304" pitchFamily="18" charset="0"/>
                 <a:cs typeface="Times New Roman" panose="02020603050405020304" pitchFamily="18" charset="0"/>
               </a:endParaRPr>
@@ -10892,7 +11132,7 @@
                   <a:ea typeface="Calibri" pitchFamily="34" charset="-122"/>
                   <a:cs typeface="Times New Roman" panose="02020603050405020304" pitchFamily="18" charset="0"/>
                 </a:rPr>
-                <a:t>Luhn (Hans Peter Luhn, IBM 1954) is a checksum formula baked into every major card network — Visa, Mastercard, RuPay. Zero false positives.</a:t>
+                <a:t>Luhn (Hans Peter Luhn, IBM 1954) is a checksum formula based into every major card network — Visa, Mastercard, RuPay. Zero false positives.</a:t>
               </a:r>
               <a:endParaRPr lang="en-US" sz="1400" dirty="0">
                 <a:latin typeface="Times New Roman" panose="02020603050405020304" pitchFamily="18" charset="0"/>
@@ -11582,82 +11822,14 @@
             </a:ln>
             <a:effectLst/>
           </p:spPr>
-        </p:sp>
-        <p:sp>
-          <p:nvSpPr>
-            <p:cNvPr id="223" name="Text 167">
-              <a:extLst>
-                <a:ext uri="{FF2B5EF4-FFF2-40B4-BE49-F238E27FC236}">
-                  <a16:creationId xmlns:a16="http://schemas.microsoft.com/office/drawing/2014/main" id="{922F97F7-2BF8-A41E-B240-1E3E956EAF0D}"/>
-                </a:ext>
-              </a:extLst>
-            </p:cNvPr>
-            <p:cNvSpPr/>
-            <p:nvPr/>
-          </p:nvSpPr>
-          <p:spPr>
-            <a:xfrm>
-              <a:off x="5729637" y="5653130"/>
-              <a:ext cx="4994520" cy="456438"/>
-            </a:xfrm>
-            <a:prstGeom prst="rect">
-              <a:avLst/>
-            </a:prstGeom>
-            <a:noFill/>
-            <a:ln/>
-          </p:spPr>
           <p:txBody>
-            <a:bodyPr wrap="square" lIns="0" tIns="0" rIns="0" bIns="0" rtlCol="0" anchor="ctr"/>
+            <a:bodyPr/>
             <a:lstStyle/>
             <a:p>
-              <a:pPr marL="0" indent="0">
-                <a:buNone/>
-              </a:pPr>
-              <a:r>
-                <a:rPr lang="en-US" sz="1600" b="1" dirty="0">
-                  <a:latin typeface="Times New Roman" panose="02020603050405020304" pitchFamily="18" charset="0"/>
-                  <a:ea typeface="Calibri" pitchFamily="34" charset="-122"/>
-                  <a:cs typeface="Times New Roman" panose="02020603050405020304" pitchFamily="18" charset="0"/>
-                </a:rPr>
-                <a:t>Sum = 30   →   30 mod 10 = 0   →   VALID</a:t>
-              </a:r>
-              <a:endParaRPr lang="en-US" sz="1600" dirty="0">
-                <a:latin typeface="Times New Roman" panose="02020603050405020304" pitchFamily="18" charset="0"/>
-                <a:cs typeface="Times New Roman" panose="02020603050405020304" pitchFamily="18" charset="0"/>
-              </a:endParaRPr>
+              <a:endParaRPr lang="en-GB" dirty="0"/>
             </a:p>
           </p:txBody>
         </p:sp>
-        <p:pic>
-          <p:nvPicPr>
-            <p:cNvPr id="227" name="Picture 226">
-              <a:extLst>
-                <a:ext uri="{FF2B5EF4-FFF2-40B4-BE49-F238E27FC236}">
-                  <a16:creationId xmlns:a16="http://schemas.microsoft.com/office/drawing/2014/main" id="{4C215447-AF37-800B-75B3-67392F86DF9F}"/>
-                </a:ext>
-              </a:extLst>
-            </p:cNvPr>
-            <p:cNvPicPr>
-              <a:picLocks noChangeAspect="1"/>
-            </p:cNvPicPr>
-            <p:nvPr/>
-          </p:nvPicPr>
-          <p:blipFill>
-            <a:blip r:embed="rId2"/>
-            <a:stretch>
-              <a:fillRect/>
-            </a:stretch>
-          </p:blipFill>
-          <p:spPr>
-            <a:xfrm>
-              <a:off x="5695349" y="3422877"/>
-              <a:ext cx="5210902" cy="2076740"/>
-            </a:xfrm>
-            <a:prstGeom prst="rect">
-              <a:avLst/>
-            </a:prstGeom>
-          </p:spPr>
-        </p:pic>
         <p:sp>
           <p:nvSpPr>
             <p:cNvPr id="390" name="TextBox 389">
@@ -11705,6 +11877,140 @@
           </p:txBody>
         </p:sp>
       </p:grpSp>
+      <p:sp>
+        <p:nvSpPr>
+          <p:cNvPr id="3" name="TextBox 2">
+            <a:extLst>
+              <a:ext uri="{FF2B5EF4-FFF2-40B4-BE49-F238E27FC236}">
+                <a16:creationId xmlns:a16="http://schemas.microsoft.com/office/drawing/2014/main" id="{3804D52D-93B9-5532-70FB-A628BB894720}"/>
+              </a:ext>
+            </a:extLst>
+          </p:cNvPr>
+          <p:cNvSpPr txBox="1"/>
+          <p:nvPr/>
+        </p:nvSpPr>
+        <p:spPr>
+          <a:xfrm>
+            <a:off x="5646049" y="3305700"/>
+            <a:ext cx="5198482" cy="3293209"/>
+          </a:xfrm>
+          <a:prstGeom prst="rect">
+            <a:avLst/>
+          </a:prstGeom>
+          <a:noFill/>
+        </p:spPr>
+        <p:txBody>
+          <a:bodyPr wrap="square">
+            <a:spAutoFit/>
+          </a:bodyPr>
+          <a:lstStyle/>
+          <a:p>
+            <a:pPr>
+              <a:buNone/>
+            </a:pPr>
+            <a:r>
+              <a:rPr lang="en-GB" sz="1600" b="1" dirty="0"/>
+              <a:t>Example : 4539 1488 0343 6467</a:t>
+            </a:r>
+          </a:p>
+          <a:p>
+            <a:pPr>
+              <a:buNone/>
+            </a:pPr>
+            <a:endParaRPr lang="en-GB" sz="1600" b="1" dirty="0"/>
+          </a:p>
+          <a:p>
+            <a:pPr>
+              <a:buNone/>
+            </a:pPr>
+            <a:r>
+              <a:rPr lang="en-GB" sz="1600" dirty="0"/>
+              <a:t>Step 1: 7 6 4 6 3 4 3 0 8 8 4 1 9 3 5 4</a:t>
+            </a:r>
+          </a:p>
+          <a:p>
+            <a:pPr>
+              <a:buNone/>
+            </a:pPr>
+            <a:endParaRPr lang="en-GB" sz="1600" dirty="0"/>
+          </a:p>
+          <a:p>
+            <a:pPr>
+              <a:buNone/>
+            </a:pPr>
+            <a:r>
+              <a:rPr lang="en-GB" sz="1600" dirty="0"/>
+              <a:t>Step 2: </a:t>
+            </a:r>
+          </a:p>
+          <a:p>
+            <a:pPr>
+              <a:buNone/>
+            </a:pPr>
+            <a:r>
+              <a:rPr lang="en-GB" sz="1600" dirty="0"/>
+              <a:t>	</a:t>
+            </a:r>
+            <a:r>
+              <a:rPr lang="fr-FR" sz="1600" dirty="0"/>
+              <a:t>Original: 7 6 4 6 3 4 3 0 8 8 4 1 9 3 5 4</a:t>
+            </a:r>
+            <a:br>
+              <a:rPr lang="fr-FR" sz="1600" dirty="0"/>
+            </a:br>
+            <a:r>
+              <a:rPr lang="fr-FR" sz="1600" dirty="0"/>
+              <a:t>	Double: - 12 - 12 - 8 - 0 - 16 - 2 - 6 – 8</a:t>
+            </a:r>
+          </a:p>
+          <a:p>
+            <a:pPr>
+              <a:buNone/>
+            </a:pPr>
+            <a:endParaRPr lang="en-GB" sz="1600" dirty="0"/>
+          </a:p>
+          <a:p>
+            <a:pPr>
+              <a:buNone/>
+            </a:pPr>
+            <a:r>
+              <a:rPr lang="en-GB" sz="1600" dirty="0"/>
+              <a:t>Step 3: 7 3 4 3 3 8 3 0 8 7 4 2 9 6 5 8</a:t>
+            </a:r>
+          </a:p>
+          <a:p>
+            <a:pPr>
+              <a:buNone/>
+            </a:pPr>
+            <a:endParaRPr lang="en-GB" sz="1600" dirty="0"/>
+          </a:p>
+          <a:p>
+            <a:pPr>
+              <a:buNone/>
+            </a:pPr>
+            <a:r>
+              <a:rPr lang="en-GB" sz="1600" dirty="0"/>
+              <a:t>Step 4: 80</a:t>
+            </a:r>
+          </a:p>
+          <a:p>
+            <a:pPr>
+              <a:buNone/>
+            </a:pPr>
+            <a:endParaRPr lang="en-GB" sz="1600" dirty="0"/>
+          </a:p>
+          <a:p>
+            <a:pPr>
+              <a:buNone/>
+            </a:pPr>
+            <a:r>
+              <a:rPr lang="en-GB" sz="1600" dirty="0"/>
+              <a:t>Step 5: 80 % 10 = 0 [Valid card number]</a:t>
+            </a:r>
+            <a:endParaRPr lang="fr-FR" sz="1600" dirty="0"/>
+          </a:p>
+        </p:txBody>
+      </p:sp>
     </p:spTree>
     <p:extLst>
       <p:ext uri="{BB962C8B-B14F-4D97-AF65-F5344CB8AC3E}">
@@ -11775,21 +12081,84 @@
                 <a:ea typeface="Calibri" pitchFamily="34" charset="-122"/>
                 <a:cs typeface="Times New Roman" panose="02020603050405020304" pitchFamily="18" charset="0"/>
               </a:rPr>
-              <a:t>DLP OUTGOING SCAN — HOW IT WORKS</a:t>
+              <a:t>RULE-BASED DECISION MAKING</a:t>
             </a:r>
-            <a:endParaRPr lang="en-US" sz="3200" dirty="0">
-              <a:latin typeface="Times New Roman" panose="02020603050405020304" pitchFamily="18" charset="0"/>
-              <a:cs typeface="Times New Roman" panose="02020603050405020304" pitchFamily="18" charset="0"/>
+          </a:p>
+        </p:txBody>
+      </p:sp>
+      <p:sp>
+        <p:nvSpPr>
+          <p:cNvPr id="34" name="TextBox 33">
+            <a:extLst>
+              <a:ext uri="{FF2B5EF4-FFF2-40B4-BE49-F238E27FC236}">
+                <a16:creationId xmlns:a16="http://schemas.microsoft.com/office/drawing/2014/main" id="{09590341-D180-8860-F298-5FB694CD835E}"/>
+              </a:ext>
+            </a:extLst>
+          </p:cNvPr>
+          <p:cNvSpPr txBox="1"/>
+          <p:nvPr/>
+        </p:nvSpPr>
+        <p:spPr>
+          <a:xfrm>
+            <a:off x="139493" y="1010335"/>
+            <a:ext cx="11033332" cy="849472"/>
+          </a:xfrm>
+          <a:prstGeom prst="rect">
+            <a:avLst/>
+          </a:prstGeom>
+          <a:noFill/>
+        </p:spPr>
+        <p:txBody>
+          <a:bodyPr wrap="square">
+            <a:spAutoFit/>
+          </a:bodyPr>
+          <a:lstStyle/>
+          <a:p>
+            <a:pPr>
+              <a:spcBef>
+                <a:spcPts val="300"/>
+              </a:spcBef>
+              <a:spcAft>
+                <a:spcPts val="400"/>
+              </a:spcAft>
+              <a:buNone/>
+            </a:pPr>
+            <a:r>
+              <a:rPr lang="en-GB" sz="1800" dirty="0">
+                <a:solidFill>
+                  <a:srgbClr val="374151"/>
+                </a:solidFill>
+                <a:effectLst/>
+                <a:latin typeface="Times New Roman" panose="02020603050405020304" pitchFamily="18" charset="0"/>
+                <a:ea typeface="Arial" panose="020B0604020202020204" pitchFamily="34" charset="0"/>
+              </a:rPr>
+              <a:t>Risk Score = Sum of triggered indicator weights + attachment score + (SPF fail × 2) + (DKIM fail × 2)</a:t>
+            </a:r>
+          </a:p>
+          <a:p>
+            <a:pPr>
+              <a:spcBef>
+                <a:spcPts val="300"/>
+              </a:spcBef>
+              <a:spcAft>
+                <a:spcPts val="400"/>
+              </a:spcAft>
+              <a:buNone/>
+            </a:pPr>
+            <a:endParaRPr lang="en-GB" sz="1400" dirty="0">
+              <a:effectLst/>
+              <a:latin typeface="Arial" panose="020B0604020202020204" pitchFamily="34" charset="0"/>
+              <a:ea typeface="Arial" panose="020B0604020202020204" pitchFamily="34" charset="0"/>
             </a:endParaRPr>
           </a:p>
         </p:txBody>
       </p:sp>
       <p:grpSp>
         <p:nvGrpSpPr>
-          <p:cNvPr id="32" name="Group 31">
+          <p:cNvPr id="248" name="Group 247">
             <a:extLst>
               <a:ext uri="{FF2B5EF4-FFF2-40B4-BE49-F238E27FC236}">
-                <a16:creationId xmlns:a16="http://schemas.microsoft.com/office/drawing/2014/main" id="{418A6006-FBE7-6C68-BD0F-D9FE9757D5E6}"/>
+                <a16:creationId xmlns:a16="http://schemas.microsoft.com/office/drawing/2014/main" id="{7E862960-5D67-74D3-7C8A-820BE5F6BDBF}"/>
               </a:ext>
             </a:extLst>
           </p:cNvPr>
@@ -11798,62 +12167,92 @@
         </p:nvGrpSpPr>
         <p:grpSpPr>
           <a:xfrm>
-            <a:off x="294603" y="1191768"/>
-            <a:ext cx="10763921" cy="5514548"/>
-            <a:chOff x="365760" y="1572768"/>
-            <a:chExt cx="5120640" cy="3218688"/>
+            <a:off x="334923" y="1623614"/>
+            <a:ext cx="10697144" cy="3896653"/>
+            <a:chOff x="334923" y="1420414"/>
+            <a:chExt cx="10110076" cy="3515743"/>
           </a:xfrm>
         </p:grpSpPr>
         <p:sp>
           <p:nvSpPr>
-            <p:cNvPr id="2" name="Shape 7">
-              <a:extLst>
-                <a:ext uri="{FF2B5EF4-FFF2-40B4-BE49-F238E27FC236}">
-                  <a16:creationId xmlns:a16="http://schemas.microsoft.com/office/drawing/2014/main" id="{0BB68284-3DA1-411C-83CD-2215774E3BA9}"/>
-                </a:ext>
-              </a:extLst>
-            </p:cNvPr>
-            <p:cNvSpPr/>
-            <p:nvPr/>
-          </p:nvSpPr>
-          <p:spPr>
-            <a:xfrm>
-              <a:off x="365760" y="1572768"/>
-              <a:ext cx="5120640" cy="585216"/>
-            </a:xfrm>
-            <a:prstGeom prst="rect">
-              <a:avLst/>
-            </a:prstGeom>
-            <a:solidFill>
-              <a:schemeClr val="bg1"/>
-            </a:solidFill>
-            <a:ln w="12700">
-              <a:solidFill>
-                <a:srgbClr val="00B4D8"/>
-              </a:solidFill>
-              <a:prstDash val="solid"/>
-            </a:ln>
-            <a:effectLst/>
-          </p:spPr>
-        </p:sp>
-        <p:sp>
-          <p:nvSpPr>
-            <p:cNvPr id="3" name="Shape 8">
-              <a:extLst>
-                <a:ext uri="{FF2B5EF4-FFF2-40B4-BE49-F238E27FC236}">
-                  <a16:creationId xmlns:a16="http://schemas.microsoft.com/office/drawing/2014/main" id="{E2E99FC3-F645-90E7-51F9-D0554C20007A}"/>
-                </a:ext>
-              </a:extLst>
-            </p:cNvPr>
-            <p:cNvSpPr/>
-            <p:nvPr/>
-          </p:nvSpPr>
-          <p:spPr>
-            <a:xfrm>
-              <a:off x="475488" y="1700784"/>
-              <a:ext cx="329184" cy="329184"/>
-            </a:xfrm>
-            <a:prstGeom prst="ellipse">
+            <p:cNvPr id="113" name="Text 9">
+              <a:extLst>
+                <a:ext uri="{FF2B5EF4-FFF2-40B4-BE49-F238E27FC236}">
+                  <a16:creationId xmlns:a16="http://schemas.microsoft.com/office/drawing/2014/main" id="{C0BE5E2F-CC2C-4FF8-F503-9322DE482A7F}"/>
+                </a:ext>
+              </a:extLst>
+            </p:cNvPr>
+            <p:cNvSpPr/>
+            <p:nvPr/>
+          </p:nvSpPr>
+          <p:spPr>
+            <a:xfrm>
+              <a:off x="334923" y="1899211"/>
+              <a:ext cx="1389888" cy="483643"/>
+            </a:xfrm>
+            <a:prstGeom prst="rect">
+              <a:avLst/>
+            </a:prstGeom>
+            <a:noFill/>
+            <a:ln/>
+          </p:spPr>
+          <p:txBody>
+            <a:bodyPr wrap="square" lIns="0" tIns="0" rIns="0" bIns="0" rtlCol="0" anchor="ctr"/>
+            <a:lstStyle/>
+            <a:p>
+              <a:pPr marL="0" indent="0" algn="ctr">
+                <a:buNone/>
+              </a:pPr>
+              <a:r>
+                <a:rPr lang="en-US" sz="1200" b="1" dirty="0">
+                  <a:latin typeface="Times New Roman" panose="02020603050405020304" pitchFamily="18" charset="0"/>
+                  <a:ea typeface="Calibri" pitchFamily="34" charset="-122"/>
+                  <a:cs typeface="Times New Roman" panose="02020603050405020304" pitchFamily="18" charset="0"/>
+                </a:rPr>
+                <a:t>Incoming</a:t>
+              </a:r>
+              <a:endParaRPr lang="en-US" sz="1200" dirty="0">
+                <a:latin typeface="Times New Roman" panose="02020603050405020304" pitchFamily="18" charset="0"/>
+                <a:cs typeface="Times New Roman" panose="02020603050405020304" pitchFamily="18" charset="0"/>
+              </a:endParaRPr>
+            </a:p>
+            <a:p>
+              <a:pPr marL="0" indent="0" algn="ctr">
+                <a:buNone/>
+              </a:pPr>
+              <a:r>
+                <a:rPr lang="en-US" sz="1200" b="1" dirty="0">
+                  <a:latin typeface="Times New Roman" panose="02020603050405020304" pitchFamily="18" charset="0"/>
+                  <a:ea typeface="Calibri" pitchFamily="34" charset="-122"/>
+                  <a:cs typeface="Times New Roman" panose="02020603050405020304" pitchFamily="18" charset="0"/>
+                </a:rPr>
+                <a:t>.eml File</a:t>
+              </a:r>
+              <a:endParaRPr lang="en-US" sz="1200" dirty="0">
+                <a:latin typeface="Times New Roman" panose="02020603050405020304" pitchFamily="18" charset="0"/>
+                <a:cs typeface="Times New Roman" panose="02020603050405020304" pitchFamily="18" charset="0"/>
+              </a:endParaRPr>
+            </a:p>
+          </p:txBody>
+        </p:sp>
+        <p:sp>
+          <p:nvSpPr>
+            <p:cNvPr id="114" name="Shape 10">
+              <a:extLst>
+                <a:ext uri="{FF2B5EF4-FFF2-40B4-BE49-F238E27FC236}">
+                  <a16:creationId xmlns:a16="http://schemas.microsoft.com/office/drawing/2014/main" id="{948096C2-16B3-35D8-C896-D7D838A48A88}"/>
+                </a:ext>
+              </a:extLst>
+            </p:cNvPr>
+            <p:cNvSpPr/>
+            <p:nvPr/>
+          </p:nvSpPr>
+          <p:spPr>
+            <a:xfrm>
+              <a:off x="1755648" y="1994990"/>
+              <a:ext cx="201168" cy="138184"/>
+            </a:xfrm>
+            <a:prstGeom prst="rect">
               <a:avLst/>
             </a:prstGeom>
             <a:solidFill>
@@ -11869,161 +12268,20 @@
         </p:sp>
         <p:sp>
           <p:nvSpPr>
-            <p:cNvPr id="4" name="Text 9">
-              <a:extLst>
-                <a:ext uri="{FF2B5EF4-FFF2-40B4-BE49-F238E27FC236}">
-                  <a16:creationId xmlns:a16="http://schemas.microsoft.com/office/drawing/2014/main" id="{3B7DA558-C194-A4B8-80D0-37D8797F6E74}"/>
-                </a:ext>
-              </a:extLst>
-            </p:cNvPr>
-            <p:cNvSpPr/>
-            <p:nvPr/>
-          </p:nvSpPr>
-          <p:spPr>
-            <a:xfrm>
-              <a:off x="475488" y="1709928"/>
-              <a:ext cx="329184" cy="310896"/>
-            </a:xfrm>
-            <a:prstGeom prst="rect">
-              <a:avLst/>
-            </a:prstGeom>
-            <a:noFill/>
-            <a:ln/>
-          </p:spPr>
-          <p:txBody>
-            <a:bodyPr wrap="square" lIns="0" tIns="0" rIns="0" bIns="0" rtlCol="0" anchor="ctr"/>
-            <a:lstStyle/>
-            <a:p>
-              <a:pPr marL="0" indent="0" algn="ctr">
-                <a:buNone/>
-              </a:pPr>
-              <a:r>
-                <a:rPr lang="en-US" sz="1600" b="1" dirty="0">
-                  <a:solidFill>
-                    <a:srgbClr val="060F1E"/>
-                  </a:solidFill>
-                  <a:latin typeface="Times New Roman" panose="02020603050405020304" pitchFamily="18" charset="0"/>
-                  <a:ea typeface="Calibri" pitchFamily="34" charset="-122"/>
-                  <a:cs typeface="Times New Roman" panose="02020603050405020304" pitchFamily="18" charset="0"/>
-                </a:rPr>
-                <a:t>1</a:t>
-              </a:r>
-              <a:endParaRPr lang="en-US" sz="1600" dirty="0">
-                <a:latin typeface="Times New Roman" panose="02020603050405020304" pitchFamily="18" charset="0"/>
-                <a:cs typeface="Times New Roman" panose="02020603050405020304" pitchFamily="18" charset="0"/>
-              </a:endParaRPr>
-            </a:p>
-          </p:txBody>
-        </p:sp>
-        <p:sp>
-          <p:nvSpPr>
-            <p:cNvPr id="5" name="Text 10">
-              <a:extLst>
-                <a:ext uri="{FF2B5EF4-FFF2-40B4-BE49-F238E27FC236}">
-                  <a16:creationId xmlns:a16="http://schemas.microsoft.com/office/drawing/2014/main" id="{C8846FAA-8E1D-9727-484E-BEDD77596D7E}"/>
-                </a:ext>
-              </a:extLst>
-            </p:cNvPr>
-            <p:cNvSpPr/>
-            <p:nvPr/>
-          </p:nvSpPr>
-          <p:spPr>
-            <a:xfrm>
-              <a:off x="932688" y="1664208"/>
-              <a:ext cx="4425696" cy="219456"/>
-            </a:xfrm>
-            <a:prstGeom prst="rect">
-              <a:avLst/>
-            </a:prstGeom>
-            <a:noFill/>
-            <a:ln/>
-          </p:spPr>
-          <p:txBody>
-            <a:bodyPr wrap="square" lIns="0" tIns="0" rIns="0" bIns="0" rtlCol="0" anchor="ctr"/>
-            <a:lstStyle/>
-            <a:p>
-              <a:pPr marL="0" indent="0">
-                <a:buNone/>
-              </a:pPr>
-              <a:r>
-                <a:rPr lang="en-US" sz="1600" b="1" dirty="0">
-                  <a:latin typeface="Times New Roman" panose="02020603050405020304" pitchFamily="18" charset="0"/>
-                  <a:ea typeface="Calibri" pitchFamily="34" charset="-122"/>
-                  <a:cs typeface="Times New Roman" panose="02020603050405020304" pitchFamily="18" charset="0"/>
-                </a:rPr>
-                <a:t>Parse Body &amp; Attachments</a:t>
-              </a:r>
-              <a:endParaRPr lang="en-US" sz="1600" dirty="0">
-                <a:latin typeface="Times New Roman" panose="02020603050405020304" pitchFamily="18" charset="0"/>
-                <a:cs typeface="Times New Roman" panose="02020603050405020304" pitchFamily="18" charset="0"/>
-              </a:endParaRPr>
-            </a:p>
-          </p:txBody>
-        </p:sp>
-        <p:sp>
-          <p:nvSpPr>
-            <p:cNvPr id="6" name="Text 11">
-              <a:extLst>
-                <a:ext uri="{FF2B5EF4-FFF2-40B4-BE49-F238E27FC236}">
-                  <a16:creationId xmlns:a16="http://schemas.microsoft.com/office/drawing/2014/main" id="{9317464F-F0FE-03CB-FDB9-06B6B0D363C4}"/>
-                </a:ext>
-              </a:extLst>
-            </p:cNvPr>
-            <p:cNvSpPr/>
-            <p:nvPr/>
-          </p:nvSpPr>
-          <p:spPr>
-            <a:xfrm>
-              <a:off x="932688" y="1892808"/>
-              <a:ext cx="4425696" cy="219456"/>
-            </a:xfrm>
-            <a:prstGeom prst="rect">
-              <a:avLst/>
-            </a:prstGeom>
-            <a:noFill/>
-            <a:ln/>
-          </p:spPr>
-          <p:txBody>
-            <a:bodyPr wrap="square" lIns="0" tIns="0" rIns="0" bIns="0" rtlCol="0" anchor="ctr"/>
-            <a:lstStyle/>
-            <a:p>
-              <a:pPr marL="0" indent="0">
-                <a:buNone/>
-              </a:pPr>
-              <a:r>
-                <a:rPr lang="en-US" dirty="0">
-                  <a:solidFill>
-                    <a:srgbClr val="5A8FAA"/>
-                  </a:solidFill>
-                  <a:latin typeface="Times New Roman" panose="02020603050405020304" pitchFamily="18" charset="0"/>
-                  <a:ea typeface="Calibri" pitchFamily="34" charset="-122"/>
-                  <a:cs typeface="Times New Roman" panose="02020603050405020304" pitchFamily="18" charset="0"/>
-                </a:rPr>
-                <a:t>Extract plain text and HTML body. Collect attachment filenames and decode content for scanning.</a:t>
-              </a:r>
-              <a:endParaRPr lang="en-US" dirty="0">
-                <a:latin typeface="Times New Roman" panose="02020603050405020304" pitchFamily="18" charset="0"/>
-                <a:cs typeface="Times New Roman" panose="02020603050405020304" pitchFamily="18" charset="0"/>
-              </a:endParaRPr>
-            </a:p>
-          </p:txBody>
-        </p:sp>
-        <p:sp>
-          <p:nvSpPr>
-            <p:cNvPr id="7" name="Shape 12">
-              <a:extLst>
-                <a:ext uri="{FF2B5EF4-FFF2-40B4-BE49-F238E27FC236}">
-                  <a16:creationId xmlns:a16="http://schemas.microsoft.com/office/drawing/2014/main" id="{5AB9FF88-0528-DDC3-2574-682227282687}"/>
-                </a:ext>
-              </a:extLst>
-            </p:cNvPr>
-            <p:cNvSpPr/>
-            <p:nvPr/>
-          </p:nvSpPr>
-          <p:spPr>
-            <a:xfrm>
-              <a:off x="621792" y="2157984"/>
-              <a:ext cx="36576" cy="73152"/>
+            <p:cNvPr id="115" name="Shape 11">
+              <a:extLst>
+                <a:ext uri="{FF2B5EF4-FFF2-40B4-BE49-F238E27FC236}">
+                  <a16:creationId xmlns:a16="http://schemas.microsoft.com/office/drawing/2014/main" id="{ECD72A2E-5C55-6347-C13E-9C8771F997A8}"/>
+                </a:ext>
+              </a:extLst>
+            </p:cNvPr>
+            <p:cNvSpPr/>
+            <p:nvPr/>
+          </p:nvSpPr>
+          <p:spPr>
+            <a:xfrm>
+              <a:off x="1956816" y="1925898"/>
+              <a:ext cx="0" cy="0"/>
             </a:xfrm>
             <a:prstGeom prst="rect">
               <a:avLst/>
@@ -12041,54 +12299,890 @@
         </p:sp>
         <p:sp>
           <p:nvSpPr>
-            <p:cNvPr id="9" name="Shape 13">
-              <a:extLst>
-                <a:ext uri="{FF2B5EF4-FFF2-40B4-BE49-F238E27FC236}">
-                  <a16:creationId xmlns:a16="http://schemas.microsoft.com/office/drawing/2014/main" id="{D8546C1B-0E2D-DDFF-C817-E56803CA2CE1}"/>
-                </a:ext>
-              </a:extLst>
-            </p:cNvPr>
-            <p:cNvSpPr/>
-            <p:nvPr/>
-          </p:nvSpPr>
-          <p:spPr>
-            <a:xfrm>
-              <a:off x="365760" y="2231136"/>
-              <a:ext cx="5120640" cy="585216"/>
+            <p:cNvPr id="116" name="Text 14">
+              <a:extLst>
+                <a:ext uri="{FF2B5EF4-FFF2-40B4-BE49-F238E27FC236}">
+                  <a16:creationId xmlns:a16="http://schemas.microsoft.com/office/drawing/2014/main" id="{EAFA47E0-7E18-3B7B-B958-2B976B514FCD}"/>
+                </a:ext>
+              </a:extLst>
+            </p:cNvPr>
+            <p:cNvSpPr/>
+            <p:nvPr/>
+          </p:nvSpPr>
+          <p:spPr>
+            <a:xfrm>
+              <a:off x="1956816" y="1699556"/>
+              <a:ext cx="2011680" cy="253337"/>
+            </a:xfrm>
+            <a:prstGeom prst="rect">
+              <a:avLst/>
+            </a:prstGeom>
+            <a:noFill/>
+            <a:ln/>
+          </p:spPr>
+          <p:txBody>
+            <a:bodyPr wrap="square" lIns="0" tIns="0" rIns="0" bIns="0" rtlCol="0" anchor="ctr"/>
+            <a:lstStyle/>
+            <a:p>
+              <a:pPr marL="0" indent="0" algn="ctr">
+                <a:buNone/>
+              </a:pPr>
+              <a:r>
+                <a:rPr lang="en-US" sz="1200" b="1" kern="0" spc="200" dirty="0">
+                  <a:latin typeface="Times New Roman" panose="02020603050405020304" pitchFamily="18" charset="0"/>
+                  <a:ea typeface="Calibri" pitchFamily="34" charset="-122"/>
+                  <a:cs typeface="Times New Roman" panose="02020603050405020304" pitchFamily="18" charset="0"/>
+                </a:rPr>
+                <a:t>PARSE</a:t>
+              </a:r>
+              <a:endParaRPr lang="en-US" sz="1200" dirty="0">
+                <a:latin typeface="Times New Roman" panose="02020603050405020304" pitchFamily="18" charset="0"/>
+                <a:cs typeface="Times New Roman" panose="02020603050405020304" pitchFamily="18" charset="0"/>
+              </a:endParaRPr>
+            </a:p>
+          </p:txBody>
+        </p:sp>
+        <p:sp>
+          <p:nvSpPr>
+            <p:cNvPr id="118" name="Text 16">
+              <a:extLst>
+                <a:ext uri="{FF2B5EF4-FFF2-40B4-BE49-F238E27FC236}">
+                  <a16:creationId xmlns:a16="http://schemas.microsoft.com/office/drawing/2014/main" id="{82A4854D-E5B7-2CEE-81F2-F73B713E4EA1}"/>
+                </a:ext>
+              </a:extLst>
+            </p:cNvPr>
+            <p:cNvSpPr/>
+            <p:nvPr/>
+          </p:nvSpPr>
+          <p:spPr>
+            <a:xfrm>
+              <a:off x="2066543" y="1945872"/>
+              <a:ext cx="1760389" cy="253337"/>
+            </a:xfrm>
+            <a:prstGeom prst="rect">
+              <a:avLst/>
+            </a:prstGeom>
+            <a:noFill/>
+            <a:ln/>
+          </p:spPr>
+          <p:txBody>
+            <a:bodyPr wrap="square" lIns="0" tIns="0" rIns="0" bIns="0" rtlCol="0" anchor="ctr"/>
+            <a:lstStyle/>
+            <a:p>
+              <a:pPr marL="0" indent="0">
+                <a:buNone/>
+              </a:pPr>
+              <a:r>
+                <a:rPr lang="en-US" sz="1200" dirty="0">
+                  <a:latin typeface="Times New Roman" panose="02020603050405020304" pitchFamily="18" charset="0"/>
+                  <a:ea typeface="Calibri" pitchFamily="34" charset="-122"/>
+                  <a:cs typeface="Times New Roman" panose="02020603050405020304" pitchFamily="18" charset="0"/>
+                </a:rPr>
+                <a:t>Sender / From field</a:t>
+              </a:r>
+              <a:endParaRPr lang="en-US" sz="1200" dirty="0">
+                <a:latin typeface="Times New Roman" panose="02020603050405020304" pitchFamily="18" charset="0"/>
+                <a:cs typeface="Times New Roman" panose="02020603050405020304" pitchFamily="18" charset="0"/>
+              </a:endParaRPr>
+            </a:p>
+          </p:txBody>
+        </p:sp>
+        <p:sp>
+          <p:nvSpPr>
+            <p:cNvPr id="120" name="Text 18">
+              <a:extLst>
+                <a:ext uri="{FF2B5EF4-FFF2-40B4-BE49-F238E27FC236}">
+                  <a16:creationId xmlns:a16="http://schemas.microsoft.com/office/drawing/2014/main" id="{6D04F5C7-1FE6-08DB-E846-39CD5F6F157E}"/>
+                </a:ext>
+              </a:extLst>
+            </p:cNvPr>
+            <p:cNvSpPr/>
+            <p:nvPr/>
+          </p:nvSpPr>
+          <p:spPr>
+            <a:xfrm>
+              <a:off x="2066543" y="2130117"/>
+              <a:ext cx="1760389" cy="253337"/>
+            </a:xfrm>
+            <a:prstGeom prst="rect">
+              <a:avLst/>
+            </a:prstGeom>
+            <a:noFill/>
+            <a:ln/>
+          </p:spPr>
+          <p:txBody>
+            <a:bodyPr wrap="square" lIns="0" tIns="0" rIns="0" bIns="0" rtlCol="0" anchor="ctr"/>
+            <a:lstStyle/>
+            <a:p>
+              <a:pPr marL="0" indent="0">
+                <a:buNone/>
+              </a:pPr>
+              <a:r>
+                <a:rPr lang="en-US" sz="1200" dirty="0">
+                  <a:latin typeface="Times New Roman" panose="02020603050405020304" pitchFamily="18" charset="0"/>
+                  <a:ea typeface="Calibri" pitchFamily="34" charset="-122"/>
+                  <a:cs typeface="Times New Roman" panose="02020603050405020304" pitchFamily="18" charset="0"/>
+                </a:rPr>
+                <a:t>Subject &amp; Body</a:t>
+              </a:r>
+              <a:endParaRPr lang="en-US" sz="1200" dirty="0">
+                <a:latin typeface="Times New Roman" panose="02020603050405020304" pitchFamily="18" charset="0"/>
+                <a:cs typeface="Times New Roman" panose="02020603050405020304" pitchFamily="18" charset="0"/>
+              </a:endParaRPr>
+            </a:p>
+          </p:txBody>
+        </p:sp>
+        <p:sp>
+          <p:nvSpPr>
+            <p:cNvPr id="122" name="Text 20">
+              <a:extLst>
+                <a:ext uri="{FF2B5EF4-FFF2-40B4-BE49-F238E27FC236}">
+                  <a16:creationId xmlns:a16="http://schemas.microsoft.com/office/drawing/2014/main" id="{3919B227-3B48-79F0-249A-AC399A8745E3}"/>
+                </a:ext>
+              </a:extLst>
+            </p:cNvPr>
+            <p:cNvSpPr/>
+            <p:nvPr/>
+          </p:nvSpPr>
+          <p:spPr>
+            <a:xfrm>
+              <a:off x="2066543" y="2314362"/>
+              <a:ext cx="1760389" cy="253337"/>
+            </a:xfrm>
+            <a:prstGeom prst="rect">
+              <a:avLst/>
+            </a:prstGeom>
+            <a:noFill/>
+            <a:ln/>
+          </p:spPr>
+          <p:txBody>
+            <a:bodyPr wrap="square" lIns="0" tIns="0" rIns="0" bIns="0" rtlCol="0" anchor="ctr"/>
+            <a:lstStyle/>
+            <a:p>
+              <a:pPr marL="0" indent="0">
+                <a:buNone/>
+              </a:pPr>
+              <a:r>
+                <a:rPr lang="en-US" sz="1200" dirty="0">
+                  <a:latin typeface="Times New Roman" panose="02020603050405020304" pitchFamily="18" charset="0"/>
+                  <a:ea typeface="Calibri" pitchFamily="34" charset="-122"/>
+                  <a:cs typeface="Times New Roman" panose="02020603050405020304" pitchFamily="18" charset="0"/>
+                </a:rPr>
+                <a:t>All URLs</a:t>
+              </a:r>
+              <a:endParaRPr lang="en-US" sz="1200" dirty="0">
+                <a:latin typeface="Times New Roman" panose="02020603050405020304" pitchFamily="18" charset="0"/>
+                <a:cs typeface="Times New Roman" panose="02020603050405020304" pitchFamily="18" charset="0"/>
+              </a:endParaRPr>
+            </a:p>
+          </p:txBody>
+        </p:sp>
+        <p:sp>
+          <p:nvSpPr>
+            <p:cNvPr id="124" name="Text 22">
+              <a:extLst>
+                <a:ext uri="{FF2B5EF4-FFF2-40B4-BE49-F238E27FC236}">
+                  <a16:creationId xmlns:a16="http://schemas.microsoft.com/office/drawing/2014/main" id="{63F1EC13-FDE9-0844-035E-0BA4031B5E9A}"/>
+                </a:ext>
+              </a:extLst>
+            </p:cNvPr>
+            <p:cNvSpPr/>
+            <p:nvPr/>
+          </p:nvSpPr>
+          <p:spPr>
+            <a:xfrm>
+              <a:off x="2066543" y="2498607"/>
+              <a:ext cx="1760389" cy="253337"/>
+            </a:xfrm>
+            <a:prstGeom prst="rect">
+              <a:avLst/>
+            </a:prstGeom>
+            <a:noFill/>
+            <a:ln/>
+          </p:spPr>
+          <p:txBody>
+            <a:bodyPr wrap="square" lIns="0" tIns="0" rIns="0" bIns="0" rtlCol="0" anchor="ctr"/>
+            <a:lstStyle/>
+            <a:p>
+              <a:pPr marL="0" indent="0">
+                <a:buNone/>
+              </a:pPr>
+              <a:r>
+                <a:rPr lang="en-US" sz="1200" dirty="0">
+                  <a:latin typeface="Times New Roman" panose="02020603050405020304" pitchFamily="18" charset="0"/>
+                  <a:ea typeface="Calibri" pitchFamily="34" charset="-122"/>
+                  <a:cs typeface="Times New Roman" panose="02020603050405020304" pitchFamily="18" charset="0"/>
+                </a:rPr>
+                <a:t>Attachments</a:t>
+              </a:r>
+              <a:endParaRPr lang="en-US" sz="1200" dirty="0">
+                <a:latin typeface="Times New Roman" panose="02020603050405020304" pitchFamily="18" charset="0"/>
+                <a:cs typeface="Times New Roman" panose="02020603050405020304" pitchFamily="18" charset="0"/>
+              </a:endParaRPr>
+            </a:p>
+          </p:txBody>
+        </p:sp>
+        <p:sp>
+          <p:nvSpPr>
+            <p:cNvPr id="126" name="Text 24">
+              <a:extLst>
+                <a:ext uri="{FF2B5EF4-FFF2-40B4-BE49-F238E27FC236}">
+                  <a16:creationId xmlns:a16="http://schemas.microsoft.com/office/drawing/2014/main" id="{DB1BF2D8-E86D-677B-974C-8620F8BDD15E}"/>
+                </a:ext>
+              </a:extLst>
+            </p:cNvPr>
+            <p:cNvSpPr/>
+            <p:nvPr/>
+          </p:nvSpPr>
+          <p:spPr>
+            <a:xfrm>
+              <a:off x="2066543" y="2682851"/>
+              <a:ext cx="1760389" cy="253337"/>
+            </a:xfrm>
+            <a:prstGeom prst="rect">
+              <a:avLst/>
+            </a:prstGeom>
+            <a:noFill/>
+            <a:ln/>
+          </p:spPr>
+          <p:txBody>
+            <a:bodyPr wrap="square" lIns="0" tIns="0" rIns="0" bIns="0" rtlCol="0" anchor="ctr"/>
+            <a:lstStyle/>
+            <a:p>
+              <a:pPr marL="0" indent="0">
+                <a:buNone/>
+              </a:pPr>
+              <a:r>
+                <a:rPr lang="en-US" sz="1200" dirty="0">
+                  <a:latin typeface="Times New Roman" panose="02020603050405020304" pitchFamily="18" charset="0"/>
+                  <a:ea typeface="Calibri" pitchFamily="34" charset="-122"/>
+                  <a:cs typeface="Times New Roman" panose="02020603050405020304" pitchFamily="18" charset="0"/>
+                </a:rPr>
+                <a:t>Auth Headers (SPF/DKIM)</a:t>
+              </a:r>
+              <a:endParaRPr lang="en-US" sz="1200" dirty="0">
+                <a:latin typeface="Times New Roman" panose="02020603050405020304" pitchFamily="18" charset="0"/>
+                <a:cs typeface="Times New Roman" panose="02020603050405020304" pitchFamily="18" charset="0"/>
+              </a:endParaRPr>
+            </a:p>
+          </p:txBody>
+        </p:sp>
+        <p:sp>
+          <p:nvSpPr>
+            <p:cNvPr id="165" name="Shape 65">
+              <a:extLst>
+                <a:ext uri="{FF2B5EF4-FFF2-40B4-BE49-F238E27FC236}">
+                  <a16:creationId xmlns:a16="http://schemas.microsoft.com/office/drawing/2014/main" id="{6A0049A1-FCE8-8F41-DC9E-E11F3F588A8A}"/>
+                </a:ext>
+              </a:extLst>
+            </p:cNvPr>
+            <p:cNvSpPr/>
+            <p:nvPr/>
+          </p:nvSpPr>
+          <p:spPr>
+            <a:xfrm>
+              <a:off x="6632938" y="2049747"/>
+              <a:ext cx="424327" cy="149462"/>
             </a:xfrm>
             <a:prstGeom prst="rect">
               <a:avLst/>
             </a:prstGeom>
             <a:solidFill>
-              <a:schemeClr val="bg1"/>
+              <a:srgbClr val="00B4D8"/>
             </a:solidFill>
             <a:ln w="12700">
               <a:solidFill>
-                <a:srgbClr val="F4A261"/>
+                <a:srgbClr val="00B4D8"/>
               </a:solidFill>
               <a:prstDash val="solid"/>
             </a:ln>
-            <a:effectLst/>
-          </p:spPr>
-        </p:sp>
-        <p:sp>
-          <p:nvSpPr>
-            <p:cNvPr id="10" name="Shape 14">
-              <a:extLst>
-                <a:ext uri="{FF2B5EF4-FFF2-40B4-BE49-F238E27FC236}">
-                  <a16:creationId xmlns:a16="http://schemas.microsoft.com/office/drawing/2014/main" id="{CD35B92A-299E-765C-940B-5A77A1768816}"/>
-                </a:ext>
-              </a:extLst>
-            </p:cNvPr>
-            <p:cNvSpPr/>
-            <p:nvPr/>
-          </p:nvSpPr>
-          <p:spPr>
-            <a:xfrm>
-              <a:off x="475488" y="2359152"/>
-              <a:ext cx="329184" cy="329184"/>
-            </a:xfrm>
-            <a:prstGeom prst="ellipse">
+          </p:spPr>
+          <p:txBody>
+            <a:bodyPr/>
+            <a:lstStyle/>
+            <a:p>
+              <a:endParaRPr lang="en-GB" dirty="0"/>
+            </a:p>
+          </p:txBody>
+        </p:sp>
+        <p:sp>
+          <p:nvSpPr>
+            <p:cNvPr id="127" name="Shape 25">
+              <a:extLst>
+                <a:ext uri="{FF2B5EF4-FFF2-40B4-BE49-F238E27FC236}">
+                  <a16:creationId xmlns:a16="http://schemas.microsoft.com/office/drawing/2014/main" id="{B993EED4-92CF-AE60-53A1-47DB6A1522BF}"/>
+                </a:ext>
+              </a:extLst>
+            </p:cNvPr>
+            <p:cNvSpPr/>
+            <p:nvPr/>
+          </p:nvSpPr>
+          <p:spPr>
+            <a:xfrm>
+              <a:off x="3904485" y="1994990"/>
+              <a:ext cx="201168" cy="138184"/>
+            </a:xfrm>
+            <a:prstGeom prst="rect">
+              <a:avLst/>
+            </a:prstGeom>
+            <a:solidFill>
+              <a:srgbClr val="00B4D8"/>
+            </a:solidFill>
+            <a:ln w="12700">
+              <a:solidFill>
+                <a:srgbClr val="00B4D8"/>
+              </a:solidFill>
+              <a:prstDash val="solid"/>
+            </a:ln>
+          </p:spPr>
+        </p:sp>
+        <p:sp>
+          <p:nvSpPr>
+            <p:cNvPr id="166" name="Text 68">
+              <a:extLst>
+                <a:ext uri="{FF2B5EF4-FFF2-40B4-BE49-F238E27FC236}">
+                  <a16:creationId xmlns:a16="http://schemas.microsoft.com/office/drawing/2014/main" id="{566EBC2E-0098-D201-10B3-60E5418BC577}"/>
+                </a:ext>
+              </a:extLst>
+            </p:cNvPr>
+            <p:cNvSpPr/>
+            <p:nvPr/>
+          </p:nvSpPr>
+          <p:spPr>
+            <a:xfrm>
+              <a:off x="7159620" y="1787264"/>
+              <a:ext cx="1444752" cy="529704"/>
+            </a:xfrm>
+            <a:prstGeom prst="rect">
+              <a:avLst/>
+            </a:prstGeom>
+            <a:noFill/>
+            <a:ln/>
+          </p:spPr>
+          <p:txBody>
+            <a:bodyPr wrap="square" lIns="0" tIns="0" rIns="0" bIns="0" rtlCol="0" anchor="ctr"/>
+            <a:lstStyle/>
+            <a:p>
+              <a:pPr marL="0" indent="0" algn="ctr">
+                <a:buNone/>
+              </a:pPr>
+              <a:r>
+                <a:rPr lang="en-US" sz="1200" b="1" dirty="0">
+                  <a:latin typeface="Times New Roman" panose="02020603050405020304" pitchFamily="18" charset="0"/>
+                  <a:ea typeface="Calibri" pitchFamily="34" charset="-122"/>
+                  <a:cs typeface="Times New Roman" panose="02020603050405020304" pitchFamily="18" charset="0"/>
+                </a:rPr>
+                <a:t>RISK</a:t>
+              </a:r>
+              <a:endParaRPr lang="en-US" sz="1200" dirty="0">
+                <a:latin typeface="Times New Roman" panose="02020603050405020304" pitchFamily="18" charset="0"/>
+                <a:cs typeface="Times New Roman" panose="02020603050405020304" pitchFamily="18" charset="0"/>
+              </a:endParaRPr>
+            </a:p>
+            <a:p>
+              <a:pPr marL="0" indent="0" algn="ctr">
+                <a:buNone/>
+              </a:pPr>
+              <a:r>
+                <a:rPr lang="en-US" sz="1200" b="1" dirty="0">
+                  <a:latin typeface="Times New Roman" panose="02020603050405020304" pitchFamily="18" charset="0"/>
+                  <a:ea typeface="Calibri" pitchFamily="34" charset="-122"/>
+                  <a:cs typeface="Times New Roman" panose="02020603050405020304" pitchFamily="18" charset="0"/>
+                </a:rPr>
+                <a:t>SCORE</a:t>
+              </a:r>
+              <a:endParaRPr lang="en-US" sz="1200" dirty="0">
+                <a:latin typeface="Times New Roman" panose="02020603050405020304" pitchFamily="18" charset="0"/>
+                <a:cs typeface="Times New Roman" panose="02020603050405020304" pitchFamily="18" charset="0"/>
+              </a:endParaRPr>
+            </a:p>
+          </p:txBody>
+        </p:sp>
+        <p:sp>
+          <p:nvSpPr>
+            <p:cNvPr id="167" name="Text 69">
+              <a:extLst>
+                <a:ext uri="{FF2B5EF4-FFF2-40B4-BE49-F238E27FC236}">
+                  <a16:creationId xmlns:a16="http://schemas.microsoft.com/office/drawing/2014/main" id="{2DE3C235-3656-0EBF-6F01-406F29C46879}"/>
+                </a:ext>
+              </a:extLst>
+            </p:cNvPr>
+            <p:cNvSpPr/>
+            <p:nvPr/>
+          </p:nvSpPr>
+          <p:spPr>
+            <a:xfrm>
+              <a:off x="7232772" y="2386059"/>
+              <a:ext cx="1280160" cy="253337"/>
+            </a:xfrm>
+            <a:prstGeom prst="rect">
+              <a:avLst/>
+            </a:prstGeom>
+            <a:noFill/>
+            <a:ln/>
+          </p:spPr>
+          <p:txBody>
+            <a:bodyPr wrap="square" lIns="0" tIns="0" rIns="0" bIns="0" rtlCol="0" anchor="ctr"/>
+            <a:lstStyle/>
+            <a:p>
+              <a:pPr marL="0" indent="0">
+                <a:buNone/>
+              </a:pPr>
+              <a:r>
+                <a:rPr lang="en-US" sz="1200" dirty="0">
+                  <a:latin typeface="Times New Roman" panose="02020603050405020304" pitchFamily="18" charset="0"/>
+                  <a:ea typeface="Calibri" pitchFamily="34" charset="-122"/>
+                  <a:cs typeface="Times New Roman" panose="02020603050405020304" pitchFamily="18" charset="0"/>
+                </a:rPr>
+                <a:t>Score =</a:t>
+              </a:r>
+              <a:endParaRPr lang="en-US" sz="1200" dirty="0">
+                <a:latin typeface="Times New Roman" panose="02020603050405020304" pitchFamily="18" charset="0"/>
+                <a:cs typeface="Times New Roman" panose="02020603050405020304" pitchFamily="18" charset="0"/>
+              </a:endParaRPr>
+            </a:p>
+          </p:txBody>
+        </p:sp>
+        <p:sp>
+          <p:nvSpPr>
+            <p:cNvPr id="168" name="Text 70">
+              <a:extLst>
+                <a:ext uri="{FF2B5EF4-FFF2-40B4-BE49-F238E27FC236}">
+                  <a16:creationId xmlns:a16="http://schemas.microsoft.com/office/drawing/2014/main" id="{40640F16-D240-EFD3-BEDB-7950E8C4E481}"/>
+                </a:ext>
+              </a:extLst>
+            </p:cNvPr>
+            <p:cNvSpPr/>
+            <p:nvPr/>
+          </p:nvSpPr>
+          <p:spPr>
+            <a:xfrm>
+              <a:off x="7251060" y="2662427"/>
+              <a:ext cx="1261872" cy="276367"/>
+            </a:xfrm>
+            <a:prstGeom prst="rect">
+              <a:avLst/>
+            </a:prstGeom>
+            <a:noFill/>
+            <a:ln/>
+          </p:spPr>
+          <p:txBody>
+            <a:bodyPr wrap="square" lIns="0" tIns="0" rIns="0" bIns="0" rtlCol="0" anchor="ctr"/>
+            <a:lstStyle/>
+            <a:p>
+              <a:pPr marL="0" indent="0">
+                <a:buNone/>
+              </a:pPr>
+              <a:r>
+                <a:rPr lang="en-US" sz="1200" b="1" dirty="0">
+                  <a:latin typeface="Times New Roman" panose="02020603050405020304" pitchFamily="18" charset="0"/>
+                  <a:ea typeface="Calibri" pitchFamily="34" charset="-122"/>
+                  <a:cs typeface="Times New Roman" panose="02020603050405020304" pitchFamily="18" charset="0"/>
+                </a:rPr>
+                <a:t>Σ Indicator Weights</a:t>
+              </a:r>
+              <a:endParaRPr lang="en-US" sz="1200" dirty="0">
+                <a:latin typeface="Times New Roman" panose="02020603050405020304" pitchFamily="18" charset="0"/>
+                <a:cs typeface="Times New Roman" panose="02020603050405020304" pitchFamily="18" charset="0"/>
+              </a:endParaRPr>
+            </a:p>
+          </p:txBody>
+        </p:sp>
+        <p:sp>
+          <p:nvSpPr>
+            <p:cNvPr id="169" name="Text 71">
+              <a:extLst>
+                <a:ext uri="{FF2B5EF4-FFF2-40B4-BE49-F238E27FC236}">
+                  <a16:creationId xmlns:a16="http://schemas.microsoft.com/office/drawing/2014/main" id="{D92C21E6-2B41-BDE2-8F4A-2A99BC56B7F1}"/>
+                </a:ext>
+              </a:extLst>
+            </p:cNvPr>
+            <p:cNvSpPr/>
+            <p:nvPr/>
+          </p:nvSpPr>
+          <p:spPr>
+            <a:xfrm>
+              <a:off x="7251060" y="2984855"/>
+              <a:ext cx="1261872" cy="276367"/>
+            </a:xfrm>
+            <a:prstGeom prst="rect">
+              <a:avLst/>
+            </a:prstGeom>
+            <a:noFill/>
+            <a:ln/>
+          </p:spPr>
+          <p:txBody>
+            <a:bodyPr wrap="square" lIns="0" tIns="0" rIns="0" bIns="0" rtlCol="0" anchor="ctr"/>
+            <a:lstStyle/>
+            <a:p>
+              <a:pPr marL="0" indent="0">
+                <a:buNone/>
+              </a:pPr>
+              <a:r>
+                <a:rPr lang="en-US" sz="1200" dirty="0">
+                  <a:latin typeface="Times New Roman" panose="02020603050405020304" pitchFamily="18" charset="0"/>
+                  <a:ea typeface="Calibri" pitchFamily="34" charset="-122"/>
+                  <a:cs typeface="Times New Roman" panose="02020603050405020304" pitchFamily="18" charset="0"/>
+                </a:rPr>
+                <a:t>+ Attachment Score</a:t>
+              </a:r>
+              <a:endParaRPr lang="en-US" sz="1200" dirty="0">
+                <a:latin typeface="Times New Roman" panose="02020603050405020304" pitchFamily="18" charset="0"/>
+                <a:cs typeface="Times New Roman" panose="02020603050405020304" pitchFamily="18" charset="0"/>
+              </a:endParaRPr>
+            </a:p>
+          </p:txBody>
+        </p:sp>
+        <p:sp>
+          <p:nvSpPr>
+            <p:cNvPr id="170" name="Text 72">
+              <a:extLst>
+                <a:ext uri="{FF2B5EF4-FFF2-40B4-BE49-F238E27FC236}">
+                  <a16:creationId xmlns:a16="http://schemas.microsoft.com/office/drawing/2014/main" id="{2E5DFCC5-3D5D-14C9-E377-BAA5DA3386E2}"/>
+                </a:ext>
+              </a:extLst>
+            </p:cNvPr>
+            <p:cNvSpPr/>
+            <p:nvPr/>
+          </p:nvSpPr>
+          <p:spPr>
+            <a:xfrm>
+              <a:off x="7251060" y="3307283"/>
+              <a:ext cx="1261872" cy="276367"/>
+            </a:xfrm>
+            <a:prstGeom prst="rect">
+              <a:avLst/>
+            </a:prstGeom>
+            <a:noFill/>
+            <a:ln/>
+          </p:spPr>
+          <p:txBody>
+            <a:bodyPr wrap="square" lIns="0" tIns="0" rIns="0" bIns="0" rtlCol="0" anchor="ctr"/>
+            <a:lstStyle/>
+            <a:p>
+              <a:pPr marL="0" indent="0">
+                <a:buNone/>
+              </a:pPr>
+              <a:r>
+                <a:rPr lang="en-US" sz="1200" dirty="0">
+                  <a:latin typeface="Times New Roman" panose="02020603050405020304" pitchFamily="18" charset="0"/>
+                  <a:ea typeface="Calibri" pitchFamily="34" charset="-122"/>
+                  <a:cs typeface="Times New Roman" panose="02020603050405020304" pitchFamily="18" charset="0"/>
+                </a:rPr>
+                <a:t>+ SPF fail × 2</a:t>
+              </a:r>
+              <a:endParaRPr lang="en-US" sz="1200" dirty="0">
+                <a:latin typeface="Times New Roman" panose="02020603050405020304" pitchFamily="18" charset="0"/>
+                <a:cs typeface="Times New Roman" panose="02020603050405020304" pitchFamily="18" charset="0"/>
+              </a:endParaRPr>
+            </a:p>
+          </p:txBody>
+        </p:sp>
+        <p:sp>
+          <p:nvSpPr>
+            <p:cNvPr id="171" name="Text 73">
+              <a:extLst>
+                <a:ext uri="{FF2B5EF4-FFF2-40B4-BE49-F238E27FC236}">
+                  <a16:creationId xmlns:a16="http://schemas.microsoft.com/office/drawing/2014/main" id="{EC0EC528-ED5B-204E-7900-C7AC802E321B}"/>
+                </a:ext>
+              </a:extLst>
+            </p:cNvPr>
+            <p:cNvSpPr/>
+            <p:nvPr/>
+          </p:nvSpPr>
+          <p:spPr>
+            <a:xfrm>
+              <a:off x="7251060" y="3629712"/>
+              <a:ext cx="1261872" cy="276367"/>
+            </a:xfrm>
+            <a:prstGeom prst="rect">
+              <a:avLst/>
+            </a:prstGeom>
+            <a:noFill/>
+            <a:ln/>
+          </p:spPr>
+          <p:txBody>
+            <a:bodyPr wrap="square" lIns="0" tIns="0" rIns="0" bIns="0" rtlCol="0" anchor="ctr"/>
+            <a:lstStyle/>
+            <a:p>
+              <a:pPr marL="0" indent="0">
+                <a:buNone/>
+              </a:pPr>
+              <a:r>
+                <a:rPr lang="en-US" sz="1200" dirty="0">
+                  <a:latin typeface="Times New Roman" panose="02020603050405020304" pitchFamily="18" charset="0"/>
+                  <a:ea typeface="Calibri" pitchFamily="34" charset="-122"/>
+                  <a:cs typeface="Times New Roman" panose="02020603050405020304" pitchFamily="18" charset="0"/>
+                </a:rPr>
+                <a:t>+ DKIM fail × 2</a:t>
+              </a:r>
+              <a:endParaRPr lang="en-US" sz="1200" dirty="0">
+                <a:latin typeface="Times New Roman" panose="02020603050405020304" pitchFamily="18" charset="0"/>
+                <a:cs typeface="Times New Roman" panose="02020603050405020304" pitchFamily="18" charset="0"/>
+              </a:endParaRPr>
+            </a:p>
+          </p:txBody>
+        </p:sp>
+        <p:sp>
+          <p:nvSpPr>
+            <p:cNvPr id="174" name="Shape 76">
+              <a:extLst>
+                <a:ext uri="{FF2B5EF4-FFF2-40B4-BE49-F238E27FC236}">
+                  <a16:creationId xmlns:a16="http://schemas.microsoft.com/office/drawing/2014/main" id="{6DAD8282-03E7-3365-0DAB-814AB9727623}"/>
+                </a:ext>
+              </a:extLst>
+            </p:cNvPr>
+            <p:cNvSpPr/>
+            <p:nvPr/>
+          </p:nvSpPr>
+          <p:spPr>
+            <a:xfrm>
+              <a:off x="8528953" y="2176177"/>
+              <a:ext cx="538842" cy="185013"/>
+            </a:xfrm>
+            <a:prstGeom prst="rect">
+              <a:avLst/>
+            </a:prstGeom>
+            <a:solidFill>
+              <a:srgbClr val="00B4D8"/>
+            </a:solidFill>
+            <a:ln w="12700">
+              <a:solidFill>
+                <a:srgbClr val="00B4D8"/>
+              </a:solidFill>
+              <a:prstDash val="solid"/>
+            </a:ln>
+          </p:spPr>
+        </p:sp>
+        <p:sp>
+          <p:nvSpPr>
+            <p:cNvPr id="175" name="Text 78">
+              <a:extLst>
+                <a:ext uri="{FF2B5EF4-FFF2-40B4-BE49-F238E27FC236}">
+                  <a16:creationId xmlns:a16="http://schemas.microsoft.com/office/drawing/2014/main" id="{7EA23B34-B6F4-18DE-7B17-66CD9B2A9D2A}"/>
+                </a:ext>
+              </a:extLst>
+            </p:cNvPr>
+            <p:cNvSpPr/>
+            <p:nvPr/>
+          </p:nvSpPr>
+          <p:spPr>
+            <a:xfrm>
+              <a:off x="9177523" y="1762263"/>
+              <a:ext cx="1100179" cy="287485"/>
+            </a:xfrm>
+            <a:prstGeom prst="rect">
+              <a:avLst/>
+            </a:prstGeom>
+            <a:noFill/>
+            <a:ln/>
+          </p:spPr>
+          <p:txBody>
+            <a:bodyPr wrap="square" lIns="0" tIns="0" rIns="0" bIns="0" rtlCol="0" anchor="ctr"/>
+            <a:lstStyle/>
+            <a:p>
+              <a:pPr marL="0" indent="0" algn="ctr">
+                <a:buNone/>
+              </a:pPr>
+              <a:r>
+                <a:rPr lang="en-US" sz="1200" b="1" dirty="0">
+                  <a:latin typeface="Times New Roman" panose="02020603050405020304" pitchFamily="18" charset="0"/>
+                  <a:ea typeface="Calibri" pitchFamily="34" charset="-122"/>
+                  <a:cs typeface="Times New Roman" panose="02020603050405020304" pitchFamily="18" charset="0"/>
+                </a:rPr>
+                <a:t>CRITICAL</a:t>
+              </a:r>
+              <a:endParaRPr lang="en-US" sz="1200" dirty="0">
+                <a:latin typeface="Times New Roman" panose="02020603050405020304" pitchFamily="18" charset="0"/>
+                <a:cs typeface="Times New Roman" panose="02020603050405020304" pitchFamily="18" charset="0"/>
+              </a:endParaRPr>
+            </a:p>
+          </p:txBody>
+        </p:sp>
+        <p:sp>
+          <p:nvSpPr>
+            <p:cNvPr id="176" name="Text 79">
+              <a:extLst>
+                <a:ext uri="{FF2B5EF4-FFF2-40B4-BE49-F238E27FC236}">
+                  <a16:creationId xmlns:a16="http://schemas.microsoft.com/office/drawing/2014/main" id="{D177C5E6-2BF4-CE76-F956-C3D1A3463B21}"/>
+                </a:ext>
+              </a:extLst>
+            </p:cNvPr>
+            <p:cNvSpPr/>
+            <p:nvPr/>
+          </p:nvSpPr>
+          <p:spPr>
+            <a:xfrm>
+              <a:off x="9177523" y="2037770"/>
+              <a:ext cx="1100179" cy="215614"/>
+            </a:xfrm>
+            <a:prstGeom prst="rect">
+              <a:avLst/>
+            </a:prstGeom>
+            <a:noFill/>
+            <a:ln/>
+          </p:spPr>
+          <p:txBody>
+            <a:bodyPr wrap="square" lIns="0" tIns="0" rIns="0" bIns="0" rtlCol="0" anchor="ctr"/>
+            <a:lstStyle/>
+            <a:p>
+              <a:pPr marL="0" indent="0" algn="ctr">
+                <a:buNone/>
+              </a:pPr>
+              <a:r>
+                <a:rPr lang="en-US" sz="1200" dirty="0">
+                  <a:latin typeface="Times New Roman" panose="02020603050405020304" pitchFamily="18" charset="0"/>
+                  <a:ea typeface="Calibri" pitchFamily="34" charset="-122"/>
+                  <a:cs typeface="Times New Roman" panose="02020603050405020304" pitchFamily="18" charset="0"/>
+                </a:rPr>
+                <a:t>≥ 10</a:t>
+              </a:r>
+              <a:endParaRPr lang="en-US" sz="1200" dirty="0">
+                <a:latin typeface="Times New Roman" panose="02020603050405020304" pitchFamily="18" charset="0"/>
+                <a:cs typeface="Times New Roman" panose="02020603050405020304" pitchFamily="18" charset="0"/>
+              </a:endParaRPr>
+            </a:p>
+          </p:txBody>
+        </p:sp>
+        <p:sp>
+          <p:nvSpPr>
+            <p:cNvPr id="177" name="Shape 80">
+              <a:extLst>
+                <a:ext uri="{FF2B5EF4-FFF2-40B4-BE49-F238E27FC236}">
+                  <a16:creationId xmlns:a16="http://schemas.microsoft.com/office/drawing/2014/main" id="{4202114D-6178-1CC9-F1BF-19438022B31C}"/>
+                </a:ext>
+              </a:extLst>
+            </p:cNvPr>
+            <p:cNvSpPr/>
+            <p:nvPr/>
+          </p:nvSpPr>
+          <p:spPr>
+            <a:xfrm>
+              <a:off x="9177523" y="2361191"/>
+              <a:ext cx="1100179" cy="551014"/>
+            </a:xfrm>
+            <a:prstGeom prst="rect">
+              <a:avLst/>
+            </a:prstGeom>
+            <a:solidFill>
+              <a:srgbClr val="E76F51"/>
+            </a:solidFill>
+            <a:ln w="12700">
+              <a:solidFill>
+                <a:srgbClr val="E76F51"/>
+              </a:solidFill>
+              <a:prstDash val="solid"/>
+            </a:ln>
+          </p:spPr>
+        </p:sp>
+        <p:sp>
+          <p:nvSpPr>
+            <p:cNvPr id="178" name="Text 81">
+              <a:extLst>
+                <a:ext uri="{FF2B5EF4-FFF2-40B4-BE49-F238E27FC236}">
+                  <a16:creationId xmlns:a16="http://schemas.microsoft.com/office/drawing/2014/main" id="{4B82F9E3-0E92-B197-9123-6F428C147E12}"/>
+                </a:ext>
+              </a:extLst>
+            </p:cNvPr>
+            <p:cNvSpPr/>
+            <p:nvPr/>
+          </p:nvSpPr>
+          <p:spPr>
+            <a:xfrm>
+              <a:off x="9177523" y="2409105"/>
+              <a:ext cx="1100179" cy="287485"/>
+            </a:xfrm>
+            <a:prstGeom prst="rect">
+              <a:avLst/>
+            </a:prstGeom>
+            <a:noFill/>
+            <a:ln/>
+          </p:spPr>
+          <p:txBody>
+            <a:bodyPr wrap="square" lIns="0" tIns="0" rIns="0" bIns="0" rtlCol="0" anchor="ctr"/>
+            <a:lstStyle/>
+            <a:p>
+              <a:pPr marL="0" indent="0" algn="ctr">
+                <a:buNone/>
+              </a:pPr>
+              <a:r>
+                <a:rPr lang="en-US" sz="1200" b="1" dirty="0">
+                  <a:latin typeface="Times New Roman" panose="02020603050405020304" pitchFamily="18" charset="0"/>
+                  <a:ea typeface="Calibri" pitchFamily="34" charset="-122"/>
+                  <a:cs typeface="Times New Roman" panose="02020603050405020304" pitchFamily="18" charset="0"/>
+                </a:rPr>
+                <a:t>HIGH</a:t>
+              </a:r>
+              <a:endParaRPr lang="en-US" sz="1200" dirty="0">
+                <a:latin typeface="Times New Roman" panose="02020603050405020304" pitchFamily="18" charset="0"/>
+                <a:cs typeface="Times New Roman" panose="02020603050405020304" pitchFamily="18" charset="0"/>
+              </a:endParaRPr>
+            </a:p>
+          </p:txBody>
+        </p:sp>
+        <p:sp>
+          <p:nvSpPr>
+            <p:cNvPr id="179" name="Text 82">
+              <a:extLst>
+                <a:ext uri="{FF2B5EF4-FFF2-40B4-BE49-F238E27FC236}">
+                  <a16:creationId xmlns:a16="http://schemas.microsoft.com/office/drawing/2014/main" id="{A42E2B58-226A-D88E-57AB-1462C75D6B1E}"/>
+                </a:ext>
+              </a:extLst>
+            </p:cNvPr>
+            <p:cNvSpPr/>
+            <p:nvPr/>
+          </p:nvSpPr>
+          <p:spPr>
+            <a:xfrm>
+              <a:off x="9177523" y="2684612"/>
+              <a:ext cx="1100179" cy="215614"/>
+            </a:xfrm>
+            <a:prstGeom prst="rect">
+              <a:avLst/>
+            </a:prstGeom>
+            <a:noFill/>
+            <a:ln/>
+          </p:spPr>
+          <p:txBody>
+            <a:bodyPr wrap="square" lIns="0" tIns="0" rIns="0" bIns="0" rtlCol="0" anchor="ctr"/>
+            <a:lstStyle/>
+            <a:p>
+              <a:pPr marL="0" indent="0" algn="ctr">
+                <a:buNone/>
+              </a:pPr>
+              <a:r>
+                <a:rPr lang="en-US" sz="1200" dirty="0">
+                  <a:latin typeface="Times New Roman" panose="02020603050405020304" pitchFamily="18" charset="0"/>
+                  <a:ea typeface="Calibri" pitchFamily="34" charset="-122"/>
+                  <a:cs typeface="Times New Roman" panose="02020603050405020304" pitchFamily="18" charset="0"/>
+                </a:rPr>
+                <a:t>≥ 5</a:t>
+              </a:r>
+              <a:endParaRPr lang="en-US" sz="1200" dirty="0">
+                <a:latin typeface="Times New Roman" panose="02020603050405020304" pitchFamily="18" charset="0"/>
+                <a:cs typeface="Times New Roman" panose="02020603050405020304" pitchFamily="18" charset="0"/>
+              </a:endParaRPr>
+            </a:p>
+          </p:txBody>
+        </p:sp>
+        <p:sp>
+          <p:nvSpPr>
+            <p:cNvPr id="180" name="Shape 83">
+              <a:extLst>
+                <a:ext uri="{FF2B5EF4-FFF2-40B4-BE49-F238E27FC236}">
+                  <a16:creationId xmlns:a16="http://schemas.microsoft.com/office/drawing/2014/main" id="{C9D8F7AA-11DC-11C2-07D0-68B6EB8BA1F7}"/>
+                </a:ext>
+              </a:extLst>
+            </p:cNvPr>
+            <p:cNvSpPr/>
+            <p:nvPr/>
+          </p:nvSpPr>
+          <p:spPr>
+            <a:xfrm>
+              <a:off x="9177523" y="3008033"/>
+              <a:ext cx="1100179" cy="551014"/>
+            </a:xfrm>
+            <a:prstGeom prst="rect">
               <a:avLst/>
             </a:prstGeom>
             <a:solidFill>
@@ -12104,20 +13198,20 @@
         </p:sp>
         <p:sp>
           <p:nvSpPr>
-            <p:cNvPr id="11" name="Text 15">
-              <a:extLst>
-                <a:ext uri="{FF2B5EF4-FFF2-40B4-BE49-F238E27FC236}">
-                  <a16:creationId xmlns:a16="http://schemas.microsoft.com/office/drawing/2014/main" id="{F21C4413-94C7-0488-630E-6AE4C9CC2159}"/>
-                </a:ext>
-              </a:extLst>
-            </p:cNvPr>
-            <p:cNvSpPr/>
-            <p:nvPr/>
-          </p:nvSpPr>
-          <p:spPr>
-            <a:xfrm>
-              <a:off x="475488" y="2368296"/>
-              <a:ext cx="329184" cy="310896"/>
+            <p:cNvPr id="181" name="Text 84">
+              <a:extLst>
+                <a:ext uri="{FF2B5EF4-FFF2-40B4-BE49-F238E27FC236}">
+                  <a16:creationId xmlns:a16="http://schemas.microsoft.com/office/drawing/2014/main" id="{0B23BD1F-7504-C6C7-FC39-7047F76FDEE2}"/>
+                </a:ext>
+              </a:extLst>
+            </p:cNvPr>
+            <p:cNvSpPr/>
+            <p:nvPr/>
+          </p:nvSpPr>
+          <p:spPr>
+            <a:xfrm>
+              <a:off x="9177523" y="3055947"/>
+              <a:ext cx="1100179" cy="287485"/>
             </a:xfrm>
             <a:prstGeom prst="rect">
               <a:avLst/>
@@ -12133,17 +13227,14 @@
                 <a:buNone/>
               </a:pPr>
               <a:r>
-                <a:rPr lang="en-US" sz="1600" b="1" dirty="0">
-                  <a:solidFill>
-                    <a:srgbClr val="060F1E"/>
-                  </a:solidFill>
+                <a:rPr lang="en-US" sz="1200" b="1" dirty="0">
                   <a:latin typeface="Times New Roman" panose="02020603050405020304" pitchFamily="18" charset="0"/>
                   <a:ea typeface="Calibri" pitchFamily="34" charset="-122"/>
                   <a:cs typeface="Times New Roman" panose="02020603050405020304" pitchFamily="18" charset="0"/>
                 </a:rPr>
-                <a:t>2</a:t>
+                <a:t>MEDIUM</a:t>
               </a:r>
-              <a:endParaRPr lang="en-US" sz="1600" dirty="0">
+              <a:endParaRPr lang="en-US" sz="1200" dirty="0">
                 <a:latin typeface="Times New Roman" panose="02020603050405020304" pitchFamily="18" charset="0"/>
                 <a:cs typeface="Times New Roman" panose="02020603050405020304" pitchFamily="18" charset="0"/>
               </a:endParaRPr>
@@ -12152,207 +13243,20 @@
         </p:sp>
         <p:sp>
           <p:nvSpPr>
-            <p:cNvPr id="12" name="Text 16">
-              <a:extLst>
-                <a:ext uri="{FF2B5EF4-FFF2-40B4-BE49-F238E27FC236}">
-                  <a16:creationId xmlns:a16="http://schemas.microsoft.com/office/drawing/2014/main" id="{5C3E51A2-1D02-9074-7A77-A0B808CFDE6C}"/>
-                </a:ext>
-              </a:extLst>
-            </p:cNvPr>
-            <p:cNvSpPr/>
-            <p:nvPr/>
-          </p:nvSpPr>
-          <p:spPr>
-            <a:xfrm>
-              <a:off x="932688" y="2322576"/>
-              <a:ext cx="4425696" cy="219456"/>
-            </a:xfrm>
-            <a:prstGeom prst="rect">
-              <a:avLst/>
-            </a:prstGeom>
-            <a:noFill/>
-            <a:ln/>
-          </p:spPr>
-          <p:txBody>
-            <a:bodyPr wrap="square" lIns="0" tIns="0" rIns="0" bIns="0" rtlCol="0" anchor="ctr"/>
-            <a:lstStyle/>
-            <a:p>
-              <a:pPr marL="0" indent="0">
-                <a:buNone/>
-              </a:pPr>
-              <a:r>
-                <a:rPr lang="en-US" sz="1600" b="1" dirty="0">
-                  <a:latin typeface="Times New Roman" panose="02020603050405020304" pitchFamily="18" charset="0"/>
-                  <a:ea typeface="Calibri" pitchFamily="34" charset="-122"/>
-                  <a:cs typeface="Times New Roman" panose="02020603050405020304" pitchFamily="18" charset="0"/>
-                </a:rPr>
-                <a:t>Regex Pattern Scan</a:t>
-              </a:r>
-              <a:endParaRPr lang="en-US" sz="1600" dirty="0">
-                <a:latin typeface="Times New Roman" panose="02020603050405020304" pitchFamily="18" charset="0"/>
-                <a:cs typeface="Times New Roman" panose="02020603050405020304" pitchFamily="18" charset="0"/>
-              </a:endParaRPr>
-            </a:p>
-          </p:txBody>
-        </p:sp>
-        <p:sp>
-          <p:nvSpPr>
-            <p:cNvPr id="13" name="Text 17">
-              <a:extLst>
-                <a:ext uri="{FF2B5EF4-FFF2-40B4-BE49-F238E27FC236}">
-                  <a16:creationId xmlns:a16="http://schemas.microsoft.com/office/drawing/2014/main" id="{B987F97F-A527-2E49-AB64-49FCA477074A}"/>
-                </a:ext>
-              </a:extLst>
-            </p:cNvPr>
-            <p:cNvSpPr/>
-            <p:nvPr/>
-          </p:nvSpPr>
-          <p:spPr>
-            <a:xfrm>
-              <a:off x="914399" y="2539055"/>
-              <a:ext cx="4553712" cy="219456"/>
-            </a:xfrm>
-            <a:prstGeom prst="rect">
-              <a:avLst/>
-            </a:prstGeom>
-            <a:noFill/>
-            <a:ln/>
-          </p:spPr>
-          <p:txBody>
-            <a:bodyPr wrap="square" lIns="0" tIns="0" rIns="0" bIns="0" rtlCol="0" anchor="ctr"/>
-            <a:lstStyle/>
-            <a:p>
-              <a:pPr marL="0" indent="0">
-                <a:buNone/>
-              </a:pPr>
-              <a:r>
-                <a:rPr lang="en-US" dirty="0">
-                  <a:solidFill>
-                    <a:srgbClr val="5A8FAA"/>
-                  </a:solidFill>
-                  <a:latin typeface="Times New Roman" panose="02020603050405020304" pitchFamily="18" charset="0"/>
-                  <a:ea typeface="Calibri" pitchFamily="34" charset="-122"/>
-                  <a:cs typeface="Times New Roman" panose="02020603050405020304" pitchFamily="18" charset="0"/>
-                </a:rPr>
-                <a:t>Run all patterns (PAN, Aadhaar, Credit Card, Password, IFSC, Bank Account) against the full body text.</a:t>
-              </a:r>
-              <a:endParaRPr lang="en-US" dirty="0">
-                <a:latin typeface="Times New Roman" panose="02020603050405020304" pitchFamily="18" charset="0"/>
-                <a:cs typeface="Times New Roman" panose="02020603050405020304" pitchFamily="18" charset="0"/>
-              </a:endParaRPr>
-            </a:p>
-          </p:txBody>
-        </p:sp>
-        <p:sp>
-          <p:nvSpPr>
-            <p:cNvPr id="14" name="Shape 18">
-              <a:extLst>
-                <a:ext uri="{FF2B5EF4-FFF2-40B4-BE49-F238E27FC236}">
-                  <a16:creationId xmlns:a16="http://schemas.microsoft.com/office/drawing/2014/main" id="{4A6C930A-8ECC-D376-9BF8-C0667AD18A9B}"/>
-                </a:ext>
-              </a:extLst>
-            </p:cNvPr>
-            <p:cNvSpPr/>
-            <p:nvPr/>
-          </p:nvSpPr>
-          <p:spPr>
-            <a:xfrm>
-              <a:off x="621792" y="2816352"/>
-              <a:ext cx="36576" cy="73152"/>
-            </a:xfrm>
-            <a:prstGeom prst="rect">
-              <a:avLst/>
-            </a:prstGeom>
-            <a:solidFill>
-              <a:srgbClr val="F4A261"/>
-            </a:solidFill>
-            <a:ln w="12700">
-              <a:solidFill>
-                <a:srgbClr val="F4A261"/>
-              </a:solidFill>
-              <a:prstDash val="solid"/>
-            </a:ln>
-          </p:spPr>
-        </p:sp>
-        <p:sp>
-          <p:nvSpPr>
-            <p:cNvPr id="15" name="Shape 19">
-              <a:extLst>
-                <a:ext uri="{FF2B5EF4-FFF2-40B4-BE49-F238E27FC236}">
-                  <a16:creationId xmlns:a16="http://schemas.microsoft.com/office/drawing/2014/main" id="{C84171ED-71F6-E46F-C660-97998DC3E4CD}"/>
-                </a:ext>
-              </a:extLst>
-            </p:cNvPr>
-            <p:cNvSpPr/>
-            <p:nvPr/>
-          </p:nvSpPr>
-          <p:spPr>
-            <a:xfrm>
-              <a:off x="365760" y="2889504"/>
-              <a:ext cx="5120640" cy="585216"/>
-            </a:xfrm>
-            <a:prstGeom prst="rect">
-              <a:avLst/>
-            </a:prstGeom>
-            <a:solidFill>
-              <a:schemeClr val="bg1"/>
-            </a:solidFill>
-            <a:ln w="12700">
-              <a:solidFill>
-                <a:srgbClr val="F4A261"/>
-              </a:solidFill>
-              <a:prstDash val="solid"/>
-            </a:ln>
-            <a:effectLst/>
-          </p:spPr>
-        </p:sp>
-        <p:sp>
-          <p:nvSpPr>
-            <p:cNvPr id="16" name="Shape 20">
-              <a:extLst>
-                <a:ext uri="{FF2B5EF4-FFF2-40B4-BE49-F238E27FC236}">
-                  <a16:creationId xmlns:a16="http://schemas.microsoft.com/office/drawing/2014/main" id="{23FEDAE5-8115-EED2-E3E3-6F420926E7F5}"/>
-                </a:ext>
-              </a:extLst>
-            </p:cNvPr>
-            <p:cNvSpPr/>
-            <p:nvPr/>
-          </p:nvSpPr>
-          <p:spPr>
-            <a:xfrm>
-              <a:off x="475488" y="3017520"/>
-              <a:ext cx="329184" cy="329184"/>
-            </a:xfrm>
-            <a:prstGeom prst="ellipse">
-              <a:avLst/>
-            </a:prstGeom>
-            <a:solidFill>
-              <a:srgbClr val="F4A261"/>
-            </a:solidFill>
-            <a:ln w="12700">
-              <a:solidFill>
-                <a:srgbClr val="F4A261"/>
-              </a:solidFill>
-              <a:prstDash val="solid"/>
-            </a:ln>
-          </p:spPr>
-        </p:sp>
-        <p:sp>
-          <p:nvSpPr>
-            <p:cNvPr id="17" name="Text 21">
-              <a:extLst>
-                <a:ext uri="{FF2B5EF4-FFF2-40B4-BE49-F238E27FC236}">
-                  <a16:creationId xmlns:a16="http://schemas.microsoft.com/office/drawing/2014/main" id="{8E1FC215-58A8-2013-5133-9B36DCE7C6D6}"/>
-                </a:ext>
-              </a:extLst>
-            </p:cNvPr>
-            <p:cNvSpPr/>
-            <p:nvPr/>
-          </p:nvSpPr>
-          <p:spPr>
-            <a:xfrm>
-              <a:off x="475488" y="3026664"/>
-              <a:ext cx="329184" cy="310896"/>
+            <p:cNvPr id="182" name="Text 85">
+              <a:extLst>
+                <a:ext uri="{FF2B5EF4-FFF2-40B4-BE49-F238E27FC236}">
+                  <a16:creationId xmlns:a16="http://schemas.microsoft.com/office/drawing/2014/main" id="{FB07AD69-3834-B24F-9722-7D5B5F606B25}"/>
+                </a:ext>
+              </a:extLst>
+            </p:cNvPr>
+            <p:cNvSpPr/>
+            <p:nvPr/>
+          </p:nvSpPr>
+          <p:spPr>
+            <a:xfrm>
+              <a:off x="9177523" y="3331454"/>
+              <a:ext cx="1100179" cy="215614"/>
             </a:xfrm>
             <a:prstGeom prst="rect">
               <a:avLst/>
@@ -12368,17 +13272,14 @@
                 <a:buNone/>
               </a:pPr>
               <a:r>
-                <a:rPr lang="en-US" sz="1600" b="1" dirty="0">
-                  <a:solidFill>
-                    <a:srgbClr val="060F1E"/>
-                  </a:solidFill>
+                <a:rPr lang="en-US" sz="1200" dirty="0">
                   <a:latin typeface="Times New Roman" panose="02020603050405020304" pitchFamily="18" charset="0"/>
                   <a:ea typeface="Calibri" pitchFamily="34" charset="-122"/>
                   <a:cs typeface="Times New Roman" panose="02020603050405020304" pitchFamily="18" charset="0"/>
                 </a:rPr>
-                <a:t>3</a:t>
+                <a:t>≥ 2</a:t>
               </a:r>
-              <a:endParaRPr lang="en-US" sz="1600" dirty="0">
+              <a:endParaRPr lang="en-US" sz="1200" dirty="0">
                 <a:latin typeface="Times New Roman" panose="02020603050405020304" pitchFamily="18" charset="0"/>
                 <a:cs typeface="Times New Roman" panose="02020603050405020304" pitchFamily="18" charset="0"/>
               </a:endParaRPr>
@@ -12387,123 +13288,30 @@
         </p:sp>
         <p:sp>
           <p:nvSpPr>
-            <p:cNvPr id="18" name="Text 22">
-              <a:extLst>
-                <a:ext uri="{FF2B5EF4-FFF2-40B4-BE49-F238E27FC236}">
-                  <a16:creationId xmlns:a16="http://schemas.microsoft.com/office/drawing/2014/main" id="{184131C4-48FC-E0FE-0F89-86450298A2E7}"/>
-                </a:ext>
-              </a:extLst>
-            </p:cNvPr>
-            <p:cNvSpPr/>
-            <p:nvPr/>
-          </p:nvSpPr>
-          <p:spPr>
-            <a:xfrm>
-              <a:off x="932688" y="2980944"/>
-              <a:ext cx="4425696" cy="219456"/>
-            </a:xfrm>
-            <a:prstGeom prst="rect">
-              <a:avLst/>
-            </a:prstGeom>
-            <a:noFill/>
-            <a:ln/>
-          </p:spPr>
-          <p:txBody>
-            <a:bodyPr wrap="square" lIns="0" tIns="0" rIns="0" bIns="0" rtlCol="0" anchor="ctr"/>
-            <a:lstStyle/>
-            <a:p>
-              <a:pPr marL="0" indent="0">
-                <a:buNone/>
-              </a:pPr>
-              <a:r>
-                <a:rPr lang="en-US" sz="1600" b="1" dirty="0">
-                  <a:latin typeface="Times New Roman" panose="02020603050405020304" pitchFamily="18" charset="0"/>
-                  <a:ea typeface="Calibri" pitchFamily="34" charset="-122"/>
-                  <a:cs typeface="Times New Roman" panose="02020603050405020304" pitchFamily="18" charset="0"/>
-                </a:rPr>
-                <a:t>Luhn Algorithm Validation</a:t>
-              </a:r>
-              <a:endParaRPr lang="en-US" sz="1600" dirty="0">
-                <a:latin typeface="Times New Roman" panose="02020603050405020304" pitchFamily="18" charset="0"/>
-                <a:cs typeface="Times New Roman" panose="02020603050405020304" pitchFamily="18" charset="0"/>
-              </a:endParaRPr>
-            </a:p>
-          </p:txBody>
-        </p:sp>
-        <p:sp>
-          <p:nvSpPr>
-            <p:cNvPr id="19" name="Text 23">
-              <a:extLst>
-                <a:ext uri="{FF2B5EF4-FFF2-40B4-BE49-F238E27FC236}">
-                  <a16:creationId xmlns:a16="http://schemas.microsoft.com/office/drawing/2014/main" id="{BEF7E3E2-F839-A661-2088-D1C674A07618}"/>
-                </a:ext>
-              </a:extLst>
-            </p:cNvPr>
-            <p:cNvSpPr/>
-            <p:nvPr/>
-          </p:nvSpPr>
-          <p:spPr>
-            <a:xfrm>
-              <a:off x="932688" y="3209544"/>
-              <a:ext cx="4535423" cy="219456"/>
-            </a:xfrm>
-            <a:prstGeom prst="rect">
-              <a:avLst/>
-            </a:prstGeom>
-            <a:noFill/>
-            <a:ln/>
-          </p:spPr>
-          <p:txBody>
-            <a:bodyPr wrap="square" lIns="0" tIns="0" rIns="0" bIns="0" rtlCol="0" anchor="ctr"/>
-            <a:lstStyle/>
-            <a:p>
-              <a:pPr marL="0" indent="0">
-                <a:buNone/>
-              </a:pPr>
-              <a:r>
-                <a:rPr lang="en-US" dirty="0">
-                  <a:solidFill>
-                    <a:srgbClr val="5A8FAA"/>
-                  </a:solidFill>
-                  <a:latin typeface="Times New Roman" panose="02020603050405020304" pitchFamily="18" charset="0"/>
-                  <a:ea typeface="Calibri" pitchFamily="34" charset="-122"/>
-                  <a:cs typeface="Times New Roman" panose="02020603050405020304" pitchFamily="18" charset="0"/>
-                </a:rPr>
-                <a:t>Filter all card number regex matches through the Luhn checksum — only valid card numbers are flagged as violations.</a:t>
-              </a:r>
-              <a:endParaRPr lang="en-US" dirty="0">
-                <a:latin typeface="Times New Roman" panose="02020603050405020304" pitchFamily="18" charset="0"/>
-                <a:cs typeface="Times New Roman" panose="02020603050405020304" pitchFamily="18" charset="0"/>
-              </a:endParaRPr>
-            </a:p>
-          </p:txBody>
-        </p:sp>
-        <p:sp>
-          <p:nvSpPr>
-            <p:cNvPr id="20" name="Shape 24">
-              <a:extLst>
-                <a:ext uri="{FF2B5EF4-FFF2-40B4-BE49-F238E27FC236}">
-                  <a16:creationId xmlns:a16="http://schemas.microsoft.com/office/drawing/2014/main" id="{A1D0062C-0CBE-D300-3438-E1CDA0DC51B5}"/>
-                </a:ext>
-              </a:extLst>
-            </p:cNvPr>
-            <p:cNvSpPr/>
-            <p:nvPr/>
-          </p:nvSpPr>
-          <p:spPr>
-            <a:xfrm>
-              <a:off x="621792" y="3474720"/>
-              <a:ext cx="36576" cy="73152"/>
+            <p:cNvPr id="183" name="Shape 86">
+              <a:extLst>
+                <a:ext uri="{FF2B5EF4-FFF2-40B4-BE49-F238E27FC236}">
+                  <a16:creationId xmlns:a16="http://schemas.microsoft.com/office/drawing/2014/main" id="{76FCFF2F-1202-2389-1E09-96210F9047A3}"/>
+                </a:ext>
+              </a:extLst>
+            </p:cNvPr>
+            <p:cNvSpPr/>
+            <p:nvPr/>
+          </p:nvSpPr>
+          <p:spPr>
+            <a:xfrm>
+              <a:off x="9177523" y="3654875"/>
+              <a:ext cx="1100179" cy="551014"/>
             </a:xfrm>
             <a:prstGeom prst="rect">
               <a:avLst/>
             </a:prstGeom>
             <a:solidFill>
-              <a:srgbClr val="F4A261"/>
+              <a:srgbClr val="F4C842"/>
             </a:solidFill>
             <a:ln w="12700">
               <a:solidFill>
-                <a:srgbClr val="F4A261"/>
+                <a:srgbClr val="F4C842"/>
               </a:solidFill>
               <a:prstDash val="solid"/>
             </a:ln>
@@ -12511,83 +13319,20 @@
         </p:sp>
         <p:sp>
           <p:nvSpPr>
-            <p:cNvPr id="21" name="Shape 25">
-              <a:extLst>
-                <a:ext uri="{FF2B5EF4-FFF2-40B4-BE49-F238E27FC236}">
-                  <a16:creationId xmlns:a16="http://schemas.microsoft.com/office/drawing/2014/main" id="{A8A0BC64-F486-93D8-CDA1-8658CD4A6F06}"/>
-                </a:ext>
-              </a:extLst>
-            </p:cNvPr>
-            <p:cNvSpPr/>
-            <p:nvPr/>
-          </p:nvSpPr>
-          <p:spPr>
-            <a:xfrm>
-              <a:off x="365760" y="3547872"/>
-              <a:ext cx="5120640" cy="585216"/>
-            </a:xfrm>
-            <a:prstGeom prst="rect">
-              <a:avLst/>
-            </a:prstGeom>
-            <a:solidFill>
-              <a:schemeClr val="bg1"/>
-            </a:solidFill>
-            <a:ln w="12700">
-              <a:solidFill>
-                <a:srgbClr val="F4A261"/>
-              </a:solidFill>
-              <a:prstDash val="solid"/>
-            </a:ln>
-            <a:effectLst/>
-          </p:spPr>
-        </p:sp>
-        <p:sp>
-          <p:nvSpPr>
-            <p:cNvPr id="22" name="Shape 26">
-              <a:extLst>
-                <a:ext uri="{FF2B5EF4-FFF2-40B4-BE49-F238E27FC236}">
-                  <a16:creationId xmlns:a16="http://schemas.microsoft.com/office/drawing/2014/main" id="{D4E073DE-85A8-FCAA-5DCC-8F27644FD82D}"/>
-                </a:ext>
-              </a:extLst>
-            </p:cNvPr>
-            <p:cNvSpPr/>
-            <p:nvPr/>
-          </p:nvSpPr>
-          <p:spPr>
-            <a:xfrm>
-              <a:off x="475488" y="3675888"/>
-              <a:ext cx="329184" cy="329184"/>
-            </a:xfrm>
-            <a:prstGeom prst="ellipse">
-              <a:avLst/>
-            </a:prstGeom>
-            <a:solidFill>
-              <a:srgbClr val="F4A261"/>
-            </a:solidFill>
-            <a:ln w="12700">
-              <a:solidFill>
-                <a:srgbClr val="F4A261"/>
-              </a:solidFill>
-              <a:prstDash val="solid"/>
-            </a:ln>
-          </p:spPr>
-        </p:sp>
-        <p:sp>
-          <p:nvSpPr>
-            <p:cNvPr id="23" name="Text 27">
-              <a:extLst>
-                <a:ext uri="{FF2B5EF4-FFF2-40B4-BE49-F238E27FC236}">
-                  <a16:creationId xmlns:a16="http://schemas.microsoft.com/office/drawing/2014/main" id="{F1DCB65A-1990-D471-DA78-2994B61A6D65}"/>
-                </a:ext>
-              </a:extLst>
-            </p:cNvPr>
-            <p:cNvSpPr/>
-            <p:nvPr/>
-          </p:nvSpPr>
-          <p:spPr>
-            <a:xfrm>
-              <a:off x="475488" y="3685032"/>
-              <a:ext cx="329184" cy="310896"/>
+            <p:cNvPr id="184" name="Text 87">
+              <a:extLst>
+                <a:ext uri="{FF2B5EF4-FFF2-40B4-BE49-F238E27FC236}">
+                  <a16:creationId xmlns:a16="http://schemas.microsoft.com/office/drawing/2014/main" id="{C5F1D9A5-E5EA-FF35-E524-8F2070C6AD8F}"/>
+                </a:ext>
+              </a:extLst>
+            </p:cNvPr>
+            <p:cNvSpPr/>
+            <p:nvPr/>
+          </p:nvSpPr>
+          <p:spPr>
+            <a:xfrm>
+              <a:off x="9177523" y="3702789"/>
+              <a:ext cx="1100179" cy="287485"/>
             </a:xfrm>
             <a:prstGeom prst="rect">
               <a:avLst/>
@@ -12603,17 +13348,14 @@
                 <a:buNone/>
               </a:pPr>
               <a:r>
-                <a:rPr lang="en-US" sz="1600" b="1" dirty="0">
-                  <a:solidFill>
-                    <a:srgbClr val="060F1E"/>
-                  </a:solidFill>
+                <a:rPr lang="en-US" sz="1200" b="1" dirty="0">
                   <a:latin typeface="Times New Roman" panose="02020603050405020304" pitchFamily="18" charset="0"/>
                   <a:ea typeface="Calibri" pitchFamily="34" charset="-122"/>
                   <a:cs typeface="Times New Roman" panose="02020603050405020304" pitchFamily="18" charset="0"/>
                 </a:rPr>
-                <a:t>4</a:t>
+                <a:t>LOW</a:t>
               </a:r>
-              <a:endParaRPr lang="en-US" sz="1600" dirty="0">
+              <a:endParaRPr lang="en-US" sz="1200" dirty="0">
                 <a:latin typeface="Times New Roman" panose="02020603050405020304" pitchFamily="18" charset="0"/>
                 <a:cs typeface="Times New Roman" panose="02020603050405020304" pitchFamily="18" charset="0"/>
               </a:endParaRPr>
@@ -12622,207 +13364,20 @@
         </p:sp>
         <p:sp>
           <p:nvSpPr>
-            <p:cNvPr id="24" name="Text 28">
-              <a:extLst>
-                <a:ext uri="{FF2B5EF4-FFF2-40B4-BE49-F238E27FC236}">
-                  <a16:creationId xmlns:a16="http://schemas.microsoft.com/office/drawing/2014/main" id="{7888BA0B-0D00-69DD-F71D-69943BABB320}"/>
-                </a:ext>
-              </a:extLst>
-            </p:cNvPr>
-            <p:cNvSpPr/>
-            <p:nvPr/>
-          </p:nvSpPr>
-          <p:spPr>
-            <a:xfrm>
-              <a:off x="932688" y="3639312"/>
-              <a:ext cx="4425696" cy="219456"/>
-            </a:xfrm>
-            <a:prstGeom prst="rect">
-              <a:avLst/>
-            </a:prstGeom>
-            <a:noFill/>
-            <a:ln/>
-          </p:spPr>
-          <p:txBody>
-            <a:bodyPr wrap="square" lIns="0" tIns="0" rIns="0" bIns="0" rtlCol="0" anchor="ctr"/>
-            <a:lstStyle/>
-            <a:p>
-              <a:pPr marL="0" indent="0">
-                <a:buNone/>
-              </a:pPr>
-              <a:r>
-                <a:rPr lang="en-US" sz="1600" b="1" dirty="0">
-                  <a:latin typeface="Times New Roman" panose="02020603050405020304" pitchFamily="18" charset="0"/>
-                  <a:ea typeface="Calibri" pitchFamily="34" charset="-122"/>
-                  <a:cs typeface="Times New Roman" panose="02020603050405020304" pitchFamily="18" charset="0"/>
-                </a:rPr>
-                <a:t>Sensitive Filename Check</a:t>
-              </a:r>
-              <a:endParaRPr lang="en-US" sz="1600" dirty="0">
-                <a:latin typeface="Times New Roman" panose="02020603050405020304" pitchFamily="18" charset="0"/>
-                <a:cs typeface="Times New Roman" panose="02020603050405020304" pitchFamily="18" charset="0"/>
-              </a:endParaRPr>
-            </a:p>
-          </p:txBody>
-        </p:sp>
-        <p:sp>
-          <p:nvSpPr>
-            <p:cNvPr id="25" name="Text 29">
-              <a:extLst>
-                <a:ext uri="{FF2B5EF4-FFF2-40B4-BE49-F238E27FC236}">
-                  <a16:creationId xmlns:a16="http://schemas.microsoft.com/office/drawing/2014/main" id="{EDDA4EBA-E4B2-F90E-0F6C-8591E791CEE2}"/>
-                </a:ext>
-              </a:extLst>
-            </p:cNvPr>
-            <p:cNvSpPr/>
-            <p:nvPr/>
-          </p:nvSpPr>
-          <p:spPr>
-            <a:xfrm>
-              <a:off x="932688" y="3867912"/>
-              <a:ext cx="4425696" cy="219456"/>
-            </a:xfrm>
-            <a:prstGeom prst="rect">
-              <a:avLst/>
-            </a:prstGeom>
-            <a:noFill/>
-            <a:ln/>
-          </p:spPr>
-          <p:txBody>
-            <a:bodyPr wrap="square" lIns="0" tIns="0" rIns="0" bIns="0" rtlCol="0" anchor="ctr"/>
-            <a:lstStyle/>
-            <a:p>
-              <a:pPr marL="0" indent="0">
-                <a:buNone/>
-              </a:pPr>
-              <a:r>
-                <a:rPr lang="en-US" dirty="0">
-                  <a:solidFill>
-                    <a:srgbClr val="5A8FAA"/>
-                  </a:solidFill>
-                  <a:latin typeface="Times New Roman" panose="02020603050405020304" pitchFamily="18" charset="0"/>
-                  <a:ea typeface="Calibri" pitchFamily="34" charset="-122"/>
-                  <a:cs typeface="Times New Roman" panose="02020603050405020304" pitchFamily="18" charset="0"/>
-                </a:rPr>
-                <a:t>Match attachment names against patterns: HR_Data, Payroll, Employee, Confidential, PII, Aadhaar, Passport.</a:t>
-              </a:r>
-              <a:endParaRPr lang="en-US" dirty="0">
-                <a:latin typeface="Times New Roman" panose="02020603050405020304" pitchFamily="18" charset="0"/>
-                <a:cs typeface="Times New Roman" panose="02020603050405020304" pitchFamily="18" charset="0"/>
-              </a:endParaRPr>
-            </a:p>
-          </p:txBody>
-        </p:sp>
-        <p:sp>
-          <p:nvSpPr>
-            <p:cNvPr id="26" name="Shape 30">
-              <a:extLst>
-                <a:ext uri="{FF2B5EF4-FFF2-40B4-BE49-F238E27FC236}">
-                  <a16:creationId xmlns:a16="http://schemas.microsoft.com/office/drawing/2014/main" id="{D54695C4-D91E-B782-D39A-B8B615C06682}"/>
-                </a:ext>
-              </a:extLst>
-            </p:cNvPr>
-            <p:cNvSpPr/>
-            <p:nvPr/>
-          </p:nvSpPr>
-          <p:spPr>
-            <a:xfrm>
-              <a:off x="621792" y="4133088"/>
-              <a:ext cx="36576" cy="73152"/>
-            </a:xfrm>
-            <a:prstGeom prst="rect">
-              <a:avLst/>
-            </a:prstGeom>
-            <a:solidFill>
-              <a:srgbClr val="F4A261"/>
-            </a:solidFill>
-            <a:ln w="12700">
-              <a:solidFill>
-                <a:srgbClr val="F4A261"/>
-              </a:solidFill>
-              <a:prstDash val="solid"/>
-            </a:ln>
-          </p:spPr>
-        </p:sp>
-        <p:sp>
-          <p:nvSpPr>
-            <p:cNvPr id="27" name="Shape 31">
-              <a:extLst>
-                <a:ext uri="{FF2B5EF4-FFF2-40B4-BE49-F238E27FC236}">
-                  <a16:creationId xmlns:a16="http://schemas.microsoft.com/office/drawing/2014/main" id="{420AE49B-7F19-6EFB-9C68-FBAB935E2A56}"/>
-                </a:ext>
-              </a:extLst>
-            </p:cNvPr>
-            <p:cNvSpPr/>
-            <p:nvPr/>
-          </p:nvSpPr>
-          <p:spPr>
-            <a:xfrm>
-              <a:off x="365760" y="4206240"/>
-              <a:ext cx="5120640" cy="585216"/>
-            </a:xfrm>
-            <a:prstGeom prst="rect">
-              <a:avLst/>
-            </a:prstGeom>
-            <a:solidFill>
-              <a:schemeClr val="bg1"/>
-            </a:solidFill>
-            <a:ln w="12700">
-              <a:solidFill>
-                <a:srgbClr val="E63946"/>
-              </a:solidFill>
-              <a:prstDash val="solid"/>
-            </a:ln>
-            <a:effectLst/>
-          </p:spPr>
-        </p:sp>
-        <p:sp>
-          <p:nvSpPr>
-            <p:cNvPr id="28" name="Shape 32">
-              <a:extLst>
-                <a:ext uri="{FF2B5EF4-FFF2-40B4-BE49-F238E27FC236}">
-                  <a16:creationId xmlns:a16="http://schemas.microsoft.com/office/drawing/2014/main" id="{36A6D7A8-E894-F0BD-9783-53E04930855C}"/>
-                </a:ext>
-              </a:extLst>
-            </p:cNvPr>
-            <p:cNvSpPr/>
-            <p:nvPr/>
-          </p:nvSpPr>
-          <p:spPr>
-            <a:xfrm>
-              <a:off x="475488" y="4334256"/>
-              <a:ext cx="329184" cy="329184"/>
-            </a:xfrm>
-            <a:prstGeom prst="ellipse">
-              <a:avLst/>
-            </a:prstGeom>
-            <a:solidFill>
-              <a:srgbClr val="E63946"/>
-            </a:solidFill>
-            <a:ln w="12700">
-              <a:solidFill>
-                <a:srgbClr val="E63946"/>
-              </a:solidFill>
-              <a:prstDash val="solid"/>
-            </a:ln>
-          </p:spPr>
-        </p:sp>
-        <p:sp>
-          <p:nvSpPr>
-            <p:cNvPr id="29" name="Text 33">
-              <a:extLst>
-                <a:ext uri="{FF2B5EF4-FFF2-40B4-BE49-F238E27FC236}">
-                  <a16:creationId xmlns:a16="http://schemas.microsoft.com/office/drawing/2014/main" id="{56206517-94B8-6C14-3BE4-2A45A1C3C0B6}"/>
-                </a:ext>
-              </a:extLst>
-            </p:cNvPr>
-            <p:cNvSpPr/>
-            <p:nvPr/>
-          </p:nvSpPr>
-          <p:spPr>
-            <a:xfrm>
-              <a:off x="475488" y="4343400"/>
-              <a:ext cx="329184" cy="310896"/>
+            <p:cNvPr id="185" name="Text 88">
+              <a:extLst>
+                <a:ext uri="{FF2B5EF4-FFF2-40B4-BE49-F238E27FC236}">
+                  <a16:creationId xmlns:a16="http://schemas.microsoft.com/office/drawing/2014/main" id="{C17EACA0-BBC6-FC6F-81DF-F920681CD7BD}"/>
+                </a:ext>
+              </a:extLst>
+            </p:cNvPr>
+            <p:cNvSpPr/>
+            <p:nvPr/>
+          </p:nvSpPr>
+          <p:spPr>
+            <a:xfrm>
+              <a:off x="9177523" y="3978296"/>
+              <a:ext cx="1100179" cy="215614"/>
             </a:xfrm>
             <a:prstGeom prst="rect">
               <a:avLst/>
@@ -12838,17 +13393,14 @@
                 <a:buNone/>
               </a:pPr>
               <a:r>
-                <a:rPr lang="en-US" sz="1600" b="1" dirty="0">
-                  <a:solidFill>
-                    <a:srgbClr val="060F1E"/>
-                  </a:solidFill>
+                <a:rPr lang="en-US" sz="1200" dirty="0">
                   <a:latin typeface="Times New Roman" panose="02020603050405020304" pitchFamily="18" charset="0"/>
                   <a:ea typeface="Calibri" pitchFamily="34" charset="-122"/>
                   <a:cs typeface="Times New Roman" panose="02020603050405020304" pitchFamily="18" charset="0"/>
                 </a:rPr>
-                <a:t>5</a:t>
+                <a:t>≥ 1</a:t>
               </a:r>
-              <a:endParaRPr lang="en-US" sz="1600" dirty="0">
+              <a:endParaRPr lang="en-US" sz="1200" dirty="0">
                 <a:latin typeface="Times New Roman" panose="02020603050405020304" pitchFamily="18" charset="0"/>
                 <a:cs typeface="Times New Roman" panose="02020603050405020304" pitchFamily="18" charset="0"/>
               </a:endParaRPr>
@@ -12857,20 +13409,51 @@
         </p:sp>
         <p:sp>
           <p:nvSpPr>
-            <p:cNvPr id="30" name="Text 34">
-              <a:extLst>
-                <a:ext uri="{FF2B5EF4-FFF2-40B4-BE49-F238E27FC236}">
-                  <a16:creationId xmlns:a16="http://schemas.microsoft.com/office/drawing/2014/main" id="{27BFA411-AECD-6FF7-9812-E9CF51120F63}"/>
-                </a:ext>
-              </a:extLst>
-            </p:cNvPr>
-            <p:cNvSpPr/>
-            <p:nvPr/>
-          </p:nvSpPr>
-          <p:spPr>
-            <a:xfrm>
-              <a:off x="932688" y="4297680"/>
-              <a:ext cx="4425696" cy="219456"/>
+            <p:cNvPr id="186" name="Shape 89">
+              <a:extLst>
+                <a:ext uri="{FF2B5EF4-FFF2-40B4-BE49-F238E27FC236}">
+                  <a16:creationId xmlns:a16="http://schemas.microsoft.com/office/drawing/2014/main" id="{6FD293F6-9996-2507-0091-9DD0900D4553}"/>
+                </a:ext>
+              </a:extLst>
+            </p:cNvPr>
+            <p:cNvSpPr/>
+            <p:nvPr/>
+          </p:nvSpPr>
+          <p:spPr>
+            <a:xfrm>
+              <a:off x="9177523" y="4301717"/>
+              <a:ext cx="1100179" cy="551014"/>
+            </a:xfrm>
+            <a:prstGeom prst="rect">
+              <a:avLst/>
+            </a:prstGeom>
+            <a:solidFill>
+              <a:srgbClr val="2DC653"/>
+            </a:solidFill>
+            <a:ln w="12700">
+              <a:solidFill>
+                <a:srgbClr val="2DC653"/>
+              </a:solidFill>
+              <a:prstDash val="solid"/>
+            </a:ln>
+          </p:spPr>
+        </p:sp>
+        <p:sp>
+          <p:nvSpPr>
+            <p:cNvPr id="187" name="Text 90">
+              <a:extLst>
+                <a:ext uri="{FF2B5EF4-FFF2-40B4-BE49-F238E27FC236}">
+                  <a16:creationId xmlns:a16="http://schemas.microsoft.com/office/drawing/2014/main" id="{94A74F50-2F9A-6086-AFC0-68BCC9411F23}"/>
+                </a:ext>
+              </a:extLst>
+            </p:cNvPr>
+            <p:cNvSpPr/>
+            <p:nvPr/>
+          </p:nvSpPr>
+          <p:spPr>
+            <a:xfrm>
+              <a:off x="9177523" y="4349631"/>
+              <a:ext cx="1100179" cy="287485"/>
             </a:xfrm>
             <a:prstGeom prst="rect">
               <a:avLst/>
@@ -12882,18 +13465,18 @@
             <a:bodyPr wrap="square" lIns="0" tIns="0" rIns="0" bIns="0" rtlCol="0" anchor="ctr"/>
             <a:lstStyle/>
             <a:p>
-              <a:pPr marL="0" indent="0">
+              <a:pPr marL="0" indent="0" algn="ctr">
                 <a:buNone/>
               </a:pPr>
               <a:r>
-                <a:rPr lang="en-US" sz="1600" b="1" dirty="0">
+                <a:rPr lang="en-US" sz="1200" b="1" dirty="0">
                   <a:latin typeface="Times New Roman" panose="02020603050405020304" pitchFamily="18" charset="0"/>
                   <a:ea typeface="Calibri" pitchFamily="34" charset="-122"/>
                   <a:cs typeface="Times New Roman" panose="02020603050405020304" pitchFamily="18" charset="0"/>
                 </a:rPr>
-                <a:t>Classify &amp; Block</a:t>
+                <a:t>SAFE</a:t>
               </a:r>
-              <a:endParaRPr lang="en-US" sz="1600" dirty="0">
+              <a:endParaRPr lang="en-US" sz="1200" dirty="0">
                 <a:latin typeface="Times New Roman" panose="02020603050405020304" pitchFamily="18" charset="0"/>
                 <a:cs typeface="Times New Roman" panose="02020603050405020304" pitchFamily="18" charset="0"/>
               </a:endParaRPr>
@@ -12902,20 +13485,20 @@
         </p:sp>
         <p:sp>
           <p:nvSpPr>
-            <p:cNvPr id="31" name="Text 35">
-              <a:extLst>
-                <a:ext uri="{FF2B5EF4-FFF2-40B4-BE49-F238E27FC236}">
-                  <a16:creationId xmlns:a16="http://schemas.microsoft.com/office/drawing/2014/main" id="{055BF147-CDDF-AFD4-DC6A-919DACE69364}"/>
-                </a:ext>
-              </a:extLst>
-            </p:cNvPr>
-            <p:cNvSpPr/>
-            <p:nvPr/>
-          </p:nvSpPr>
-          <p:spPr>
-            <a:xfrm>
-              <a:off x="932688" y="4526280"/>
-              <a:ext cx="4425696" cy="219456"/>
+            <p:cNvPr id="188" name="Text 91">
+              <a:extLst>
+                <a:ext uri="{FF2B5EF4-FFF2-40B4-BE49-F238E27FC236}">
+                  <a16:creationId xmlns:a16="http://schemas.microsoft.com/office/drawing/2014/main" id="{29085F2F-2048-DA0F-4811-4E1B5CC48F0B}"/>
+                </a:ext>
+              </a:extLst>
+            </p:cNvPr>
+            <p:cNvSpPr/>
+            <p:nvPr/>
+          </p:nvSpPr>
+          <p:spPr>
+            <a:xfrm>
+              <a:off x="9177523" y="4625138"/>
+              <a:ext cx="1100179" cy="215614"/>
             </a:xfrm>
             <a:prstGeom prst="rect">
               <a:avLst/>
@@ -12927,21 +13510,2120 @@
             <a:bodyPr wrap="square" lIns="0" tIns="0" rIns="0" bIns="0" rtlCol="0" anchor="ctr"/>
             <a:lstStyle/>
             <a:p>
-              <a:pPr marL="0" indent="0">
+              <a:pPr marL="0" indent="0" algn="ctr">
                 <a:buNone/>
               </a:pPr>
               <a:r>
-                <a:rPr lang="en-US" dirty="0">
-                  <a:solidFill>
-                    <a:srgbClr val="5A8FAA"/>
-                  </a:solidFill>
+                <a:rPr lang="en-US" sz="1200" dirty="0">
                   <a:latin typeface="Times New Roman" panose="02020603050405020304" pitchFamily="18" charset="0"/>
                   <a:ea typeface="Calibri" pitchFamily="34" charset="-122"/>
                   <a:cs typeface="Times New Roman" panose="02020603050405020304" pitchFamily="18" charset="0"/>
                 </a:rPr>
-                <a:t>Any CRITICAL match → email BLOCKED. HIGH match → WARNING for analyst review. No violation → CLEARED.</a:t>
+                <a:t>= 0</a:t>
               </a:r>
-              <a:endParaRPr lang="en-US" dirty="0">
+              <a:endParaRPr lang="en-US" sz="1200" dirty="0">
+                <a:latin typeface="Times New Roman" panose="02020603050405020304" pitchFamily="18" charset="0"/>
+                <a:cs typeface="Times New Roman" panose="02020603050405020304" pitchFamily="18" charset="0"/>
+              </a:endParaRPr>
+            </a:p>
+          </p:txBody>
+        </p:sp>
+        <p:sp>
+          <p:nvSpPr>
+            <p:cNvPr id="191" name="Rectangle 190">
+              <a:extLst>
+                <a:ext uri="{FF2B5EF4-FFF2-40B4-BE49-F238E27FC236}">
+                  <a16:creationId xmlns:a16="http://schemas.microsoft.com/office/drawing/2014/main" id="{7CEA958B-6E63-368B-8AA9-61ED18A8D166}"/>
+                </a:ext>
+              </a:extLst>
+            </p:cNvPr>
+            <p:cNvSpPr/>
+            <p:nvPr/>
+          </p:nvSpPr>
+          <p:spPr>
+            <a:xfrm>
+              <a:off x="352425" y="1776199"/>
+              <a:ext cx="1384935" cy="633342"/>
+            </a:xfrm>
+            <a:prstGeom prst="rect">
+              <a:avLst/>
+            </a:prstGeom>
+            <a:noFill/>
+            <a:ln>
+              <a:solidFill>
+                <a:srgbClr val="0070C0"/>
+              </a:solidFill>
+            </a:ln>
+          </p:spPr>
+          <p:style>
+            <a:lnRef idx="2">
+              <a:schemeClr val="accent1">
+                <a:shade val="15000"/>
+              </a:schemeClr>
+            </a:lnRef>
+            <a:fillRef idx="1">
+              <a:schemeClr val="accent1"/>
+            </a:fillRef>
+            <a:effectRef idx="0">
+              <a:schemeClr val="accent1"/>
+            </a:effectRef>
+            <a:fontRef idx="minor">
+              <a:schemeClr val="lt1"/>
+            </a:fontRef>
+          </p:style>
+          <p:txBody>
+            <a:bodyPr rtlCol="0" anchor="ctr"/>
+            <a:lstStyle/>
+            <a:p>
+              <a:pPr algn="ctr"/>
+              <a:endParaRPr lang="en-GB">
+                <a:latin typeface="Times New Roman" panose="02020603050405020304" pitchFamily="18" charset="0"/>
+                <a:cs typeface="Times New Roman" panose="02020603050405020304" pitchFamily="18" charset="0"/>
+              </a:endParaRPr>
+            </a:p>
+          </p:txBody>
+        </p:sp>
+        <p:sp>
+          <p:nvSpPr>
+            <p:cNvPr id="192" name="Rectangle 191">
+              <a:extLst>
+                <a:ext uri="{FF2B5EF4-FFF2-40B4-BE49-F238E27FC236}">
+                  <a16:creationId xmlns:a16="http://schemas.microsoft.com/office/drawing/2014/main" id="{D9665B62-59E2-8E6B-EBAD-15B861E56CFC}"/>
+                </a:ext>
+              </a:extLst>
+            </p:cNvPr>
+            <p:cNvSpPr/>
+            <p:nvPr/>
+          </p:nvSpPr>
+          <p:spPr>
+            <a:xfrm>
+              <a:off x="350330" y="1782850"/>
+              <a:ext cx="1368742" cy="76957"/>
+            </a:xfrm>
+            <a:prstGeom prst="rect">
+              <a:avLst/>
+            </a:prstGeom>
+            <a:solidFill>
+              <a:srgbClr val="0070C0"/>
+            </a:solidFill>
+            <a:ln>
+              <a:solidFill>
+                <a:srgbClr val="0070C0"/>
+              </a:solidFill>
+            </a:ln>
+          </p:spPr>
+          <p:style>
+            <a:lnRef idx="2">
+              <a:schemeClr val="accent1">
+                <a:shade val="15000"/>
+              </a:schemeClr>
+            </a:lnRef>
+            <a:fillRef idx="1">
+              <a:schemeClr val="accent1"/>
+            </a:fillRef>
+            <a:effectRef idx="0">
+              <a:schemeClr val="accent1"/>
+            </a:effectRef>
+            <a:fontRef idx="minor">
+              <a:schemeClr val="lt1"/>
+            </a:fontRef>
+          </p:style>
+          <p:txBody>
+            <a:bodyPr rtlCol="0" anchor="ctr"/>
+            <a:lstStyle/>
+            <a:p>
+              <a:pPr algn="ctr"/>
+              <a:endParaRPr lang="en-GB">
+                <a:latin typeface="Times New Roman" panose="02020603050405020304" pitchFamily="18" charset="0"/>
+                <a:cs typeface="Times New Roman" panose="02020603050405020304" pitchFamily="18" charset="0"/>
+              </a:endParaRPr>
+            </a:p>
+          </p:txBody>
+        </p:sp>
+        <p:sp>
+          <p:nvSpPr>
+            <p:cNvPr id="194" name="Rectangle 193">
+              <a:extLst>
+                <a:ext uri="{FF2B5EF4-FFF2-40B4-BE49-F238E27FC236}">
+                  <a16:creationId xmlns:a16="http://schemas.microsoft.com/office/drawing/2014/main" id="{526A6961-8B99-A081-8238-619D8EFE35A2}"/>
+                </a:ext>
+              </a:extLst>
+            </p:cNvPr>
+            <p:cNvSpPr/>
+            <p:nvPr/>
+          </p:nvSpPr>
+          <p:spPr>
+            <a:xfrm>
+              <a:off x="1953017" y="1591954"/>
+              <a:ext cx="1942325" cy="1485474"/>
+            </a:xfrm>
+            <a:prstGeom prst="rect">
+              <a:avLst/>
+            </a:prstGeom>
+            <a:noFill/>
+            <a:ln>
+              <a:solidFill>
+                <a:srgbClr val="0070C0"/>
+              </a:solidFill>
+            </a:ln>
+          </p:spPr>
+          <p:style>
+            <a:lnRef idx="2">
+              <a:schemeClr val="accent1">
+                <a:shade val="15000"/>
+              </a:schemeClr>
+            </a:lnRef>
+            <a:fillRef idx="1">
+              <a:schemeClr val="accent1"/>
+            </a:fillRef>
+            <a:effectRef idx="0">
+              <a:schemeClr val="accent1"/>
+            </a:effectRef>
+            <a:fontRef idx="minor">
+              <a:schemeClr val="lt1"/>
+            </a:fontRef>
+          </p:style>
+          <p:txBody>
+            <a:bodyPr rtlCol="0" anchor="ctr"/>
+            <a:lstStyle/>
+            <a:p>
+              <a:pPr algn="ctr"/>
+              <a:endParaRPr lang="en-GB">
+                <a:latin typeface="Times New Roman" panose="02020603050405020304" pitchFamily="18" charset="0"/>
+                <a:cs typeface="Times New Roman" panose="02020603050405020304" pitchFamily="18" charset="0"/>
+              </a:endParaRPr>
+            </a:p>
+          </p:txBody>
+        </p:sp>
+        <p:sp>
+          <p:nvSpPr>
+            <p:cNvPr id="195" name="Rectangle 194">
+              <a:extLst>
+                <a:ext uri="{FF2B5EF4-FFF2-40B4-BE49-F238E27FC236}">
+                  <a16:creationId xmlns:a16="http://schemas.microsoft.com/office/drawing/2014/main" id="{C803A043-45A7-FC71-4F6A-9635D4D4DA10}"/>
+                </a:ext>
+              </a:extLst>
+            </p:cNvPr>
+            <p:cNvSpPr/>
+            <p:nvPr/>
+          </p:nvSpPr>
+          <p:spPr>
+            <a:xfrm>
+              <a:off x="1950922" y="1598606"/>
+              <a:ext cx="1942325" cy="106101"/>
+            </a:xfrm>
+            <a:prstGeom prst="rect">
+              <a:avLst/>
+            </a:prstGeom>
+            <a:solidFill>
+              <a:srgbClr val="0070C0"/>
+            </a:solidFill>
+            <a:ln>
+              <a:solidFill>
+                <a:srgbClr val="0070C0"/>
+              </a:solidFill>
+            </a:ln>
+          </p:spPr>
+          <p:style>
+            <a:lnRef idx="2">
+              <a:schemeClr val="accent1">
+                <a:shade val="15000"/>
+              </a:schemeClr>
+            </a:lnRef>
+            <a:fillRef idx="1">
+              <a:schemeClr val="accent1"/>
+            </a:fillRef>
+            <a:effectRef idx="0">
+              <a:schemeClr val="accent1"/>
+            </a:effectRef>
+            <a:fontRef idx="minor">
+              <a:schemeClr val="lt1"/>
+            </a:fontRef>
+          </p:style>
+          <p:txBody>
+            <a:bodyPr rtlCol="0" anchor="ctr"/>
+            <a:lstStyle/>
+            <a:p>
+              <a:pPr algn="ctr"/>
+              <a:endParaRPr lang="en-GB">
+                <a:latin typeface="Times New Roman" panose="02020603050405020304" pitchFamily="18" charset="0"/>
+                <a:cs typeface="Times New Roman" panose="02020603050405020304" pitchFamily="18" charset="0"/>
+              </a:endParaRPr>
+            </a:p>
+          </p:txBody>
+        </p:sp>
+        <p:grpSp>
+          <p:nvGrpSpPr>
+            <p:cNvPr id="198" name="Group 197">
+              <a:extLst>
+                <a:ext uri="{FF2B5EF4-FFF2-40B4-BE49-F238E27FC236}">
+                  <a16:creationId xmlns:a16="http://schemas.microsoft.com/office/drawing/2014/main" id="{DBC20237-AACC-B146-8327-2E0BB5280969}"/>
+                </a:ext>
+              </a:extLst>
+            </p:cNvPr>
+            <p:cNvGrpSpPr/>
+            <p:nvPr/>
+          </p:nvGrpSpPr>
+          <p:grpSpPr>
+            <a:xfrm>
+              <a:off x="4215385" y="1534378"/>
+              <a:ext cx="2313431" cy="3048458"/>
+              <a:chOff x="4224528" y="1557409"/>
+              <a:chExt cx="2114296" cy="2878824"/>
+            </a:xfrm>
+          </p:grpSpPr>
+          <p:sp>
+            <p:nvSpPr>
+              <p:cNvPr id="128" name="Text 28">
+                <a:extLst>
+                  <a:ext uri="{FF2B5EF4-FFF2-40B4-BE49-F238E27FC236}">
+                    <a16:creationId xmlns:a16="http://schemas.microsoft.com/office/drawing/2014/main" id="{9C77F4D9-528C-3174-B409-0014849592B2}"/>
+                  </a:ext>
+                </a:extLst>
+              </p:cNvPr>
+              <p:cNvSpPr/>
+              <p:nvPr/>
+            </p:nvSpPr>
+            <p:spPr>
+              <a:xfrm>
+                <a:off x="4279392" y="1557409"/>
+                <a:ext cx="2011680" cy="276367"/>
+              </a:xfrm>
+              <a:prstGeom prst="rect">
+                <a:avLst/>
+              </a:prstGeom>
+              <a:noFill/>
+              <a:ln/>
+            </p:spPr>
+            <p:txBody>
+              <a:bodyPr wrap="square" lIns="0" tIns="0" rIns="0" bIns="0" rtlCol="0" anchor="ctr"/>
+              <a:lstStyle/>
+              <a:p>
+                <a:pPr marL="0" indent="0" algn="ctr">
+                  <a:buNone/>
+                </a:pPr>
+                <a:r>
+                  <a:rPr lang="en-US" sz="1000" b="1" kern="0" spc="200" dirty="0">
+                    <a:latin typeface="Times New Roman" panose="02020603050405020304" pitchFamily="18" charset="0"/>
+                    <a:ea typeface="Calibri" pitchFamily="34" charset="-122"/>
+                    <a:cs typeface="Times New Roman" panose="02020603050405020304" pitchFamily="18" charset="0"/>
+                  </a:rPr>
+                  <a:t>12 DETECTORS</a:t>
+                </a:r>
+                <a:endParaRPr lang="en-US" sz="1000" dirty="0">
+                  <a:latin typeface="Times New Roman" panose="02020603050405020304" pitchFamily="18" charset="0"/>
+                  <a:cs typeface="Times New Roman" panose="02020603050405020304" pitchFamily="18" charset="0"/>
+                </a:endParaRPr>
+              </a:p>
+            </p:txBody>
+          </p:sp>
+          <p:sp>
+            <p:nvSpPr>
+              <p:cNvPr id="129" name="Shape 29">
+                <a:extLst>
+                  <a:ext uri="{FF2B5EF4-FFF2-40B4-BE49-F238E27FC236}">
+                    <a16:creationId xmlns:a16="http://schemas.microsoft.com/office/drawing/2014/main" id="{D0B9C743-E0D4-2C2C-A458-91AB0BF5DC0A}"/>
+                  </a:ext>
+                </a:extLst>
+              </p:cNvPr>
+              <p:cNvSpPr/>
+              <p:nvPr/>
+            </p:nvSpPr>
+            <p:spPr>
+              <a:xfrm>
+                <a:off x="4224528" y="1845292"/>
+                <a:ext cx="969264" cy="403035"/>
+              </a:xfrm>
+              <a:prstGeom prst="rect">
+                <a:avLst/>
+              </a:prstGeom>
+              <a:solidFill>
+                <a:srgbClr val="E63946">
+                  <a:alpha val="20000"/>
+                </a:srgbClr>
+              </a:solidFill>
+              <a:ln w="12700">
+                <a:solidFill>
+                  <a:srgbClr val="E63946"/>
+                </a:solidFill>
+                <a:prstDash val="solid"/>
+              </a:ln>
+            </p:spPr>
+          </p:sp>
+          <p:sp>
+            <p:nvSpPr>
+              <p:cNvPr id="130" name="Text 30">
+                <a:extLst>
+                  <a:ext uri="{FF2B5EF4-FFF2-40B4-BE49-F238E27FC236}">
+                    <a16:creationId xmlns:a16="http://schemas.microsoft.com/office/drawing/2014/main" id="{38E7A674-0E43-96CE-23AF-877ADCF59A51}"/>
+                  </a:ext>
+                </a:extLst>
+              </p:cNvPr>
+              <p:cNvSpPr/>
+              <p:nvPr/>
+            </p:nvSpPr>
+            <p:spPr>
+              <a:xfrm>
+                <a:off x="4261104" y="1891353"/>
+                <a:ext cx="807720" cy="295559"/>
+              </a:xfrm>
+              <a:prstGeom prst="rect">
+                <a:avLst/>
+              </a:prstGeom>
+              <a:noFill/>
+              <a:ln/>
+            </p:spPr>
+            <p:txBody>
+              <a:bodyPr wrap="square" lIns="0" tIns="0" rIns="0" bIns="0" rtlCol="0" anchor="ctr"/>
+              <a:lstStyle/>
+              <a:p>
+                <a:pPr marL="0" indent="0">
+                  <a:buNone/>
+                </a:pPr>
+                <a:r>
+                  <a:rPr lang="en-US" sz="900" dirty="0">
+                    <a:latin typeface="Times New Roman" panose="02020603050405020304" pitchFamily="18" charset="0"/>
+                    <a:ea typeface="Calibri" pitchFamily="34" charset="-122"/>
+                    <a:cs typeface="Times New Roman" panose="02020603050405020304" pitchFamily="18" charset="0"/>
+                  </a:rPr>
+                  <a:t>HTML Form</a:t>
+                </a:r>
+                <a:endParaRPr lang="en-US" sz="900" dirty="0">
+                  <a:latin typeface="Times New Roman" panose="02020603050405020304" pitchFamily="18" charset="0"/>
+                  <a:cs typeface="Times New Roman" panose="02020603050405020304" pitchFamily="18" charset="0"/>
+                </a:endParaRPr>
+              </a:p>
+            </p:txBody>
+          </p:sp>
+          <p:sp>
+            <p:nvSpPr>
+              <p:cNvPr id="131" name="Text 31">
+                <a:extLst>
+                  <a:ext uri="{FF2B5EF4-FFF2-40B4-BE49-F238E27FC236}">
+                    <a16:creationId xmlns:a16="http://schemas.microsoft.com/office/drawing/2014/main" id="{C8665AED-9B25-E533-9559-9E7E1EBB54B9}"/>
+                  </a:ext>
+                </a:extLst>
+              </p:cNvPr>
+              <p:cNvSpPr/>
+              <p:nvPr/>
+            </p:nvSpPr>
+            <p:spPr>
+              <a:xfrm>
+                <a:off x="4986528" y="1902867"/>
+                <a:ext cx="201168" cy="276367"/>
+              </a:xfrm>
+              <a:prstGeom prst="rect">
+                <a:avLst/>
+              </a:prstGeom>
+              <a:noFill/>
+              <a:ln/>
+            </p:spPr>
+            <p:txBody>
+              <a:bodyPr wrap="square" lIns="0" tIns="0" rIns="0" bIns="0" rtlCol="0" anchor="ctr"/>
+              <a:lstStyle/>
+              <a:p>
+                <a:pPr marL="0" indent="0" algn="ctr">
+                  <a:buNone/>
+                </a:pPr>
+                <a:r>
+                  <a:rPr lang="en-US" sz="900" b="1" dirty="0">
+                    <a:latin typeface="Times New Roman" panose="02020603050405020304" pitchFamily="18" charset="0"/>
+                    <a:ea typeface="Calibri" pitchFamily="34" charset="-122"/>
+                    <a:cs typeface="Times New Roman" panose="02020603050405020304" pitchFamily="18" charset="0"/>
+                  </a:rPr>
+                  <a:t>3</a:t>
+                </a:r>
+                <a:endParaRPr lang="en-US" sz="900" dirty="0">
+                  <a:latin typeface="Times New Roman" panose="02020603050405020304" pitchFamily="18" charset="0"/>
+                  <a:cs typeface="Times New Roman" panose="02020603050405020304" pitchFamily="18" charset="0"/>
+                </a:endParaRPr>
+              </a:p>
+            </p:txBody>
+          </p:sp>
+          <p:sp>
+            <p:nvSpPr>
+              <p:cNvPr id="132" name="Shape 32">
+                <a:extLst>
+                  <a:ext uri="{FF2B5EF4-FFF2-40B4-BE49-F238E27FC236}">
+                    <a16:creationId xmlns:a16="http://schemas.microsoft.com/office/drawing/2014/main" id="{36843FA5-912D-25FF-8535-B1315F4FA030}"/>
+                  </a:ext>
+                </a:extLst>
+              </p:cNvPr>
+              <p:cNvSpPr/>
+              <p:nvPr/>
+            </p:nvSpPr>
+            <p:spPr>
+              <a:xfrm>
+                <a:off x="4224528" y="2282873"/>
+                <a:ext cx="969264" cy="403035"/>
+              </a:xfrm>
+              <a:prstGeom prst="rect">
+                <a:avLst/>
+              </a:prstGeom>
+              <a:solidFill>
+                <a:srgbClr val="E63946">
+                  <a:alpha val="20000"/>
+                </a:srgbClr>
+              </a:solidFill>
+              <a:ln w="12700">
+                <a:solidFill>
+                  <a:srgbClr val="E63946"/>
+                </a:solidFill>
+                <a:prstDash val="solid"/>
+              </a:ln>
+            </p:spPr>
+          </p:sp>
+          <p:sp>
+            <p:nvSpPr>
+              <p:cNvPr id="133" name="Text 33">
+                <a:extLst>
+                  <a:ext uri="{FF2B5EF4-FFF2-40B4-BE49-F238E27FC236}">
+                    <a16:creationId xmlns:a16="http://schemas.microsoft.com/office/drawing/2014/main" id="{F8117642-8450-8290-4334-E7AE92A73E40}"/>
+                  </a:ext>
+                </a:extLst>
+              </p:cNvPr>
+              <p:cNvSpPr/>
+              <p:nvPr/>
+            </p:nvSpPr>
+            <p:spPr>
+              <a:xfrm>
+                <a:off x="4261104" y="2328934"/>
+                <a:ext cx="807720" cy="295559"/>
+              </a:xfrm>
+              <a:prstGeom prst="rect">
+                <a:avLst/>
+              </a:prstGeom>
+              <a:noFill/>
+              <a:ln/>
+            </p:spPr>
+            <p:txBody>
+              <a:bodyPr wrap="square" lIns="0" tIns="0" rIns="0" bIns="0" rtlCol="0" anchor="ctr"/>
+              <a:lstStyle/>
+              <a:p>
+                <a:pPr marL="0" indent="0">
+                  <a:buNone/>
+                </a:pPr>
+                <a:r>
+                  <a:rPr lang="en-US" sz="900" dirty="0">
+                    <a:latin typeface="Times New Roman" panose="02020603050405020304" pitchFamily="18" charset="0"/>
+                    <a:ea typeface="Calibri" pitchFamily="34" charset="-122"/>
+                    <a:cs typeface="Times New Roman" panose="02020603050405020304" pitchFamily="18" charset="0"/>
+                  </a:rPr>
+                  <a:t>Template Match</a:t>
+                </a:r>
+                <a:endParaRPr lang="en-US" sz="900" dirty="0">
+                  <a:latin typeface="Times New Roman" panose="02020603050405020304" pitchFamily="18" charset="0"/>
+                  <a:cs typeface="Times New Roman" panose="02020603050405020304" pitchFamily="18" charset="0"/>
+                </a:endParaRPr>
+              </a:p>
+            </p:txBody>
+          </p:sp>
+          <p:sp>
+            <p:nvSpPr>
+              <p:cNvPr id="134" name="Text 34">
+                <a:extLst>
+                  <a:ext uri="{FF2B5EF4-FFF2-40B4-BE49-F238E27FC236}">
+                    <a16:creationId xmlns:a16="http://schemas.microsoft.com/office/drawing/2014/main" id="{142ECC65-6878-626C-CC46-35F2B8E222C6}"/>
+                  </a:ext>
+                </a:extLst>
+              </p:cNvPr>
+              <p:cNvSpPr/>
+              <p:nvPr/>
+            </p:nvSpPr>
+            <p:spPr>
+              <a:xfrm>
+                <a:off x="4986528" y="2340449"/>
+                <a:ext cx="201168" cy="276367"/>
+              </a:xfrm>
+              <a:prstGeom prst="rect">
+                <a:avLst/>
+              </a:prstGeom>
+              <a:noFill/>
+              <a:ln/>
+            </p:spPr>
+            <p:txBody>
+              <a:bodyPr wrap="square" lIns="0" tIns="0" rIns="0" bIns="0" rtlCol="0" anchor="ctr"/>
+              <a:lstStyle/>
+              <a:p>
+                <a:pPr marL="0" indent="0" algn="ctr">
+                  <a:buNone/>
+                </a:pPr>
+                <a:r>
+                  <a:rPr lang="en-US" sz="900" b="1" dirty="0">
+                    <a:latin typeface="Times New Roman" panose="02020603050405020304" pitchFamily="18" charset="0"/>
+                    <a:ea typeface="Calibri" pitchFamily="34" charset="-122"/>
+                    <a:cs typeface="Times New Roman" panose="02020603050405020304" pitchFamily="18" charset="0"/>
+                  </a:rPr>
+                  <a:t>3</a:t>
+                </a:r>
+                <a:endParaRPr lang="en-US" sz="900" dirty="0">
+                  <a:latin typeface="Times New Roman" panose="02020603050405020304" pitchFamily="18" charset="0"/>
+                  <a:cs typeface="Times New Roman" panose="02020603050405020304" pitchFamily="18" charset="0"/>
+                </a:endParaRPr>
+              </a:p>
+            </p:txBody>
+          </p:sp>
+          <p:sp>
+            <p:nvSpPr>
+              <p:cNvPr id="135" name="Shape 35">
+                <a:extLst>
+                  <a:ext uri="{FF2B5EF4-FFF2-40B4-BE49-F238E27FC236}">
+                    <a16:creationId xmlns:a16="http://schemas.microsoft.com/office/drawing/2014/main" id="{297E7093-3D6B-1981-3552-85CD804057F0}"/>
+                  </a:ext>
+                </a:extLst>
+              </p:cNvPr>
+              <p:cNvSpPr/>
+              <p:nvPr/>
+            </p:nvSpPr>
+            <p:spPr>
+              <a:xfrm>
+                <a:off x="4224528" y="2720454"/>
+                <a:ext cx="969264" cy="403035"/>
+              </a:xfrm>
+              <a:prstGeom prst="rect">
+                <a:avLst/>
+              </a:prstGeom>
+              <a:solidFill>
+                <a:srgbClr val="E63946">
+                  <a:alpha val="20000"/>
+                </a:srgbClr>
+              </a:solidFill>
+              <a:ln w="12700">
+                <a:solidFill>
+                  <a:srgbClr val="E63946"/>
+                </a:solidFill>
+                <a:prstDash val="solid"/>
+              </a:ln>
+            </p:spPr>
+          </p:sp>
+          <p:sp>
+            <p:nvSpPr>
+              <p:cNvPr id="136" name="Text 36">
+                <a:extLst>
+                  <a:ext uri="{FF2B5EF4-FFF2-40B4-BE49-F238E27FC236}">
+                    <a16:creationId xmlns:a16="http://schemas.microsoft.com/office/drawing/2014/main" id="{94BD3170-00C3-3D1B-3620-CCF35CDEF004}"/>
+                  </a:ext>
+                </a:extLst>
+              </p:cNvPr>
+              <p:cNvSpPr/>
+              <p:nvPr/>
+            </p:nvSpPr>
+            <p:spPr>
+              <a:xfrm>
+                <a:off x="4261104" y="2766515"/>
+                <a:ext cx="807720" cy="295559"/>
+              </a:xfrm>
+              <a:prstGeom prst="rect">
+                <a:avLst/>
+              </a:prstGeom>
+              <a:noFill/>
+              <a:ln/>
+            </p:spPr>
+            <p:txBody>
+              <a:bodyPr wrap="square" lIns="0" tIns="0" rIns="0" bIns="0" rtlCol="0" anchor="ctr"/>
+              <a:lstStyle/>
+              <a:p>
+                <a:pPr marL="0" indent="0">
+                  <a:buNone/>
+                </a:pPr>
+                <a:r>
+                  <a:rPr lang="en-US" sz="900" dirty="0">
+                    <a:latin typeface="Times New Roman" panose="02020603050405020304" pitchFamily="18" charset="0"/>
+                    <a:ea typeface="Calibri" pitchFamily="34" charset="-122"/>
+                    <a:cs typeface="Times New Roman" panose="02020603050405020304" pitchFamily="18" charset="0"/>
+                  </a:rPr>
+                  <a:t>Advance Fee</a:t>
+                </a:r>
+                <a:endParaRPr lang="en-US" sz="900" dirty="0">
+                  <a:latin typeface="Times New Roman" panose="02020603050405020304" pitchFamily="18" charset="0"/>
+                  <a:cs typeface="Times New Roman" panose="02020603050405020304" pitchFamily="18" charset="0"/>
+                </a:endParaRPr>
+              </a:p>
+            </p:txBody>
+          </p:sp>
+          <p:sp>
+            <p:nvSpPr>
+              <p:cNvPr id="137" name="Text 37">
+                <a:extLst>
+                  <a:ext uri="{FF2B5EF4-FFF2-40B4-BE49-F238E27FC236}">
+                    <a16:creationId xmlns:a16="http://schemas.microsoft.com/office/drawing/2014/main" id="{7C960315-0F1E-623E-FDF8-0D23275F555A}"/>
+                  </a:ext>
+                </a:extLst>
+              </p:cNvPr>
+              <p:cNvSpPr/>
+              <p:nvPr/>
+            </p:nvSpPr>
+            <p:spPr>
+              <a:xfrm>
+                <a:off x="4986528" y="2778030"/>
+                <a:ext cx="201168" cy="276367"/>
+              </a:xfrm>
+              <a:prstGeom prst="rect">
+                <a:avLst/>
+              </a:prstGeom>
+              <a:noFill/>
+              <a:ln/>
+            </p:spPr>
+            <p:txBody>
+              <a:bodyPr wrap="square" lIns="0" tIns="0" rIns="0" bIns="0" rtlCol="0" anchor="ctr"/>
+              <a:lstStyle/>
+              <a:p>
+                <a:pPr marL="0" indent="0" algn="ctr">
+                  <a:buNone/>
+                </a:pPr>
+                <a:r>
+                  <a:rPr lang="en-US" sz="900" b="1" dirty="0">
+                    <a:latin typeface="Times New Roman" panose="02020603050405020304" pitchFamily="18" charset="0"/>
+                    <a:ea typeface="Calibri" pitchFamily="34" charset="-122"/>
+                    <a:cs typeface="Times New Roman" panose="02020603050405020304" pitchFamily="18" charset="0"/>
+                  </a:rPr>
+                  <a:t>3</a:t>
+                </a:r>
+                <a:endParaRPr lang="en-US" sz="900" dirty="0">
+                  <a:latin typeface="Times New Roman" panose="02020603050405020304" pitchFamily="18" charset="0"/>
+                  <a:cs typeface="Times New Roman" panose="02020603050405020304" pitchFamily="18" charset="0"/>
+                </a:endParaRPr>
+              </a:p>
+            </p:txBody>
+          </p:sp>
+          <p:sp>
+            <p:nvSpPr>
+              <p:cNvPr id="138" name="Shape 38">
+                <a:extLst>
+                  <a:ext uri="{FF2B5EF4-FFF2-40B4-BE49-F238E27FC236}">
+                    <a16:creationId xmlns:a16="http://schemas.microsoft.com/office/drawing/2014/main" id="{717D5D7E-464B-B228-0C3B-657591AE31AA}"/>
+                  </a:ext>
+                </a:extLst>
+              </p:cNvPr>
+              <p:cNvSpPr/>
+              <p:nvPr/>
+            </p:nvSpPr>
+            <p:spPr>
+              <a:xfrm>
+                <a:off x="4224528" y="3158036"/>
+                <a:ext cx="969264" cy="403035"/>
+              </a:xfrm>
+              <a:prstGeom prst="rect">
+                <a:avLst/>
+              </a:prstGeom>
+              <a:solidFill>
+                <a:srgbClr val="E63946">
+                  <a:alpha val="20000"/>
+                </a:srgbClr>
+              </a:solidFill>
+              <a:ln w="12700">
+                <a:solidFill>
+                  <a:srgbClr val="E63946"/>
+                </a:solidFill>
+                <a:prstDash val="solid"/>
+              </a:ln>
+            </p:spPr>
+          </p:sp>
+          <p:sp>
+            <p:nvSpPr>
+              <p:cNvPr id="139" name="Text 39">
+                <a:extLst>
+                  <a:ext uri="{FF2B5EF4-FFF2-40B4-BE49-F238E27FC236}">
+                    <a16:creationId xmlns:a16="http://schemas.microsoft.com/office/drawing/2014/main" id="{201782AA-8E4C-BA73-FB94-A4274FDD9B97}"/>
+                  </a:ext>
+                </a:extLst>
+              </p:cNvPr>
+              <p:cNvSpPr/>
+              <p:nvPr/>
+            </p:nvSpPr>
+            <p:spPr>
+              <a:xfrm>
+                <a:off x="4261104" y="3204097"/>
+                <a:ext cx="807720" cy="295559"/>
+              </a:xfrm>
+              <a:prstGeom prst="rect">
+                <a:avLst/>
+              </a:prstGeom>
+              <a:noFill/>
+              <a:ln/>
+            </p:spPr>
+            <p:txBody>
+              <a:bodyPr wrap="square" lIns="0" tIns="0" rIns="0" bIns="0" rtlCol="0" anchor="ctr"/>
+              <a:lstStyle/>
+              <a:p>
+                <a:pPr marL="0" indent="0">
+                  <a:buNone/>
+                </a:pPr>
+                <a:r>
+                  <a:rPr lang="en-US" sz="900" dirty="0">
+                    <a:latin typeface="Times New Roman" panose="02020603050405020304" pitchFamily="18" charset="0"/>
+                    <a:ea typeface="Calibri" pitchFamily="34" charset="-122"/>
+                    <a:cs typeface="Times New Roman" panose="02020603050405020304" pitchFamily="18" charset="0"/>
+                  </a:rPr>
+                  <a:t>Crypto Bait</a:t>
+                </a:r>
+                <a:endParaRPr lang="en-US" sz="900" dirty="0">
+                  <a:latin typeface="Times New Roman" panose="02020603050405020304" pitchFamily="18" charset="0"/>
+                  <a:cs typeface="Times New Roman" panose="02020603050405020304" pitchFamily="18" charset="0"/>
+                </a:endParaRPr>
+              </a:p>
+            </p:txBody>
+          </p:sp>
+          <p:sp>
+            <p:nvSpPr>
+              <p:cNvPr id="140" name="Text 40">
+                <a:extLst>
+                  <a:ext uri="{FF2B5EF4-FFF2-40B4-BE49-F238E27FC236}">
+                    <a16:creationId xmlns:a16="http://schemas.microsoft.com/office/drawing/2014/main" id="{4EEB6822-A353-E2B9-3042-F87137E4CDAC}"/>
+                  </a:ext>
+                </a:extLst>
+              </p:cNvPr>
+              <p:cNvSpPr/>
+              <p:nvPr/>
+            </p:nvSpPr>
+            <p:spPr>
+              <a:xfrm>
+                <a:off x="4986528" y="3215611"/>
+                <a:ext cx="201168" cy="276367"/>
+              </a:xfrm>
+              <a:prstGeom prst="rect">
+                <a:avLst/>
+              </a:prstGeom>
+              <a:noFill/>
+              <a:ln/>
+            </p:spPr>
+            <p:txBody>
+              <a:bodyPr wrap="square" lIns="0" tIns="0" rIns="0" bIns="0" rtlCol="0" anchor="ctr"/>
+              <a:lstStyle/>
+              <a:p>
+                <a:pPr marL="0" indent="0" algn="ctr">
+                  <a:buNone/>
+                </a:pPr>
+                <a:r>
+                  <a:rPr lang="en-US" sz="900" b="1" dirty="0">
+                    <a:latin typeface="Times New Roman" panose="02020603050405020304" pitchFamily="18" charset="0"/>
+                    <a:ea typeface="Calibri" pitchFamily="34" charset="-122"/>
+                    <a:cs typeface="Times New Roman" panose="02020603050405020304" pitchFamily="18" charset="0"/>
+                  </a:rPr>
+                  <a:t>3</a:t>
+                </a:r>
+                <a:endParaRPr lang="en-US" sz="900" dirty="0">
+                  <a:latin typeface="Times New Roman" panose="02020603050405020304" pitchFamily="18" charset="0"/>
+                  <a:cs typeface="Times New Roman" panose="02020603050405020304" pitchFamily="18" charset="0"/>
+                </a:endParaRPr>
+              </a:p>
+            </p:txBody>
+          </p:sp>
+          <p:sp>
+            <p:nvSpPr>
+              <p:cNvPr id="141" name="Shape 41">
+                <a:extLst>
+                  <a:ext uri="{FF2B5EF4-FFF2-40B4-BE49-F238E27FC236}">
+                    <a16:creationId xmlns:a16="http://schemas.microsoft.com/office/drawing/2014/main" id="{945004E0-EC10-5BE3-9932-B9988EC93796}"/>
+                  </a:ext>
+                </a:extLst>
+              </p:cNvPr>
+              <p:cNvSpPr/>
+              <p:nvPr/>
+            </p:nvSpPr>
+            <p:spPr>
+              <a:xfrm>
+                <a:off x="4224528" y="3595617"/>
+                <a:ext cx="969264" cy="403035"/>
+              </a:xfrm>
+              <a:prstGeom prst="rect">
+                <a:avLst/>
+              </a:prstGeom>
+              <a:solidFill>
+                <a:srgbClr val="F4A261">
+                  <a:alpha val="20000"/>
+                </a:srgbClr>
+              </a:solidFill>
+              <a:ln w="12700">
+                <a:solidFill>
+                  <a:srgbClr val="F4A261"/>
+                </a:solidFill>
+                <a:prstDash val="solid"/>
+              </a:ln>
+            </p:spPr>
+          </p:sp>
+          <p:sp>
+            <p:nvSpPr>
+              <p:cNvPr id="142" name="Text 42">
+                <a:extLst>
+                  <a:ext uri="{FF2B5EF4-FFF2-40B4-BE49-F238E27FC236}">
+                    <a16:creationId xmlns:a16="http://schemas.microsoft.com/office/drawing/2014/main" id="{ADD92398-14FE-1200-DD41-885E0326239F}"/>
+                  </a:ext>
+                </a:extLst>
+              </p:cNvPr>
+              <p:cNvSpPr/>
+              <p:nvPr/>
+            </p:nvSpPr>
+            <p:spPr>
+              <a:xfrm>
+                <a:off x="4261104" y="3641678"/>
+                <a:ext cx="807720" cy="295559"/>
+              </a:xfrm>
+              <a:prstGeom prst="rect">
+                <a:avLst/>
+              </a:prstGeom>
+              <a:noFill/>
+              <a:ln/>
+            </p:spPr>
+            <p:txBody>
+              <a:bodyPr wrap="square" lIns="0" tIns="0" rIns="0" bIns="0" rtlCol="0" anchor="ctr"/>
+              <a:lstStyle/>
+              <a:p>
+                <a:pPr marL="0" indent="0">
+                  <a:buNone/>
+                </a:pPr>
+                <a:r>
+                  <a:rPr lang="en-US" sz="900" dirty="0">
+                    <a:latin typeface="Times New Roman" panose="02020603050405020304" pitchFamily="18" charset="0"/>
+                    <a:ea typeface="Calibri" pitchFamily="34" charset="-122"/>
+                    <a:cs typeface="Times New Roman" panose="02020603050405020304" pitchFamily="18" charset="0"/>
+                  </a:rPr>
+                  <a:t>Suspicious URL</a:t>
+                </a:r>
+                <a:endParaRPr lang="en-US" sz="900" dirty="0">
+                  <a:latin typeface="Times New Roman" panose="02020603050405020304" pitchFamily="18" charset="0"/>
+                  <a:cs typeface="Times New Roman" panose="02020603050405020304" pitchFamily="18" charset="0"/>
+                </a:endParaRPr>
+              </a:p>
+            </p:txBody>
+          </p:sp>
+          <p:sp>
+            <p:nvSpPr>
+              <p:cNvPr id="143" name="Text 43">
+                <a:extLst>
+                  <a:ext uri="{FF2B5EF4-FFF2-40B4-BE49-F238E27FC236}">
+                    <a16:creationId xmlns:a16="http://schemas.microsoft.com/office/drawing/2014/main" id="{2FD5992F-4F56-B24C-8C90-92E358421153}"/>
+                  </a:ext>
+                </a:extLst>
+              </p:cNvPr>
+              <p:cNvSpPr/>
+              <p:nvPr/>
+            </p:nvSpPr>
+            <p:spPr>
+              <a:xfrm>
+                <a:off x="4986528" y="3653193"/>
+                <a:ext cx="201168" cy="276367"/>
+              </a:xfrm>
+              <a:prstGeom prst="rect">
+                <a:avLst/>
+              </a:prstGeom>
+              <a:noFill/>
+              <a:ln/>
+            </p:spPr>
+            <p:txBody>
+              <a:bodyPr wrap="square" lIns="0" tIns="0" rIns="0" bIns="0" rtlCol="0" anchor="ctr"/>
+              <a:lstStyle/>
+              <a:p>
+                <a:pPr marL="0" indent="0" algn="ctr">
+                  <a:buNone/>
+                </a:pPr>
+                <a:r>
+                  <a:rPr lang="en-US" sz="900" b="1" dirty="0">
+                    <a:latin typeface="Times New Roman" panose="02020603050405020304" pitchFamily="18" charset="0"/>
+                    <a:ea typeface="Calibri" pitchFamily="34" charset="-122"/>
+                    <a:cs typeface="Times New Roman" panose="02020603050405020304" pitchFamily="18" charset="0"/>
+                  </a:rPr>
+                  <a:t>2</a:t>
+                </a:r>
+                <a:endParaRPr lang="en-US" sz="900" dirty="0">
+                  <a:latin typeface="Times New Roman" panose="02020603050405020304" pitchFamily="18" charset="0"/>
+                  <a:cs typeface="Times New Roman" panose="02020603050405020304" pitchFamily="18" charset="0"/>
+                </a:endParaRPr>
+              </a:p>
+            </p:txBody>
+          </p:sp>
+          <p:sp>
+            <p:nvSpPr>
+              <p:cNvPr id="144" name="Shape 44">
+                <a:extLst>
+                  <a:ext uri="{FF2B5EF4-FFF2-40B4-BE49-F238E27FC236}">
+                    <a16:creationId xmlns:a16="http://schemas.microsoft.com/office/drawing/2014/main" id="{80A36945-038E-10DC-55BC-36E8B00EC270}"/>
+                  </a:ext>
+                </a:extLst>
+              </p:cNvPr>
+              <p:cNvSpPr/>
+              <p:nvPr/>
+            </p:nvSpPr>
+            <p:spPr>
+              <a:xfrm>
+                <a:off x="4224528" y="4033198"/>
+                <a:ext cx="969264" cy="403035"/>
+              </a:xfrm>
+              <a:prstGeom prst="rect">
+                <a:avLst/>
+              </a:prstGeom>
+              <a:solidFill>
+                <a:srgbClr val="F4A261">
+                  <a:alpha val="20000"/>
+                </a:srgbClr>
+              </a:solidFill>
+              <a:ln w="12700">
+                <a:solidFill>
+                  <a:srgbClr val="F4A261"/>
+                </a:solidFill>
+                <a:prstDash val="solid"/>
+              </a:ln>
+            </p:spPr>
+          </p:sp>
+          <p:sp>
+            <p:nvSpPr>
+              <p:cNvPr id="145" name="Text 45">
+                <a:extLst>
+                  <a:ext uri="{FF2B5EF4-FFF2-40B4-BE49-F238E27FC236}">
+                    <a16:creationId xmlns:a16="http://schemas.microsoft.com/office/drawing/2014/main" id="{E19586CA-5552-DF29-812C-5BF1AD0EEEEC}"/>
+                  </a:ext>
+                </a:extLst>
+              </p:cNvPr>
+              <p:cNvSpPr/>
+              <p:nvPr/>
+            </p:nvSpPr>
+            <p:spPr>
+              <a:xfrm>
+                <a:off x="4261104" y="4079259"/>
+                <a:ext cx="807720" cy="295559"/>
+              </a:xfrm>
+              <a:prstGeom prst="rect">
+                <a:avLst/>
+              </a:prstGeom>
+              <a:noFill/>
+              <a:ln/>
+            </p:spPr>
+            <p:txBody>
+              <a:bodyPr wrap="square" lIns="0" tIns="0" rIns="0" bIns="0" rtlCol="0" anchor="ctr"/>
+              <a:lstStyle/>
+              <a:p>
+                <a:pPr marL="0" indent="0">
+                  <a:buNone/>
+                </a:pPr>
+                <a:r>
+                  <a:rPr lang="en-US" sz="900" dirty="0">
+                    <a:latin typeface="Times New Roman" panose="02020603050405020304" pitchFamily="18" charset="0"/>
+                    <a:ea typeface="Calibri" pitchFamily="34" charset="-122"/>
+                    <a:cs typeface="Times New Roman" panose="02020603050405020304" pitchFamily="18" charset="0"/>
+                  </a:rPr>
+                  <a:t>Brand Spoofing</a:t>
+                </a:r>
+                <a:endParaRPr lang="en-US" sz="900" dirty="0">
+                  <a:latin typeface="Times New Roman" panose="02020603050405020304" pitchFamily="18" charset="0"/>
+                  <a:cs typeface="Times New Roman" panose="02020603050405020304" pitchFamily="18" charset="0"/>
+                </a:endParaRPr>
+              </a:p>
+            </p:txBody>
+          </p:sp>
+          <p:sp>
+            <p:nvSpPr>
+              <p:cNvPr id="146" name="Text 46">
+                <a:extLst>
+                  <a:ext uri="{FF2B5EF4-FFF2-40B4-BE49-F238E27FC236}">
+                    <a16:creationId xmlns:a16="http://schemas.microsoft.com/office/drawing/2014/main" id="{6A7C78B8-3E58-D7F6-8915-E0A37AECE975}"/>
+                  </a:ext>
+                </a:extLst>
+              </p:cNvPr>
+              <p:cNvSpPr/>
+              <p:nvPr/>
+            </p:nvSpPr>
+            <p:spPr>
+              <a:xfrm>
+                <a:off x="4986528" y="4090774"/>
+                <a:ext cx="201168" cy="276367"/>
+              </a:xfrm>
+              <a:prstGeom prst="rect">
+                <a:avLst/>
+              </a:prstGeom>
+              <a:noFill/>
+              <a:ln/>
+            </p:spPr>
+            <p:txBody>
+              <a:bodyPr wrap="square" lIns="0" tIns="0" rIns="0" bIns="0" rtlCol="0" anchor="ctr"/>
+              <a:lstStyle/>
+              <a:p>
+                <a:pPr marL="0" indent="0" algn="ctr">
+                  <a:buNone/>
+                </a:pPr>
+                <a:r>
+                  <a:rPr lang="en-US" sz="900" b="1" dirty="0">
+                    <a:latin typeface="Times New Roman" panose="02020603050405020304" pitchFamily="18" charset="0"/>
+                    <a:ea typeface="Calibri" pitchFamily="34" charset="-122"/>
+                    <a:cs typeface="Times New Roman" panose="02020603050405020304" pitchFamily="18" charset="0"/>
+                  </a:rPr>
+                  <a:t>2</a:t>
+                </a:r>
+                <a:endParaRPr lang="en-US" sz="900" dirty="0">
+                  <a:latin typeface="Times New Roman" panose="02020603050405020304" pitchFamily="18" charset="0"/>
+                  <a:cs typeface="Times New Roman" panose="02020603050405020304" pitchFamily="18" charset="0"/>
+                </a:endParaRPr>
+              </a:p>
+            </p:txBody>
+          </p:sp>
+          <p:sp>
+            <p:nvSpPr>
+              <p:cNvPr id="147" name="Shape 47">
+                <a:extLst>
+                  <a:ext uri="{FF2B5EF4-FFF2-40B4-BE49-F238E27FC236}">
+                    <a16:creationId xmlns:a16="http://schemas.microsoft.com/office/drawing/2014/main" id="{50E9308E-7EFA-C6FD-AF29-9872A369CE3E}"/>
+                  </a:ext>
+                </a:extLst>
+              </p:cNvPr>
+              <p:cNvSpPr/>
+              <p:nvPr/>
+            </p:nvSpPr>
+            <p:spPr>
+              <a:xfrm>
+                <a:off x="5340094" y="1850409"/>
+                <a:ext cx="987554" cy="397918"/>
+              </a:xfrm>
+              <a:prstGeom prst="rect">
+                <a:avLst/>
+              </a:prstGeom>
+              <a:solidFill>
+                <a:srgbClr val="F4A261">
+                  <a:alpha val="20000"/>
+                </a:srgbClr>
+              </a:solidFill>
+              <a:ln w="12700">
+                <a:solidFill>
+                  <a:srgbClr val="F4A261"/>
+                </a:solidFill>
+                <a:prstDash val="solid"/>
+              </a:ln>
+            </p:spPr>
+          </p:sp>
+          <p:sp>
+            <p:nvSpPr>
+              <p:cNvPr id="148" name="Text 48">
+                <a:extLst>
+                  <a:ext uri="{FF2B5EF4-FFF2-40B4-BE49-F238E27FC236}">
+                    <a16:creationId xmlns:a16="http://schemas.microsoft.com/office/drawing/2014/main" id="{A4ECAF23-9F59-FD74-A5D9-6DECB438344B}"/>
+                  </a:ext>
+                </a:extLst>
+              </p:cNvPr>
+              <p:cNvSpPr/>
+              <p:nvPr/>
+            </p:nvSpPr>
+            <p:spPr>
+              <a:xfrm>
+                <a:off x="5376670" y="1896470"/>
+                <a:ext cx="822962" cy="291807"/>
+              </a:xfrm>
+              <a:prstGeom prst="rect">
+                <a:avLst/>
+              </a:prstGeom>
+              <a:noFill/>
+              <a:ln/>
+            </p:spPr>
+            <p:txBody>
+              <a:bodyPr wrap="square" lIns="0" tIns="0" rIns="0" bIns="0" rtlCol="0" anchor="ctr"/>
+              <a:lstStyle/>
+              <a:p>
+                <a:pPr marL="0" indent="0">
+                  <a:buNone/>
+                </a:pPr>
+                <a:r>
+                  <a:rPr lang="en-US" sz="900" dirty="0">
+                    <a:latin typeface="Times New Roman" panose="02020603050405020304" pitchFamily="18" charset="0"/>
+                    <a:ea typeface="Calibri" pitchFamily="34" charset="-122"/>
+                    <a:cs typeface="Times New Roman" panose="02020603050405020304" pitchFamily="18" charset="0"/>
+                  </a:rPr>
+                  <a:t>Sender Mismatch</a:t>
+                </a:r>
+                <a:endParaRPr lang="en-US" sz="900" dirty="0">
+                  <a:latin typeface="Times New Roman" panose="02020603050405020304" pitchFamily="18" charset="0"/>
+                  <a:cs typeface="Times New Roman" panose="02020603050405020304" pitchFamily="18" charset="0"/>
+                </a:endParaRPr>
+              </a:p>
+            </p:txBody>
+          </p:sp>
+          <p:sp>
+            <p:nvSpPr>
+              <p:cNvPr id="149" name="Text 49">
+                <a:extLst>
+                  <a:ext uri="{FF2B5EF4-FFF2-40B4-BE49-F238E27FC236}">
+                    <a16:creationId xmlns:a16="http://schemas.microsoft.com/office/drawing/2014/main" id="{DA0C2536-99A4-D6BF-8DF4-93639358312B}"/>
+                  </a:ext>
+                </a:extLst>
+              </p:cNvPr>
+              <p:cNvSpPr/>
+              <p:nvPr/>
+            </p:nvSpPr>
+            <p:spPr>
+              <a:xfrm>
+                <a:off x="6137656" y="1910544"/>
+                <a:ext cx="201168" cy="276367"/>
+              </a:xfrm>
+              <a:prstGeom prst="rect">
+                <a:avLst/>
+              </a:prstGeom>
+              <a:noFill/>
+              <a:ln/>
+            </p:spPr>
+            <p:txBody>
+              <a:bodyPr wrap="square" lIns="0" tIns="0" rIns="0" bIns="0" rtlCol="0" anchor="ctr"/>
+              <a:lstStyle/>
+              <a:p>
+                <a:pPr marL="0" indent="0" algn="ctr">
+                  <a:buNone/>
+                </a:pPr>
+                <a:r>
+                  <a:rPr lang="en-US" sz="900" b="1" dirty="0">
+                    <a:latin typeface="Times New Roman" panose="02020603050405020304" pitchFamily="18" charset="0"/>
+                    <a:ea typeface="Calibri" pitchFamily="34" charset="-122"/>
+                    <a:cs typeface="Times New Roman" panose="02020603050405020304" pitchFamily="18" charset="0"/>
+                  </a:rPr>
+                  <a:t>2</a:t>
+                </a:r>
+                <a:endParaRPr lang="en-US" sz="900" dirty="0">
+                  <a:latin typeface="Times New Roman" panose="02020603050405020304" pitchFamily="18" charset="0"/>
+                  <a:cs typeface="Times New Roman" panose="02020603050405020304" pitchFamily="18" charset="0"/>
+                </a:endParaRPr>
+              </a:p>
+            </p:txBody>
+          </p:sp>
+          <p:sp>
+            <p:nvSpPr>
+              <p:cNvPr id="150" name="Shape 50">
+                <a:extLst>
+                  <a:ext uri="{FF2B5EF4-FFF2-40B4-BE49-F238E27FC236}">
+                    <a16:creationId xmlns:a16="http://schemas.microsoft.com/office/drawing/2014/main" id="{FE8E42E7-7459-9791-53F3-19467FDA338F}"/>
+                  </a:ext>
+                </a:extLst>
+              </p:cNvPr>
+              <p:cNvSpPr/>
+              <p:nvPr/>
+            </p:nvSpPr>
+            <p:spPr>
+              <a:xfrm>
+                <a:off x="5340094" y="2287990"/>
+                <a:ext cx="987554" cy="397918"/>
+              </a:xfrm>
+              <a:prstGeom prst="rect">
+                <a:avLst/>
+              </a:prstGeom>
+              <a:solidFill>
+                <a:srgbClr val="F4C842">
+                  <a:alpha val="20000"/>
+                </a:srgbClr>
+              </a:solidFill>
+              <a:ln w="12700">
+                <a:solidFill>
+                  <a:srgbClr val="F4C842"/>
+                </a:solidFill>
+                <a:prstDash val="solid"/>
+              </a:ln>
+            </p:spPr>
+          </p:sp>
+          <p:sp>
+            <p:nvSpPr>
+              <p:cNvPr id="151" name="Text 51">
+                <a:extLst>
+                  <a:ext uri="{FF2B5EF4-FFF2-40B4-BE49-F238E27FC236}">
+                    <a16:creationId xmlns:a16="http://schemas.microsoft.com/office/drawing/2014/main" id="{DC7C43AE-3177-D2E9-FF25-9CD8FEB44A2F}"/>
+                  </a:ext>
+                </a:extLst>
+              </p:cNvPr>
+              <p:cNvSpPr/>
+              <p:nvPr/>
+            </p:nvSpPr>
+            <p:spPr>
+              <a:xfrm>
+                <a:off x="5376670" y="2334051"/>
+                <a:ext cx="822962" cy="291807"/>
+              </a:xfrm>
+              <a:prstGeom prst="rect">
+                <a:avLst/>
+              </a:prstGeom>
+              <a:noFill/>
+              <a:ln/>
+            </p:spPr>
+            <p:txBody>
+              <a:bodyPr wrap="square" lIns="0" tIns="0" rIns="0" bIns="0" rtlCol="0" anchor="ctr"/>
+              <a:lstStyle/>
+              <a:p>
+                <a:pPr marL="0" indent="0">
+                  <a:buNone/>
+                </a:pPr>
+                <a:r>
+                  <a:rPr lang="en-US" sz="900" dirty="0">
+                    <a:latin typeface="Times New Roman" panose="02020603050405020304" pitchFamily="18" charset="0"/>
+                    <a:ea typeface="Calibri" pitchFamily="34" charset="-122"/>
+                    <a:cs typeface="Times New Roman" panose="02020603050405020304" pitchFamily="18" charset="0"/>
+                  </a:rPr>
+                  <a:t>SPF / DKIM Fail</a:t>
+                </a:r>
+                <a:endParaRPr lang="en-US" sz="900" dirty="0">
+                  <a:latin typeface="Times New Roman" panose="02020603050405020304" pitchFamily="18" charset="0"/>
+                  <a:cs typeface="Times New Roman" panose="02020603050405020304" pitchFamily="18" charset="0"/>
+                </a:endParaRPr>
+              </a:p>
+            </p:txBody>
+          </p:sp>
+          <p:sp>
+            <p:nvSpPr>
+              <p:cNvPr id="152" name="Text 52">
+                <a:extLst>
+                  <a:ext uri="{FF2B5EF4-FFF2-40B4-BE49-F238E27FC236}">
+                    <a16:creationId xmlns:a16="http://schemas.microsoft.com/office/drawing/2014/main" id="{D0663BBD-D359-2158-AAA7-020619A85D2C}"/>
+                  </a:ext>
+                </a:extLst>
+              </p:cNvPr>
+              <p:cNvSpPr/>
+              <p:nvPr/>
+            </p:nvSpPr>
+            <p:spPr>
+              <a:xfrm>
+                <a:off x="6137656" y="2348126"/>
+                <a:ext cx="201168" cy="276367"/>
+              </a:xfrm>
+              <a:prstGeom prst="rect">
+                <a:avLst/>
+              </a:prstGeom>
+              <a:noFill/>
+              <a:ln/>
+            </p:spPr>
+            <p:txBody>
+              <a:bodyPr wrap="square" lIns="0" tIns="0" rIns="0" bIns="0" rtlCol="0" anchor="ctr"/>
+              <a:lstStyle/>
+              <a:p>
+                <a:pPr marL="0" indent="0" algn="ctr">
+                  <a:buNone/>
+                </a:pPr>
+                <a:r>
+                  <a:rPr lang="en-US" sz="900" b="1" dirty="0">
+                    <a:latin typeface="Times New Roman" panose="02020603050405020304" pitchFamily="18" charset="0"/>
+                    <a:ea typeface="Calibri" pitchFamily="34" charset="-122"/>
+                    <a:cs typeface="Times New Roman" panose="02020603050405020304" pitchFamily="18" charset="0"/>
+                  </a:rPr>
+                  <a:t>+2</a:t>
+                </a:r>
+                <a:endParaRPr lang="en-US" sz="900" dirty="0">
+                  <a:latin typeface="Times New Roman" panose="02020603050405020304" pitchFamily="18" charset="0"/>
+                  <a:cs typeface="Times New Roman" panose="02020603050405020304" pitchFamily="18" charset="0"/>
+                </a:endParaRPr>
+              </a:p>
+            </p:txBody>
+          </p:sp>
+          <p:sp>
+            <p:nvSpPr>
+              <p:cNvPr id="153" name="Shape 53">
+                <a:extLst>
+                  <a:ext uri="{FF2B5EF4-FFF2-40B4-BE49-F238E27FC236}">
+                    <a16:creationId xmlns:a16="http://schemas.microsoft.com/office/drawing/2014/main" id="{1D75BCD2-854B-507D-ADC3-46060B895592}"/>
+                  </a:ext>
+                </a:extLst>
+              </p:cNvPr>
+              <p:cNvSpPr/>
+              <p:nvPr/>
+            </p:nvSpPr>
+            <p:spPr>
+              <a:xfrm>
+                <a:off x="5340094" y="2725571"/>
+                <a:ext cx="987554" cy="397918"/>
+              </a:xfrm>
+              <a:prstGeom prst="rect">
+                <a:avLst/>
+              </a:prstGeom>
+              <a:solidFill>
+                <a:srgbClr val="00B4D8">
+                  <a:alpha val="20000"/>
+                </a:srgbClr>
+              </a:solidFill>
+              <a:ln w="12700">
+                <a:solidFill>
+                  <a:srgbClr val="00B4D8"/>
+                </a:solidFill>
+                <a:prstDash val="solid"/>
+              </a:ln>
+            </p:spPr>
+          </p:sp>
+          <p:sp>
+            <p:nvSpPr>
+              <p:cNvPr id="154" name="Text 54">
+                <a:extLst>
+                  <a:ext uri="{FF2B5EF4-FFF2-40B4-BE49-F238E27FC236}">
+                    <a16:creationId xmlns:a16="http://schemas.microsoft.com/office/drawing/2014/main" id="{3914278E-02C0-13D6-2669-F1FC8D835C4D}"/>
+                  </a:ext>
+                </a:extLst>
+              </p:cNvPr>
+              <p:cNvSpPr/>
+              <p:nvPr/>
+            </p:nvSpPr>
+            <p:spPr>
+              <a:xfrm>
+                <a:off x="5376670" y="2771632"/>
+                <a:ext cx="822962" cy="291807"/>
+              </a:xfrm>
+              <a:prstGeom prst="rect">
+                <a:avLst/>
+              </a:prstGeom>
+              <a:noFill/>
+              <a:ln/>
+            </p:spPr>
+            <p:txBody>
+              <a:bodyPr wrap="square" lIns="0" tIns="0" rIns="0" bIns="0" rtlCol="0" anchor="ctr"/>
+              <a:lstStyle/>
+              <a:p>
+                <a:pPr marL="0" indent="0">
+                  <a:buNone/>
+                </a:pPr>
+                <a:r>
+                  <a:rPr lang="en-US" sz="900" dirty="0">
+                    <a:latin typeface="Times New Roman" panose="02020603050405020304" pitchFamily="18" charset="0"/>
+                    <a:ea typeface="Calibri" pitchFamily="34" charset="-122"/>
+                    <a:cs typeface="Times New Roman" panose="02020603050405020304" pitchFamily="18" charset="0"/>
+                  </a:rPr>
+                  <a:t>Urgency Language</a:t>
+                </a:r>
+                <a:endParaRPr lang="en-US" sz="900" dirty="0">
+                  <a:latin typeface="Times New Roman" panose="02020603050405020304" pitchFamily="18" charset="0"/>
+                  <a:cs typeface="Times New Roman" panose="02020603050405020304" pitchFamily="18" charset="0"/>
+                </a:endParaRPr>
+              </a:p>
+            </p:txBody>
+          </p:sp>
+          <p:sp>
+            <p:nvSpPr>
+              <p:cNvPr id="155" name="Text 55">
+                <a:extLst>
+                  <a:ext uri="{FF2B5EF4-FFF2-40B4-BE49-F238E27FC236}">
+                    <a16:creationId xmlns:a16="http://schemas.microsoft.com/office/drawing/2014/main" id="{F0D47145-47B2-8642-C6B2-DBF1A1446A39}"/>
+                  </a:ext>
+                </a:extLst>
+              </p:cNvPr>
+              <p:cNvSpPr/>
+              <p:nvPr/>
+            </p:nvSpPr>
+            <p:spPr>
+              <a:xfrm>
+                <a:off x="6137656" y="2785707"/>
+                <a:ext cx="201168" cy="276367"/>
+              </a:xfrm>
+              <a:prstGeom prst="rect">
+                <a:avLst/>
+              </a:prstGeom>
+              <a:noFill/>
+              <a:ln/>
+            </p:spPr>
+            <p:txBody>
+              <a:bodyPr wrap="square" lIns="0" tIns="0" rIns="0" bIns="0" rtlCol="0" anchor="ctr"/>
+              <a:lstStyle/>
+              <a:p>
+                <a:pPr marL="0" indent="0" algn="ctr">
+                  <a:buNone/>
+                </a:pPr>
+                <a:r>
+                  <a:rPr lang="en-US" sz="900" b="1" dirty="0">
+                    <a:latin typeface="Times New Roman" panose="02020603050405020304" pitchFamily="18" charset="0"/>
+                    <a:ea typeface="Calibri" pitchFamily="34" charset="-122"/>
+                    <a:cs typeface="Times New Roman" panose="02020603050405020304" pitchFamily="18" charset="0"/>
+                  </a:rPr>
+                  <a:t>1</a:t>
+                </a:r>
+                <a:endParaRPr lang="en-US" sz="900" dirty="0">
+                  <a:latin typeface="Times New Roman" panose="02020603050405020304" pitchFamily="18" charset="0"/>
+                  <a:cs typeface="Times New Roman" panose="02020603050405020304" pitchFamily="18" charset="0"/>
+                </a:endParaRPr>
+              </a:p>
+            </p:txBody>
+          </p:sp>
+          <p:sp>
+            <p:nvSpPr>
+              <p:cNvPr id="156" name="Shape 56">
+                <a:extLst>
+                  <a:ext uri="{FF2B5EF4-FFF2-40B4-BE49-F238E27FC236}">
+                    <a16:creationId xmlns:a16="http://schemas.microsoft.com/office/drawing/2014/main" id="{D644F6E3-6A7F-8952-9765-FA0C5FA058AE}"/>
+                  </a:ext>
+                </a:extLst>
+              </p:cNvPr>
+              <p:cNvSpPr/>
+              <p:nvPr/>
+            </p:nvSpPr>
+            <p:spPr>
+              <a:xfrm>
+                <a:off x="5340094" y="3163153"/>
+                <a:ext cx="987554" cy="397918"/>
+              </a:xfrm>
+              <a:prstGeom prst="rect">
+                <a:avLst/>
+              </a:prstGeom>
+              <a:solidFill>
+                <a:srgbClr val="00B4D8">
+                  <a:alpha val="20000"/>
+                </a:srgbClr>
+              </a:solidFill>
+              <a:ln w="12700">
+                <a:solidFill>
+                  <a:srgbClr val="00B4D8"/>
+                </a:solidFill>
+                <a:prstDash val="solid"/>
+              </a:ln>
+            </p:spPr>
+          </p:sp>
+          <p:sp>
+            <p:nvSpPr>
+              <p:cNvPr id="157" name="Text 57">
+                <a:extLst>
+                  <a:ext uri="{FF2B5EF4-FFF2-40B4-BE49-F238E27FC236}">
+                    <a16:creationId xmlns:a16="http://schemas.microsoft.com/office/drawing/2014/main" id="{DE0A3BC3-8E8C-8CAD-D994-81A6C71738F0}"/>
+                  </a:ext>
+                </a:extLst>
+              </p:cNvPr>
+              <p:cNvSpPr/>
+              <p:nvPr/>
+            </p:nvSpPr>
+            <p:spPr>
+              <a:xfrm>
+                <a:off x="5376670" y="3209214"/>
+                <a:ext cx="822962" cy="291807"/>
+              </a:xfrm>
+              <a:prstGeom prst="rect">
+                <a:avLst/>
+              </a:prstGeom>
+              <a:noFill/>
+              <a:ln/>
+            </p:spPr>
+            <p:txBody>
+              <a:bodyPr wrap="square" lIns="0" tIns="0" rIns="0" bIns="0" rtlCol="0" anchor="ctr"/>
+              <a:lstStyle/>
+              <a:p>
+                <a:pPr marL="0" indent="0">
+                  <a:buNone/>
+                </a:pPr>
+                <a:r>
+                  <a:rPr lang="en-US" sz="900" dirty="0">
+                    <a:latin typeface="Times New Roman" panose="02020603050405020304" pitchFamily="18" charset="0"/>
+                    <a:ea typeface="Calibri" pitchFamily="34" charset="-122"/>
+                    <a:cs typeface="Times New Roman" panose="02020603050405020304" pitchFamily="18" charset="0"/>
+                  </a:rPr>
+                  <a:t>Language Score</a:t>
+                </a:r>
+                <a:endParaRPr lang="en-US" sz="900" dirty="0">
+                  <a:latin typeface="Times New Roman" panose="02020603050405020304" pitchFamily="18" charset="0"/>
+                  <a:cs typeface="Times New Roman" panose="02020603050405020304" pitchFamily="18" charset="0"/>
+                </a:endParaRPr>
+              </a:p>
+            </p:txBody>
+          </p:sp>
+          <p:sp>
+            <p:nvSpPr>
+              <p:cNvPr id="158" name="Text 58">
+                <a:extLst>
+                  <a:ext uri="{FF2B5EF4-FFF2-40B4-BE49-F238E27FC236}">
+                    <a16:creationId xmlns:a16="http://schemas.microsoft.com/office/drawing/2014/main" id="{3115EB75-8945-0B6B-A0A9-22AA5E4B83A9}"/>
+                  </a:ext>
+                </a:extLst>
+              </p:cNvPr>
+              <p:cNvSpPr/>
+              <p:nvPr/>
+            </p:nvSpPr>
+            <p:spPr>
+              <a:xfrm>
+                <a:off x="6137656" y="3223288"/>
+                <a:ext cx="201168" cy="276367"/>
+              </a:xfrm>
+              <a:prstGeom prst="rect">
+                <a:avLst/>
+              </a:prstGeom>
+              <a:noFill/>
+              <a:ln/>
+            </p:spPr>
+            <p:txBody>
+              <a:bodyPr wrap="square" lIns="0" tIns="0" rIns="0" bIns="0" rtlCol="0" anchor="ctr"/>
+              <a:lstStyle/>
+              <a:p>
+                <a:pPr marL="0" indent="0" algn="ctr">
+                  <a:buNone/>
+                </a:pPr>
+                <a:r>
+                  <a:rPr lang="en-US" sz="900" b="1" dirty="0">
+                    <a:latin typeface="Times New Roman" panose="02020603050405020304" pitchFamily="18" charset="0"/>
+                    <a:ea typeface="Calibri" pitchFamily="34" charset="-122"/>
+                    <a:cs typeface="Times New Roman" panose="02020603050405020304" pitchFamily="18" charset="0"/>
+                  </a:rPr>
+                  <a:t>1</a:t>
+                </a:r>
+                <a:endParaRPr lang="en-US" sz="900" dirty="0">
+                  <a:latin typeface="Times New Roman" panose="02020603050405020304" pitchFamily="18" charset="0"/>
+                  <a:cs typeface="Times New Roman" panose="02020603050405020304" pitchFamily="18" charset="0"/>
+                </a:endParaRPr>
+              </a:p>
+            </p:txBody>
+          </p:sp>
+          <p:sp>
+            <p:nvSpPr>
+              <p:cNvPr id="159" name="Shape 59">
+                <a:extLst>
+                  <a:ext uri="{FF2B5EF4-FFF2-40B4-BE49-F238E27FC236}">
+                    <a16:creationId xmlns:a16="http://schemas.microsoft.com/office/drawing/2014/main" id="{98F8CE5A-32DD-32D8-C5B3-DBC748EC92A1}"/>
+                  </a:ext>
+                </a:extLst>
+              </p:cNvPr>
+              <p:cNvSpPr/>
+              <p:nvPr/>
+            </p:nvSpPr>
+            <p:spPr>
+              <a:xfrm>
+                <a:off x="5340094" y="3600734"/>
+                <a:ext cx="987554" cy="397918"/>
+              </a:xfrm>
+              <a:prstGeom prst="rect">
+                <a:avLst/>
+              </a:prstGeom>
+              <a:solidFill>
+                <a:srgbClr val="00B4D8">
+                  <a:alpha val="20000"/>
+                </a:srgbClr>
+              </a:solidFill>
+              <a:ln w="12700">
+                <a:solidFill>
+                  <a:srgbClr val="00B4D8"/>
+                </a:solidFill>
+                <a:prstDash val="solid"/>
+              </a:ln>
+            </p:spPr>
+          </p:sp>
+          <p:sp>
+            <p:nvSpPr>
+              <p:cNvPr id="160" name="Text 60">
+                <a:extLst>
+                  <a:ext uri="{FF2B5EF4-FFF2-40B4-BE49-F238E27FC236}">
+                    <a16:creationId xmlns:a16="http://schemas.microsoft.com/office/drawing/2014/main" id="{D539845A-754F-F82B-2AF9-BD5C8DE0FFB9}"/>
+                  </a:ext>
+                </a:extLst>
+              </p:cNvPr>
+              <p:cNvSpPr/>
+              <p:nvPr/>
+            </p:nvSpPr>
+            <p:spPr>
+              <a:xfrm>
+                <a:off x="5376670" y="3646795"/>
+                <a:ext cx="822962" cy="291807"/>
+              </a:xfrm>
+              <a:prstGeom prst="rect">
+                <a:avLst/>
+              </a:prstGeom>
+              <a:noFill/>
+              <a:ln/>
+            </p:spPr>
+            <p:txBody>
+              <a:bodyPr wrap="square" lIns="0" tIns="0" rIns="0" bIns="0" rtlCol="0" anchor="ctr"/>
+              <a:lstStyle/>
+              <a:p>
+                <a:pPr marL="0" indent="0">
+                  <a:buNone/>
+                </a:pPr>
+                <a:r>
+                  <a:rPr lang="en-US" sz="900" dirty="0">
+                    <a:latin typeface="Times New Roman" panose="02020603050405020304" pitchFamily="18" charset="0"/>
+                    <a:ea typeface="Calibri" pitchFamily="34" charset="-122"/>
+                    <a:cs typeface="Times New Roman" panose="02020603050405020304" pitchFamily="18" charset="0"/>
+                  </a:rPr>
+                  <a:t>Sentiment</a:t>
+                </a:r>
+                <a:endParaRPr lang="en-US" sz="900" dirty="0">
+                  <a:latin typeface="Times New Roman" panose="02020603050405020304" pitchFamily="18" charset="0"/>
+                  <a:cs typeface="Times New Roman" panose="02020603050405020304" pitchFamily="18" charset="0"/>
+                </a:endParaRPr>
+              </a:p>
+            </p:txBody>
+          </p:sp>
+          <p:sp>
+            <p:nvSpPr>
+              <p:cNvPr id="161" name="Text 61">
+                <a:extLst>
+                  <a:ext uri="{FF2B5EF4-FFF2-40B4-BE49-F238E27FC236}">
+                    <a16:creationId xmlns:a16="http://schemas.microsoft.com/office/drawing/2014/main" id="{CEBC7172-25D2-9145-B169-262E2E924FEF}"/>
+                  </a:ext>
+                </a:extLst>
+              </p:cNvPr>
+              <p:cNvSpPr/>
+              <p:nvPr/>
+            </p:nvSpPr>
+            <p:spPr>
+              <a:xfrm>
+                <a:off x="6137656" y="3660870"/>
+                <a:ext cx="201168" cy="276367"/>
+              </a:xfrm>
+              <a:prstGeom prst="rect">
+                <a:avLst/>
+              </a:prstGeom>
+              <a:noFill/>
+              <a:ln/>
+            </p:spPr>
+            <p:txBody>
+              <a:bodyPr wrap="square" lIns="0" tIns="0" rIns="0" bIns="0" rtlCol="0" anchor="ctr"/>
+              <a:lstStyle/>
+              <a:p>
+                <a:pPr marL="0" indent="0" algn="ctr">
+                  <a:buNone/>
+                </a:pPr>
+                <a:r>
+                  <a:rPr lang="en-US" sz="900" b="1" dirty="0">
+                    <a:latin typeface="Times New Roman" panose="02020603050405020304" pitchFamily="18" charset="0"/>
+                    <a:ea typeface="Calibri" pitchFamily="34" charset="-122"/>
+                    <a:cs typeface="Times New Roman" panose="02020603050405020304" pitchFamily="18" charset="0"/>
+                  </a:rPr>
+                  <a:t>1</a:t>
+                </a:r>
+                <a:endParaRPr lang="en-US" sz="900" dirty="0">
+                  <a:latin typeface="Times New Roman" panose="02020603050405020304" pitchFamily="18" charset="0"/>
+                  <a:cs typeface="Times New Roman" panose="02020603050405020304" pitchFamily="18" charset="0"/>
+                </a:endParaRPr>
+              </a:p>
+            </p:txBody>
+          </p:sp>
+          <p:sp>
+            <p:nvSpPr>
+              <p:cNvPr id="162" name="Shape 62">
+                <a:extLst>
+                  <a:ext uri="{FF2B5EF4-FFF2-40B4-BE49-F238E27FC236}">
+                    <a16:creationId xmlns:a16="http://schemas.microsoft.com/office/drawing/2014/main" id="{591CE814-3A22-D286-F3C2-7DAD7AB287E0}"/>
+                  </a:ext>
+                </a:extLst>
+              </p:cNvPr>
+              <p:cNvSpPr/>
+              <p:nvPr/>
+            </p:nvSpPr>
+            <p:spPr>
+              <a:xfrm>
+                <a:off x="5340094" y="4038315"/>
+                <a:ext cx="987554" cy="397918"/>
+              </a:xfrm>
+              <a:prstGeom prst="rect">
+                <a:avLst/>
+              </a:prstGeom>
+              <a:solidFill>
+                <a:srgbClr val="F4A261">
+                  <a:alpha val="20000"/>
+                </a:srgbClr>
+              </a:solidFill>
+              <a:ln w="12700">
+                <a:solidFill>
+                  <a:srgbClr val="F4A261"/>
+                </a:solidFill>
+                <a:prstDash val="solid"/>
+              </a:ln>
+            </p:spPr>
+          </p:sp>
+          <p:sp>
+            <p:nvSpPr>
+              <p:cNvPr id="163" name="Text 63">
+                <a:extLst>
+                  <a:ext uri="{FF2B5EF4-FFF2-40B4-BE49-F238E27FC236}">
+                    <a16:creationId xmlns:a16="http://schemas.microsoft.com/office/drawing/2014/main" id="{AA26A35A-DD5C-0D7D-1FD1-DD90879BABBE}"/>
+                  </a:ext>
+                </a:extLst>
+              </p:cNvPr>
+              <p:cNvSpPr/>
+              <p:nvPr/>
+            </p:nvSpPr>
+            <p:spPr>
+              <a:xfrm>
+                <a:off x="5376670" y="4084376"/>
+                <a:ext cx="822962" cy="291807"/>
+              </a:xfrm>
+              <a:prstGeom prst="rect">
+                <a:avLst/>
+              </a:prstGeom>
+              <a:noFill/>
+              <a:ln/>
+            </p:spPr>
+            <p:txBody>
+              <a:bodyPr wrap="square" lIns="0" tIns="0" rIns="0" bIns="0" rtlCol="0" anchor="ctr"/>
+              <a:lstStyle/>
+              <a:p>
+                <a:pPr marL="0" indent="0">
+                  <a:buNone/>
+                </a:pPr>
+                <a:r>
+                  <a:rPr lang="en-US" sz="900" dirty="0">
+                    <a:latin typeface="Times New Roman" panose="02020603050405020304" pitchFamily="18" charset="0"/>
+                    <a:ea typeface="Calibri" pitchFamily="34" charset="-122"/>
+                    <a:cs typeface="Times New Roman" panose="02020603050405020304" pitchFamily="18" charset="0"/>
+                  </a:rPr>
+                  <a:t>Free Email Abuse</a:t>
+                </a:r>
+                <a:endParaRPr lang="en-US" sz="900" dirty="0">
+                  <a:latin typeface="Times New Roman" panose="02020603050405020304" pitchFamily="18" charset="0"/>
+                  <a:cs typeface="Times New Roman" panose="02020603050405020304" pitchFamily="18" charset="0"/>
+                </a:endParaRPr>
+              </a:p>
+            </p:txBody>
+          </p:sp>
+          <p:sp>
+            <p:nvSpPr>
+              <p:cNvPr id="164" name="Text 64">
+                <a:extLst>
+                  <a:ext uri="{FF2B5EF4-FFF2-40B4-BE49-F238E27FC236}">
+                    <a16:creationId xmlns:a16="http://schemas.microsoft.com/office/drawing/2014/main" id="{A31CA625-D349-C423-6708-8A1F11E1FEF4}"/>
+                  </a:ext>
+                </a:extLst>
+              </p:cNvPr>
+              <p:cNvSpPr/>
+              <p:nvPr/>
+            </p:nvSpPr>
+            <p:spPr>
+              <a:xfrm>
+                <a:off x="6137656" y="4098451"/>
+                <a:ext cx="201168" cy="276367"/>
+              </a:xfrm>
+              <a:prstGeom prst="rect">
+                <a:avLst/>
+              </a:prstGeom>
+              <a:noFill/>
+              <a:ln/>
+            </p:spPr>
+            <p:txBody>
+              <a:bodyPr wrap="square" lIns="0" tIns="0" rIns="0" bIns="0" rtlCol="0" anchor="ctr"/>
+              <a:lstStyle/>
+              <a:p>
+                <a:pPr marL="0" indent="0" algn="ctr">
+                  <a:buNone/>
+                </a:pPr>
+                <a:r>
+                  <a:rPr lang="en-US" sz="900" b="1" dirty="0">
+                    <a:latin typeface="Times New Roman" panose="02020603050405020304" pitchFamily="18" charset="0"/>
+                    <a:ea typeface="Calibri" pitchFamily="34" charset="-122"/>
+                    <a:cs typeface="Times New Roman" panose="02020603050405020304" pitchFamily="18" charset="0"/>
+                  </a:rPr>
+                  <a:t>2</a:t>
+                </a:r>
+                <a:endParaRPr lang="en-US" sz="900" dirty="0">
+                  <a:latin typeface="Times New Roman" panose="02020603050405020304" pitchFamily="18" charset="0"/>
+                  <a:cs typeface="Times New Roman" panose="02020603050405020304" pitchFamily="18" charset="0"/>
+                </a:endParaRPr>
+              </a:p>
+            </p:txBody>
+          </p:sp>
+        </p:grpSp>
+        <p:sp>
+          <p:nvSpPr>
+            <p:cNvPr id="199" name="Rectangle 198">
+              <a:extLst>
+                <a:ext uri="{FF2B5EF4-FFF2-40B4-BE49-F238E27FC236}">
+                  <a16:creationId xmlns:a16="http://schemas.microsoft.com/office/drawing/2014/main" id="{8EA21C65-35A7-7956-F9BA-426D0E37EC5D}"/>
+                </a:ext>
+              </a:extLst>
+            </p:cNvPr>
+            <p:cNvSpPr/>
+            <p:nvPr/>
+          </p:nvSpPr>
+          <p:spPr>
+            <a:xfrm>
+              <a:off x="4109994" y="1420414"/>
+              <a:ext cx="2522945" cy="3304413"/>
+            </a:xfrm>
+            <a:prstGeom prst="rect">
+              <a:avLst/>
+            </a:prstGeom>
+            <a:noFill/>
+            <a:ln>
+              <a:solidFill>
+                <a:srgbClr val="0070C0"/>
+              </a:solidFill>
+            </a:ln>
+          </p:spPr>
+          <p:style>
+            <a:lnRef idx="2">
+              <a:schemeClr val="accent1">
+                <a:shade val="15000"/>
+              </a:schemeClr>
+            </a:lnRef>
+            <a:fillRef idx="1">
+              <a:schemeClr val="accent1"/>
+            </a:fillRef>
+            <a:effectRef idx="0">
+              <a:schemeClr val="accent1"/>
+            </a:effectRef>
+            <a:fontRef idx="minor">
+              <a:schemeClr val="lt1"/>
+            </a:fontRef>
+          </p:style>
+          <p:txBody>
+            <a:bodyPr rtlCol="0" anchor="ctr"/>
+            <a:lstStyle/>
+            <a:p>
+              <a:pPr algn="ctr"/>
+              <a:endParaRPr lang="en-GB">
+                <a:latin typeface="Times New Roman" panose="02020603050405020304" pitchFamily="18" charset="0"/>
+                <a:cs typeface="Times New Roman" panose="02020603050405020304" pitchFamily="18" charset="0"/>
+              </a:endParaRPr>
+            </a:p>
+          </p:txBody>
+        </p:sp>
+        <p:sp>
+          <p:nvSpPr>
+            <p:cNvPr id="245" name="Rectangle 244">
+              <a:extLst>
+                <a:ext uri="{FF2B5EF4-FFF2-40B4-BE49-F238E27FC236}">
+                  <a16:creationId xmlns:a16="http://schemas.microsoft.com/office/drawing/2014/main" id="{ACCCE271-AA5D-723E-71CB-3056582B8156}"/>
+                </a:ext>
+              </a:extLst>
+            </p:cNvPr>
+            <p:cNvSpPr/>
+            <p:nvPr/>
+          </p:nvSpPr>
+          <p:spPr>
+            <a:xfrm>
+              <a:off x="7065913" y="1598607"/>
+              <a:ext cx="1463040" cy="2595303"/>
+            </a:xfrm>
+            <a:prstGeom prst="rect">
+              <a:avLst/>
+            </a:prstGeom>
+            <a:noFill/>
+            <a:ln>
+              <a:solidFill>
+                <a:srgbClr val="0070C0"/>
+              </a:solidFill>
+            </a:ln>
+          </p:spPr>
+          <p:style>
+            <a:lnRef idx="2">
+              <a:schemeClr val="accent1">
+                <a:shade val="15000"/>
+              </a:schemeClr>
+            </a:lnRef>
+            <a:fillRef idx="1">
+              <a:schemeClr val="accent1"/>
+            </a:fillRef>
+            <a:effectRef idx="0">
+              <a:schemeClr val="accent1"/>
+            </a:effectRef>
+            <a:fontRef idx="minor">
+              <a:schemeClr val="lt1"/>
+            </a:fontRef>
+          </p:style>
+          <p:txBody>
+            <a:bodyPr rtlCol="0" anchor="ctr"/>
+            <a:lstStyle/>
+            <a:p>
+              <a:pPr algn="ctr"/>
+              <a:endParaRPr lang="en-GB">
+                <a:latin typeface="Times New Roman" panose="02020603050405020304" pitchFamily="18" charset="0"/>
+                <a:cs typeface="Times New Roman" panose="02020603050405020304" pitchFamily="18" charset="0"/>
+              </a:endParaRPr>
+            </a:p>
+          </p:txBody>
+        </p:sp>
+        <p:sp>
+          <p:nvSpPr>
+            <p:cNvPr id="200" name="Rectangle 199">
+              <a:extLst>
+                <a:ext uri="{FF2B5EF4-FFF2-40B4-BE49-F238E27FC236}">
+                  <a16:creationId xmlns:a16="http://schemas.microsoft.com/office/drawing/2014/main" id="{86199203-2FA1-F623-6F21-17DA3E57ADBE}"/>
+                </a:ext>
+              </a:extLst>
+            </p:cNvPr>
+            <p:cNvSpPr/>
+            <p:nvPr/>
+          </p:nvSpPr>
+          <p:spPr>
+            <a:xfrm>
+              <a:off x="4104389" y="1430403"/>
+              <a:ext cx="2515867" cy="103976"/>
+            </a:xfrm>
+            <a:prstGeom prst="rect">
+              <a:avLst/>
+            </a:prstGeom>
+            <a:solidFill>
+              <a:srgbClr val="0070C0"/>
+            </a:solidFill>
+            <a:ln>
+              <a:solidFill>
+                <a:srgbClr val="0070C0"/>
+              </a:solidFill>
+            </a:ln>
+          </p:spPr>
+          <p:style>
+            <a:lnRef idx="2">
+              <a:schemeClr val="accent1">
+                <a:shade val="15000"/>
+              </a:schemeClr>
+            </a:lnRef>
+            <a:fillRef idx="1">
+              <a:schemeClr val="accent1"/>
+            </a:fillRef>
+            <a:effectRef idx="0">
+              <a:schemeClr val="accent1"/>
+            </a:effectRef>
+            <a:fontRef idx="minor">
+              <a:schemeClr val="lt1"/>
+            </a:fontRef>
+          </p:style>
+          <p:txBody>
+            <a:bodyPr rtlCol="0" anchor="ctr"/>
+            <a:lstStyle/>
+            <a:p>
+              <a:pPr algn="ctr"/>
+              <a:endParaRPr lang="en-GB">
+                <a:latin typeface="Times New Roman" panose="02020603050405020304" pitchFamily="18" charset="0"/>
+                <a:cs typeface="Times New Roman" panose="02020603050405020304" pitchFamily="18" charset="0"/>
+              </a:endParaRPr>
+            </a:p>
+          </p:txBody>
+        </p:sp>
+        <p:sp>
+          <p:nvSpPr>
+            <p:cNvPr id="203" name="Rectangle 202">
+              <a:extLst>
+                <a:ext uri="{FF2B5EF4-FFF2-40B4-BE49-F238E27FC236}">
+                  <a16:creationId xmlns:a16="http://schemas.microsoft.com/office/drawing/2014/main" id="{222611A5-9EAF-A51B-EC2E-F575F17E1B0E}"/>
+                </a:ext>
+              </a:extLst>
+            </p:cNvPr>
+            <p:cNvSpPr/>
+            <p:nvPr/>
+          </p:nvSpPr>
+          <p:spPr>
+            <a:xfrm>
+              <a:off x="9086083" y="1634359"/>
+              <a:ext cx="1350269" cy="3301798"/>
+            </a:xfrm>
+            <a:prstGeom prst="rect">
+              <a:avLst/>
+            </a:prstGeom>
+            <a:noFill/>
+            <a:ln>
+              <a:solidFill>
+                <a:srgbClr val="0070C0"/>
+              </a:solidFill>
+            </a:ln>
+          </p:spPr>
+          <p:style>
+            <a:lnRef idx="2">
+              <a:schemeClr val="accent1">
+                <a:shade val="15000"/>
+              </a:schemeClr>
+            </a:lnRef>
+            <a:fillRef idx="1">
+              <a:schemeClr val="accent1"/>
+            </a:fillRef>
+            <a:effectRef idx="0">
+              <a:schemeClr val="accent1"/>
+            </a:effectRef>
+            <a:fontRef idx="minor">
+              <a:schemeClr val="lt1"/>
+            </a:fontRef>
+          </p:style>
+          <p:txBody>
+            <a:bodyPr rtlCol="0" anchor="ctr"/>
+            <a:lstStyle/>
+            <a:p>
+              <a:pPr algn="ctr"/>
+              <a:endParaRPr lang="en-GB">
+                <a:latin typeface="Times New Roman" panose="02020603050405020304" pitchFamily="18" charset="0"/>
+                <a:cs typeface="Times New Roman" panose="02020603050405020304" pitchFamily="18" charset="0"/>
+              </a:endParaRPr>
+            </a:p>
+          </p:txBody>
+        </p:sp>
+        <p:sp>
+          <p:nvSpPr>
+            <p:cNvPr id="204" name="Rectangle 203">
+              <a:extLst>
+                <a:ext uri="{FF2B5EF4-FFF2-40B4-BE49-F238E27FC236}">
+                  <a16:creationId xmlns:a16="http://schemas.microsoft.com/office/drawing/2014/main" id="{227D5CA6-935B-9F62-FAD2-EC751F3E7FAD}"/>
+                </a:ext>
+              </a:extLst>
+            </p:cNvPr>
+            <p:cNvSpPr/>
+            <p:nvPr/>
+          </p:nvSpPr>
+          <p:spPr>
+            <a:xfrm>
+              <a:off x="9102104" y="1650197"/>
+              <a:ext cx="1342895" cy="112066"/>
+            </a:xfrm>
+            <a:prstGeom prst="rect">
+              <a:avLst/>
+            </a:prstGeom>
+            <a:solidFill>
+              <a:srgbClr val="0070C0"/>
+            </a:solidFill>
+            <a:ln>
+              <a:solidFill>
+                <a:srgbClr val="0070C0"/>
+              </a:solidFill>
+            </a:ln>
+          </p:spPr>
+          <p:style>
+            <a:lnRef idx="2">
+              <a:schemeClr val="accent1">
+                <a:shade val="15000"/>
+              </a:schemeClr>
+            </a:lnRef>
+            <a:fillRef idx="1">
+              <a:schemeClr val="accent1"/>
+            </a:fillRef>
+            <a:effectRef idx="0">
+              <a:schemeClr val="accent1"/>
+            </a:effectRef>
+            <a:fontRef idx="minor">
+              <a:schemeClr val="lt1"/>
+            </a:fontRef>
+          </p:style>
+          <p:txBody>
+            <a:bodyPr rtlCol="0" anchor="ctr"/>
+            <a:lstStyle/>
+            <a:p>
+              <a:pPr algn="ctr"/>
+              <a:endParaRPr lang="en-GB" dirty="0">
+                <a:latin typeface="Times New Roman" panose="02020603050405020304" pitchFamily="18" charset="0"/>
+                <a:cs typeface="Times New Roman" panose="02020603050405020304" pitchFamily="18" charset="0"/>
+              </a:endParaRPr>
+            </a:p>
+          </p:txBody>
+        </p:sp>
+        <p:sp>
+          <p:nvSpPr>
+            <p:cNvPr id="247" name="Rectangle 246">
+              <a:extLst>
+                <a:ext uri="{FF2B5EF4-FFF2-40B4-BE49-F238E27FC236}">
+                  <a16:creationId xmlns:a16="http://schemas.microsoft.com/office/drawing/2014/main" id="{4CC72701-1F13-7FF5-FAD4-D7301332BAC9}"/>
+                </a:ext>
+              </a:extLst>
+            </p:cNvPr>
+            <p:cNvSpPr/>
+            <p:nvPr/>
+          </p:nvSpPr>
+          <p:spPr>
+            <a:xfrm>
+              <a:off x="7079751" y="1606440"/>
+              <a:ext cx="1433181" cy="134761"/>
+            </a:xfrm>
+            <a:prstGeom prst="rect">
+              <a:avLst/>
+            </a:prstGeom>
+            <a:solidFill>
+              <a:srgbClr val="0070C0"/>
+            </a:solidFill>
+            <a:ln>
+              <a:solidFill>
+                <a:srgbClr val="0070C0"/>
+              </a:solidFill>
+            </a:ln>
+          </p:spPr>
+          <p:style>
+            <a:lnRef idx="2">
+              <a:schemeClr val="accent1">
+                <a:shade val="15000"/>
+              </a:schemeClr>
+            </a:lnRef>
+            <a:fillRef idx="1">
+              <a:schemeClr val="accent1"/>
+            </a:fillRef>
+            <a:effectRef idx="0">
+              <a:schemeClr val="accent1"/>
+            </a:effectRef>
+            <a:fontRef idx="minor">
+              <a:schemeClr val="lt1"/>
+            </a:fontRef>
+          </p:style>
+          <p:txBody>
+            <a:bodyPr rtlCol="0" anchor="ctr"/>
+            <a:lstStyle/>
+            <a:p>
+              <a:pPr algn="ctr"/>
+              <a:endParaRPr lang="en-GB" dirty="0">
                 <a:latin typeface="Times New Roman" panose="02020603050405020304" pitchFamily="18" charset="0"/>
                 <a:cs typeface="Times New Roman" panose="02020603050405020304" pitchFamily="18" charset="0"/>
               </a:endParaRPr>
@@ -13147,7 +15829,7 @@
                   <a:ea typeface="Calibri" pitchFamily="34" charset="-122"/>
                   <a:cs typeface="Times New Roman" panose="02020603050405020304" pitchFamily="18" charset="0"/>
                 </a:rPr>
-                <a:t>Rules Beat Black Boxes for Explainability</a:t>
+                <a:t>Rules Beat Black Boxes </a:t>
               </a:r>
               <a:endParaRPr lang="en-US" sz="2000" dirty="0">
                 <a:latin typeface="Times New Roman" panose="02020603050405020304" pitchFamily="18" charset="0"/>
@@ -13498,7 +16180,7 @@
                   <a:ea typeface="Calibri" pitchFamily="34" charset="-122"/>
                   <a:cs typeface="Times New Roman" panose="02020603050405020304" pitchFamily="18" charset="0"/>
                 </a:rPr>
-                <a:t>Post-transmission DLP is reactive — the data has already left. PhishGuard intercepts outgoing drafts before sending, enforcing PCI-DSS, DPDP Act 2023, and UIDAI obligations at the perimeter.</a:t>
+                <a:t>Post-transmission DLP is reactive — the data has already left. PhishGuard intercepts outgoing drafts before sending.</a:t>
               </a:r>
               <a:endParaRPr lang="en-US" dirty="0">
                 <a:latin typeface="Times New Roman" panose="02020603050405020304" pitchFamily="18" charset="0"/>
@@ -13597,19 +16279,17 @@
             <a:bodyPr wrap="square" lIns="0" tIns="0" rIns="0" bIns="0" rtlCol="0" anchor="ctr"/>
             <a:lstStyle/>
             <a:p>
-              <a:pPr marL="0" indent="0">
-                <a:buNone/>
-              </a:pPr>
               <a:r>
-                <a:rPr lang="en-US" sz="2000" b="1" dirty="0">
+                <a:rPr lang="en-GB" sz="2000" b="1" dirty="0">
                   <a:latin typeface="Times New Roman" panose="02020603050405020304" pitchFamily="18" charset="0"/>
                   <a:ea typeface="Calibri" pitchFamily="34" charset="-122"/>
                   <a:cs typeface="Times New Roman" panose="02020603050405020304" pitchFamily="18" charset="0"/>
                 </a:rPr>
-                <a:t>Campaign Thinking Beats Per-Email Thinking</a:t>
+                <a:t>Bulk Email Analysis &gt; Per Email Analysis</a:t>
               </a:r>
-              <a:endParaRPr lang="en-US" sz="2000" dirty="0">
+              <a:endParaRPr lang="en-US" sz="2000" b="1" dirty="0">
                 <a:latin typeface="Times New Roman" panose="02020603050405020304" pitchFamily="18" charset="0"/>
+                <a:ea typeface="Calibri" pitchFamily="34" charset="-122"/>
                 <a:cs typeface="Times New Roman" panose="02020603050405020304" pitchFamily="18" charset="0"/>
               </a:endParaRPr>
             </a:p>
@@ -13925,4 +16605,299 @@
     </a:ext>
   </a:extLst>
 </a:theme>
+</file>
+
+<file path=ppt/theme/theme2.xml><?xml version="1.0" encoding="utf-8"?>
+<a:theme xmlns:a="http://schemas.openxmlformats.org/drawingml/2006/main" name="Office Theme">
+  <a:themeElements>
+    <a:clrScheme name="Office">
+      <a:dk1>
+        <a:sysClr val="windowText" lastClr="000000"/>
+      </a:dk1>
+      <a:lt1>
+        <a:sysClr val="window" lastClr="FFFFFF"/>
+      </a:lt1>
+      <a:dk2>
+        <a:srgbClr val="44546A"/>
+      </a:dk2>
+      <a:lt2>
+        <a:srgbClr val="E7E6E6"/>
+      </a:lt2>
+      <a:accent1>
+        <a:srgbClr val="4472C4"/>
+      </a:accent1>
+      <a:accent2>
+        <a:srgbClr val="ED7D31"/>
+      </a:accent2>
+      <a:accent3>
+        <a:srgbClr val="A5A5A5"/>
+      </a:accent3>
+      <a:accent4>
+        <a:srgbClr val="FFC000"/>
+      </a:accent4>
+      <a:accent5>
+        <a:srgbClr val="5B9BD5"/>
+      </a:accent5>
+      <a:accent6>
+        <a:srgbClr val="70AD47"/>
+      </a:accent6>
+      <a:hlink>
+        <a:srgbClr val="0563C1"/>
+      </a:hlink>
+      <a:folHlink>
+        <a:srgbClr val="954F72"/>
+      </a:folHlink>
+    </a:clrScheme>
+    <a:fontScheme name="Office">
+      <a:majorFont>
+        <a:latin typeface="Calibri Light" panose="020F0302020204030204"/>
+        <a:ea typeface=""/>
+        <a:cs typeface=""/>
+        <a:font script="Jpan" typeface="游ゴシック Light"/>
+        <a:font script="Hang" typeface="맑은 고딕"/>
+        <a:font script="Hans" typeface="等线 Light"/>
+        <a:font script="Hant" typeface="新細明體"/>
+        <a:font script="Arab" typeface="Times New Roman"/>
+        <a:font script="Hebr" typeface="Times New Roman"/>
+        <a:font script="Thai" typeface="Angsana New"/>
+        <a:font script="Ethi" typeface="Nyala"/>
+        <a:font script="Beng" typeface="Vrinda"/>
+        <a:font script="Gujr" typeface="Shruti"/>
+        <a:font script="Khmr" typeface="MoolBoran"/>
+        <a:font script="Knda" typeface="Tunga"/>
+        <a:font script="Guru" typeface="Raavi"/>
+        <a:font script="Cans" typeface="Euphemia"/>
+        <a:font script="Cher" typeface="Plantagenet Cherokee"/>
+        <a:font script="Yiii" typeface="Microsoft Yi Baiti"/>
+        <a:font script="Tibt" typeface="Microsoft Himalaya"/>
+        <a:font script="Thaa" typeface="MV Boli"/>
+        <a:font script="Deva" typeface="Mangal"/>
+        <a:font script="Telu" typeface="Gautami"/>
+        <a:font script="Taml" typeface="Latha"/>
+        <a:font script="Syrc" typeface="Estrangelo Edessa"/>
+        <a:font script="Orya" typeface="Kalinga"/>
+        <a:font script="Mlym" typeface="Kartika"/>
+        <a:font script="Laoo" typeface="DokChampa"/>
+        <a:font script="Sinh" typeface="Iskoola Pota"/>
+        <a:font script="Mong" typeface="Mongolian Baiti"/>
+        <a:font script="Viet" typeface="Times New Roman"/>
+        <a:font script="Uigh" typeface="Microsoft Uighur"/>
+        <a:font script="Geor" typeface="Sylfaen"/>
+        <a:font script="Armn" typeface="Arial"/>
+        <a:font script="Bugi" typeface="Leelawadee UI"/>
+        <a:font script="Bopo" typeface="Microsoft JhengHei"/>
+        <a:font script="Java" typeface="Javanese Text"/>
+        <a:font script="Lisu" typeface="Segoe UI"/>
+        <a:font script="Mymr" typeface="Myanmar Text"/>
+        <a:font script="Nkoo" typeface="Ebrima"/>
+        <a:font script="Olck" typeface="Nirmala UI"/>
+        <a:font script="Osma" typeface="Ebrima"/>
+        <a:font script="Phag" typeface="Phagspa"/>
+        <a:font script="Syrn" typeface="Estrangelo Edessa"/>
+        <a:font script="Syrj" typeface="Estrangelo Edessa"/>
+        <a:font script="Syre" typeface="Estrangelo Edessa"/>
+        <a:font script="Sora" typeface="Nirmala UI"/>
+        <a:font script="Tale" typeface="Microsoft Tai Le"/>
+        <a:font script="Talu" typeface="Microsoft New Tai Lue"/>
+        <a:font script="Tfng" typeface="Ebrima"/>
+      </a:majorFont>
+      <a:minorFont>
+        <a:latin typeface="Calibri" panose="020F0502020204030204"/>
+        <a:ea typeface=""/>
+        <a:cs typeface=""/>
+        <a:font script="Jpan" typeface="游ゴシック"/>
+        <a:font script="Hang" typeface="맑은 고딕"/>
+        <a:font script="Hans" typeface="等线"/>
+        <a:font script="Hant" typeface="新細明體"/>
+        <a:font script="Arab" typeface="Arial"/>
+        <a:font script="Hebr" typeface="Arial"/>
+        <a:font script="Thai" typeface="Cordia New"/>
+        <a:font script="Ethi" typeface="Nyala"/>
+        <a:font script="Beng" typeface="Vrinda"/>
+        <a:font script="Gujr" typeface="Shruti"/>
+        <a:font script="Khmr" typeface="DaunPenh"/>
+        <a:font script="Knda" typeface="Tunga"/>
+        <a:font script="Guru" typeface="Raavi"/>
+        <a:font script="Cans" typeface="Euphemia"/>
+        <a:font script="Cher" typeface="Plantagenet Cherokee"/>
+        <a:font script="Yiii" typeface="Microsoft Yi Baiti"/>
+        <a:font script="Tibt" typeface="Microsoft Himalaya"/>
+        <a:font script="Thaa" typeface="MV Boli"/>
+        <a:font script="Deva" typeface="Mangal"/>
+        <a:font script="Telu" typeface="Gautami"/>
+        <a:font script="Taml" typeface="Latha"/>
+        <a:font script="Syrc" typeface="Estrangelo Edessa"/>
+        <a:font script="Orya" typeface="Kalinga"/>
+        <a:font script="Mlym" typeface="Kartika"/>
+        <a:font script="Laoo" typeface="DokChampa"/>
+        <a:font script="Sinh" typeface="Iskoola Pota"/>
+        <a:font script="Mong" typeface="Mongolian Baiti"/>
+        <a:font script="Viet" typeface="Arial"/>
+        <a:font script="Uigh" typeface="Microsoft Uighur"/>
+        <a:font script="Geor" typeface="Sylfaen"/>
+        <a:font script="Armn" typeface="Arial"/>
+        <a:font script="Bugi" typeface="Leelawadee UI"/>
+        <a:font script="Bopo" typeface="Microsoft JhengHei"/>
+        <a:font script="Java" typeface="Javanese Text"/>
+        <a:font script="Lisu" typeface="Segoe UI"/>
+        <a:font script="Mymr" typeface="Myanmar Text"/>
+        <a:font script="Nkoo" typeface="Ebrima"/>
+        <a:font script="Olck" typeface="Nirmala UI"/>
+        <a:font script="Osma" typeface="Ebrima"/>
+        <a:font script="Phag" typeface="Phagspa"/>
+        <a:font script="Syrn" typeface="Estrangelo Edessa"/>
+        <a:font script="Syrj" typeface="Estrangelo Edessa"/>
+        <a:font script="Syre" typeface="Estrangelo Edessa"/>
+        <a:font script="Sora" typeface="Nirmala UI"/>
+        <a:font script="Tale" typeface="Microsoft Tai Le"/>
+        <a:font script="Talu" typeface="Microsoft New Tai Lue"/>
+        <a:font script="Tfng" typeface="Ebrima"/>
+      </a:minorFont>
+    </a:fontScheme>
+    <a:fmtScheme name="Office">
+      <a:fillStyleLst>
+        <a:solidFill>
+          <a:schemeClr val="phClr"/>
+        </a:solidFill>
+        <a:gradFill rotWithShape="1">
+          <a:gsLst>
+            <a:gs pos="0">
+              <a:schemeClr val="phClr">
+                <a:lumMod val="110000"/>
+                <a:satMod val="105000"/>
+                <a:tint val="67000"/>
+              </a:schemeClr>
+            </a:gs>
+            <a:gs pos="50000">
+              <a:schemeClr val="phClr">
+                <a:lumMod val="105000"/>
+                <a:satMod val="103000"/>
+                <a:tint val="73000"/>
+              </a:schemeClr>
+            </a:gs>
+            <a:gs pos="100000">
+              <a:schemeClr val="phClr">
+                <a:lumMod val="105000"/>
+                <a:satMod val="109000"/>
+                <a:tint val="81000"/>
+              </a:schemeClr>
+            </a:gs>
+          </a:gsLst>
+          <a:lin ang="5400000" scaled="0"/>
+        </a:gradFill>
+        <a:gradFill rotWithShape="1">
+          <a:gsLst>
+            <a:gs pos="0">
+              <a:schemeClr val="phClr">
+                <a:satMod val="103000"/>
+                <a:lumMod val="102000"/>
+                <a:tint val="94000"/>
+              </a:schemeClr>
+            </a:gs>
+            <a:gs pos="50000">
+              <a:schemeClr val="phClr">
+                <a:satMod val="110000"/>
+                <a:lumMod val="100000"/>
+                <a:shade val="100000"/>
+              </a:schemeClr>
+            </a:gs>
+            <a:gs pos="100000">
+              <a:schemeClr val="phClr">
+                <a:lumMod val="99000"/>
+                <a:satMod val="120000"/>
+                <a:shade val="78000"/>
+              </a:schemeClr>
+            </a:gs>
+          </a:gsLst>
+          <a:lin ang="5400000" scaled="0"/>
+        </a:gradFill>
+      </a:fillStyleLst>
+      <a:lnStyleLst>
+        <a:ln w="6350" cap="flat" cmpd="sng" algn="ctr">
+          <a:solidFill>
+            <a:schemeClr val="phClr"/>
+          </a:solidFill>
+          <a:prstDash val="solid"/>
+          <a:miter lim="800000"/>
+        </a:ln>
+        <a:ln w="12700" cap="flat" cmpd="sng" algn="ctr">
+          <a:solidFill>
+            <a:schemeClr val="phClr"/>
+          </a:solidFill>
+          <a:prstDash val="solid"/>
+          <a:miter lim="800000"/>
+        </a:ln>
+        <a:ln w="19050" cap="flat" cmpd="sng" algn="ctr">
+          <a:solidFill>
+            <a:schemeClr val="phClr"/>
+          </a:solidFill>
+          <a:prstDash val="solid"/>
+          <a:miter lim="800000"/>
+        </a:ln>
+      </a:lnStyleLst>
+      <a:effectStyleLst>
+        <a:effectStyle>
+          <a:effectLst/>
+        </a:effectStyle>
+        <a:effectStyle>
+          <a:effectLst/>
+        </a:effectStyle>
+        <a:effectStyle>
+          <a:effectLst>
+            <a:outerShdw blurRad="57150" dist="19050" dir="5400000" algn="ctr" rotWithShape="0">
+              <a:srgbClr val="000000">
+                <a:alpha val="63000"/>
+              </a:srgbClr>
+            </a:outerShdw>
+          </a:effectLst>
+        </a:effectStyle>
+      </a:effectStyleLst>
+      <a:bgFillStyleLst>
+        <a:solidFill>
+          <a:schemeClr val="phClr"/>
+        </a:solidFill>
+        <a:solidFill>
+          <a:schemeClr val="phClr">
+            <a:tint val="95000"/>
+            <a:satMod val="170000"/>
+          </a:schemeClr>
+        </a:solidFill>
+        <a:gradFill rotWithShape="1">
+          <a:gsLst>
+            <a:gs pos="0">
+              <a:schemeClr val="phClr">
+                <a:tint val="93000"/>
+                <a:satMod val="150000"/>
+                <a:shade val="98000"/>
+                <a:lumMod val="102000"/>
+              </a:schemeClr>
+            </a:gs>
+            <a:gs pos="50000">
+              <a:schemeClr val="phClr">
+                <a:tint val="98000"/>
+                <a:satMod val="130000"/>
+                <a:shade val="90000"/>
+                <a:lumMod val="103000"/>
+              </a:schemeClr>
+            </a:gs>
+            <a:gs pos="100000">
+              <a:schemeClr val="phClr">
+                <a:shade val="63000"/>
+                <a:satMod val="120000"/>
+              </a:schemeClr>
+            </a:gs>
+          </a:gsLst>
+          <a:lin ang="5400000" scaled="0"/>
+        </a:gradFill>
+      </a:bgFillStyleLst>
+    </a:fmtScheme>
+  </a:themeElements>
+  <a:objectDefaults/>
+  <a:extraClrSchemeLst/>
+  <a:extLst>
+    <a:ext uri="{05A4C25C-085E-4340-85A3-A5531E510DB2}">
+      <thm15:themeFamily xmlns:thm15="http://schemas.microsoft.com/office/thememl/2012/main" name="Office Theme" id="{62F939B6-93AF-4DB8-9C6B-D6C7DFDC589F}" vid="{4A3C46E8-61CC-4603-A589-7422A47A8E4A}"/>
+    </a:ext>
+  </a:extLst>
+</a:theme>
 </file>
--- a/PhishGuard.pptx
+++ b/PhishGuard.pptx
@@ -205,7 +205,7 @@
           <a:p>
             <a:fld id="{AE422D38-099D-4CB3-96FB-8395CF8B76A9}" type="datetimeFigureOut">
               <a:rPr lang="en-GB" smtClean="0"/>
-              <a:t>25/04/2026</a:t>
+              <a:t>26/04/2026</a:t>
             </a:fld>
             <a:endParaRPr lang="en-GB"/>
           </a:p>
@@ -569,6 +569,115 @@
 </p:notes>
 </file>
 
+<file path=ppt/notesSlides/notesSlide2.xml><?xml version="1.0" encoding="utf-8"?>
+<p:notes xmlns:a="http://schemas.openxmlformats.org/drawingml/2006/main" xmlns:r="http://schemas.openxmlformats.org/officeDocument/2006/relationships" xmlns:p="http://schemas.openxmlformats.org/presentationml/2006/main">
+  <p:cSld>
+    <p:spTree>
+      <p:nvGrpSpPr>
+        <p:cNvPr id="1" name=""/>
+        <p:cNvGrpSpPr/>
+        <p:nvPr/>
+      </p:nvGrpSpPr>
+      <p:grpSpPr>
+        <a:xfrm>
+          <a:off x="0" y="0"/>
+          <a:ext cx="0" cy="0"/>
+          <a:chOff x="0" y="0"/>
+          <a:chExt cx="0" cy="0"/>
+        </a:xfrm>
+      </p:grpSpPr>
+      <p:sp>
+        <p:nvSpPr>
+          <p:cNvPr id="2" name="Slide Image Placeholder 1"/>
+          <p:cNvSpPr>
+            <a:spLocks noGrp="1" noRot="1" noChangeAspect="1"/>
+          </p:cNvSpPr>
+          <p:nvPr>
+            <p:ph type="sldImg"/>
+          </p:nvPr>
+        </p:nvSpPr>
+        <p:spPr/>
+      </p:sp>
+      <p:sp>
+        <p:nvSpPr>
+          <p:cNvPr id="3" name="Notes Placeholder 2"/>
+          <p:cNvSpPr>
+            <a:spLocks noGrp="1"/>
+          </p:cNvSpPr>
+          <p:nvPr>
+            <p:ph type="body" idx="1"/>
+          </p:nvPr>
+        </p:nvSpPr>
+        <p:spPr/>
+        <p:txBody>
+          <a:bodyPr/>
+          <a:lstStyle/>
+          <a:p>
+            <a:r>
+              <a:rPr lang="en-GB" b="1" dirty="0"/>
+              <a:t>SPF (Sender Policy Framework): </a:t>
+            </a:r>
+            <a:r>
+              <a:rPr lang="en-GB" dirty="0"/>
+              <a:t>“Is this sender IP allowed to send emails for this domain?”</a:t>
+            </a:r>
+          </a:p>
+          <a:p>
+            <a:r>
+              <a:rPr lang="en-GB" b="1" dirty="0"/>
+              <a:t>DKIM (DomainKeys Identified </a:t>
+            </a:r>
+            <a:r>
+              <a:rPr lang="en-GB" b="1"/>
+              <a:t>Mail): </a:t>
+            </a:r>
+            <a:r>
+              <a:rPr lang="en-GB"/>
+              <a:t>“</a:t>
+            </a:r>
+            <a:r>
+              <a:rPr lang="en-GB" dirty="0"/>
+              <a:t>Was the email content modified?”</a:t>
+            </a:r>
+          </a:p>
+        </p:txBody>
+      </p:sp>
+      <p:sp>
+        <p:nvSpPr>
+          <p:cNvPr id="4" name="Slide Number Placeholder 3"/>
+          <p:cNvSpPr>
+            <a:spLocks noGrp="1"/>
+          </p:cNvSpPr>
+          <p:nvPr>
+            <p:ph type="sldNum" sz="quarter" idx="5"/>
+          </p:nvPr>
+        </p:nvSpPr>
+        <p:spPr/>
+        <p:txBody>
+          <a:bodyPr/>
+          <a:lstStyle/>
+          <a:p>
+            <a:fld id="{10AD07CF-CCD2-4BBE-9D05-93A1889B57FC}" type="slidenum">
+              <a:rPr lang="en-GB" smtClean="0"/>
+              <a:t>8</a:t>
+            </a:fld>
+            <a:endParaRPr lang="en-GB"/>
+          </a:p>
+        </p:txBody>
+      </p:sp>
+    </p:spTree>
+    <p:extLst>
+      <p:ext uri="{BB962C8B-B14F-4D97-AF65-F5344CB8AC3E}">
+        <p14:creationId xmlns:p14="http://schemas.microsoft.com/office/powerpoint/2010/main" val="3784268683"/>
+      </p:ext>
+    </p:extLst>
+  </p:cSld>
+  <p:clrMapOvr>
+    <a:masterClrMapping/>
+  </p:clrMapOvr>
+</p:notes>
+</file>
+
 <file path=ppt/slideLayouts/slideLayout1.xml><?xml version="1.0" encoding="utf-8"?>
 <p:sldLayout xmlns:a="http://schemas.openxmlformats.org/drawingml/2006/main" xmlns:r="http://schemas.openxmlformats.org/officeDocument/2006/relationships" xmlns:p="http://schemas.openxmlformats.org/presentationml/2006/main" showMasterSp="0" type="title" preserve="1">
   <p:cSld name="Title Slide">
@@ -737,7 +846,7 @@
           <a:p>
             <a:fld id="{B04D14A0-AE39-4FDC-BCBA-1D6173085475}" type="datetimeFigureOut">
               <a:rPr lang="en-GB" smtClean="0"/>
-              <a:t>25/04/2026</a:t>
+              <a:t>26/04/2026</a:t>
             </a:fld>
             <a:endParaRPr lang="en-GB"/>
           </a:p>
@@ -965,7 +1074,7 @@
           <a:p>
             <a:fld id="{B04D14A0-AE39-4FDC-BCBA-1D6173085475}" type="datetimeFigureOut">
               <a:rPr lang="en-GB" smtClean="0"/>
-              <a:t>25/04/2026</a:t>
+              <a:t>26/04/2026</a:t>
             </a:fld>
             <a:endParaRPr lang="en-GB"/>
           </a:p>
@@ -1145,7 +1254,7 @@
           <a:p>
             <a:fld id="{B04D14A0-AE39-4FDC-BCBA-1D6173085475}" type="datetimeFigureOut">
               <a:rPr lang="en-GB" smtClean="0"/>
-              <a:t>25/04/2026</a:t>
+              <a:t>26/04/2026</a:t>
             </a:fld>
             <a:endParaRPr lang="en-GB"/>
           </a:p>
@@ -1315,7 +1424,7 @@
           <a:p>
             <a:fld id="{B04D14A0-AE39-4FDC-BCBA-1D6173085475}" type="datetimeFigureOut">
               <a:rPr lang="en-GB" smtClean="0"/>
-              <a:t>25/04/2026</a:t>
+              <a:t>26/04/2026</a:t>
             </a:fld>
             <a:endParaRPr lang="en-GB"/>
           </a:p>
@@ -1569,7 +1678,7 @@
           <a:p>
             <a:fld id="{B04D14A0-AE39-4FDC-BCBA-1D6173085475}" type="datetimeFigureOut">
               <a:rPr lang="en-GB" smtClean="0"/>
-              <a:t>25/04/2026</a:t>
+              <a:t>26/04/2026</a:t>
             </a:fld>
             <a:endParaRPr lang="en-GB"/>
           </a:p>
@@ -1895,7 +2004,7 @@
           <a:p>
             <a:fld id="{B04D14A0-AE39-4FDC-BCBA-1D6173085475}" type="datetimeFigureOut">
               <a:rPr lang="en-GB" smtClean="0"/>
-              <a:t>25/04/2026</a:t>
+              <a:t>26/04/2026</a:t>
             </a:fld>
             <a:endParaRPr lang="en-GB"/>
           </a:p>
@@ -2346,7 +2455,7 @@
           <a:p>
             <a:fld id="{B04D14A0-AE39-4FDC-BCBA-1D6173085475}" type="datetimeFigureOut">
               <a:rPr lang="en-GB" smtClean="0"/>
-              <a:t>25/04/2026</a:t>
+              <a:t>26/04/2026</a:t>
             </a:fld>
             <a:endParaRPr lang="en-GB"/>
           </a:p>
@@ -2464,7 +2573,7 @@
           <a:p>
             <a:fld id="{B04D14A0-AE39-4FDC-BCBA-1D6173085475}" type="datetimeFigureOut">
               <a:rPr lang="en-GB" smtClean="0"/>
-              <a:t>25/04/2026</a:t>
+              <a:t>26/04/2026</a:t>
             </a:fld>
             <a:endParaRPr lang="en-GB"/>
           </a:p>
@@ -2559,7 +2668,7 @@
           <a:p>
             <a:fld id="{B04D14A0-AE39-4FDC-BCBA-1D6173085475}" type="datetimeFigureOut">
               <a:rPr lang="en-GB" smtClean="0"/>
-              <a:t>25/04/2026</a:t>
+              <a:t>26/04/2026</a:t>
             </a:fld>
             <a:endParaRPr lang="en-GB"/>
           </a:p>
@@ -2846,7 +2955,7 @@
           <a:p>
             <a:fld id="{B04D14A0-AE39-4FDC-BCBA-1D6173085475}" type="datetimeFigureOut">
               <a:rPr lang="en-GB" smtClean="0"/>
-              <a:t>25/04/2026</a:t>
+              <a:t>26/04/2026</a:t>
             </a:fld>
             <a:endParaRPr lang="en-GB"/>
           </a:p>
@@ -3168,7 +3277,7 @@
           <a:p>
             <a:fld id="{B04D14A0-AE39-4FDC-BCBA-1D6173085475}" type="datetimeFigureOut">
               <a:rPr lang="en-GB" smtClean="0"/>
-              <a:t>25/04/2026</a:t>
+              <a:t>26/04/2026</a:t>
             </a:fld>
             <a:endParaRPr lang="en-GB"/>
           </a:p>
@@ -3422,7 +3531,7 @@
           <a:p>
             <a:fld id="{B04D14A0-AE39-4FDC-BCBA-1D6173085475}" type="datetimeFigureOut">
               <a:rPr lang="en-GB" smtClean="0"/>
-              <a:t>25/04/2026</a:t>
+              <a:t>26/04/2026</a:t>
             </a:fld>
             <a:endParaRPr lang="en-GB"/>
           </a:p>
@@ -12101,7 +12210,7 @@
         <p:spPr>
           <a:xfrm>
             <a:off x="139493" y="1010335"/>
-            <a:ext cx="11033332" cy="849472"/>
+            <a:ext cx="11033332" cy="674544"/>
           </a:xfrm>
           <a:prstGeom prst="rect">
             <a:avLst/>
@@ -12132,7 +12241,28 @@
                 <a:latin typeface="Times New Roman" panose="02020603050405020304" pitchFamily="18" charset="0"/>
                 <a:ea typeface="Arial" panose="020B0604020202020204" pitchFamily="34" charset="0"/>
               </a:rPr>
-              <a:t>Risk Score = Sum of triggered indicator weights + attachment score + (SPF fail × 2) + (DKIM fail × 2)</a:t>
+              <a:t>Risk Score = Sum </a:t>
+            </a:r>
+            <a:r>
+              <a:rPr lang="en-GB" dirty="0">
+                <a:solidFill>
+                  <a:srgbClr val="374151"/>
+                </a:solidFill>
+                <a:latin typeface="Times New Roman" panose="02020603050405020304" pitchFamily="18" charset="0"/>
+                <a:ea typeface="Arial" panose="020B0604020202020204" pitchFamily="34" charset="0"/>
+              </a:rPr>
+              <a:t>[</a:t>
+            </a:r>
+            <a:r>
+              <a:rPr lang="en-GB" sz="1800" dirty="0">
+                <a:solidFill>
+                  <a:srgbClr val="374151"/>
+                </a:solidFill>
+                <a:effectLst/>
+                <a:latin typeface="Times New Roman" panose="02020603050405020304" pitchFamily="18" charset="0"/>
+                <a:ea typeface="Arial" panose="020B0604020202020204" pitchFamily="34" charset="0"/>
+              </a:rPr>
+              <a:t>triggered indicator weights + attachment score + (SPF fail × 2) + (DKIM fail × 2)]</a:t>
             </a:r>
           </a:p>
           <a:p>
@@ -12167,8 +12297,8 @@
         </p:nvGrpSpPr>
         <p:grpSpPr>
           <a:xfrm>
-            <a:off x="334923" y="1623614"/>
-            <a:ext cx="10697144" cy="3896653"/>
+            <a:off x="458863" y="2137468"/>
+            <a:ext cx="10447253" cy="4568847"/>
             <a:chOff x="334923" y="1420414"/>
             <a:chExt cx="10110076" cy="3515743"/>
           </a:xfrm>
@@ -15631,6 +15761,206 @@
           </p:txBody>
         </p:sp>
       </p:grpSp>
+      <p:cxnSp>
+        <p:nvCxnSpPr>
+          <p:cNvPr id="3" name="Straight Arrow Connector 2">
+            <a:extLst>
+              <a:ext uri="{FF2B5EF4-FFF2-40B4-BE49-F238E27FC236}">
+                <a16:creationId xmlns:a16="http://schemas.microsoft.com/office/drawing/2014/main" id="{1AA3B3E8-F93C-DD00-7D48-E9D947F81A86}"/>
+              </a:ext>
+            </a:extLst>
+          </p:cNvPr>
+          <p:cNvCxnSpPr>
+            <a:cxnSpLocks/>
+          </p:cNvCxnSpPr>
+          <p:nvPr/>
+        </p:nvCxnSpPr>
+        <p:spPr>
+          <a:xfrm flipV="1">
+            <a:off x="2936586" y="1322334"/>
+            <a:ext cx="0" cy="281518"/>
+          </a:xfrm>
+          <a:prstGeom prst="straightConnector1">
+            <a:avLst/>
+          </a:prstGeom>
+          <a:ln>
+            <a:tailEnd type="triangle"/>
+          </a:ln>
+        </p:spPr>
+        <p:style>
+          <a:lnRef idx="2">
+            <a:schemeClr val="dk1"/>
+          </a:lnRef>
+          <a:fillRef idx="0">
+            <a:schemeClr val="dk1"/>
+          </a:fillRef>
+          <a:effectRef idx="1">
+            <a:schemeClr val="dk1"/>
+          </a:effectRef>
+          <a:fontRef idx="minor">
+            <a:schemeClr val="tx1"/>
+          </a:fontRef>
+        </p:style>
+      </p:cxnSp>
+      <p:cxnSp>
+        <p:nvCxnSpPr>
+          <p:cNvPr id="7" name="Straight Connector 6">
+            <a:extLst>
+              <a:ext uri="{FF2B5EF4-FFF2-40B4-BE49-F238E27FC236}">
+                <a16:creationId xmlns:a16="http://schemas.microsoft.com/office/drawing/2014/main" id="{7BB19563-7C9A-ADEC-011E-FBCA6948C428}"/>
+              </a:ext>
+            </a:extLst>
+          </p:cNvPr>
+          <p:cNvCxnSpPr>
+            <a:cxnSpLocks/>
+          </p:cNvCxnSpPr>
+          <p:nvPr/>
+        </p:nvCxnSpPr>
+        <p:spPr>
+          <a:xfrm>
+            <a:off x="2936586" y="1607563"/>
+            <a:ext cx="1925884" cy="9705"/>
+          </a:xfrm>
+          <a:prstGeom prst="line">
+            <a:avLst/>
+          </a:prstGeom>
+        </p:spPr>
+        <p:style>
+          <a:lnRef idx="1">
+            <a:schemeClr val="dk1"/>
+          </a:lnRef>
+          <a:fillRef idx="0">
+            <a:schemeClr val="dk1"/>
+          </a:fillRef>
+          <a:effectRef idx="0">
+            <a:schemeClr val="dk1"/>
+          </a:effectRef>
+          <a:fontRef idx="minor">
+            <a:schemeClr val="tx1"/>
+          </a:fontRef>
+        </p:style>
+      </p:cxnSp>
+      <p:cxnSp>
+        <p:nvCxnSpPr>
+          <p:cNvPr id="10" name="Straight Connector 9">
+            <a:extLst>
+              <a:ext uri="{FF2B5EF4-FFF2-40B4-BE49-F238E27FC236}">
+                <a16:creationId xmlns:a16="http://schemas.microsoft.com/office/drawing/2014/main" id="{E4DB3107-DD8E-E3EC-28D3-6749706B248D}"/>
+              </a:ext>
+            </a:extLst>
+          </p:cNvPr>
+          <p:cNvCxnSpPr>
+            <a:cxnSpLocks/>
+          </p:cNvCxnSpPr>
+          <p:nvPr/>
+        </p:nvCxnSpPr>
+        <p:spPr>
+          <a:xfrm flipV="1">
+            <a:off x="4862470" y="1620979"/>
+            <a:ext cx="0" cy="516490"/>
+          </a:xfrm>
+          <a:prstGeom prst="line">
+            <a:avLst/>
+          </a:prstGeom>
+        </p:spPr>
+        <p:style>
+          <a:lnRef idx="1">
+            <a:schemeClr val="dk1"/>
+          </a:lnRef>
+          <a:fillRef idx="0">
+            <a:schemeClr val="dk1"/>
+          </a:fillRef>
+          <a:effectRef idx="0">
+            <a:schemeClr val="dk1"/>
+          </a:effectRef>
+          <a:fontRef idx="minor">
+            <a:schemeClr val="tx1"/>
+          </a:fontRef>
+        </p:style>
+      </p:cxnSp>
+      <p:cxnSp>
+        <p:nvCxnSpPr>
+          <p:cNvPr id="13" name="Straight Arrow Connector 12">
+            <a:extLst>
+              <a:ext uri="{FF2B5EF4-FFF2-40B4-BE49-F238E27FC236}">
+                <a16:creationId xmlns:a16="http://schemas.microsoft.com/office/drawing/2014/main" id="{1C4D9CFB-7D73-B0BA-AD8D-58FA8235F912}"/>
+              </a:ext>
+            </a:extLst>
+          </p:cNvPr>
+          <p:cNvCxnSpPr>
+            <a:cxnSpLocks/>
+          </p:cNvCxnSpPr>
+          <p:nvPr/>
+        </p:nvCxnSpPr>
+        <p:spPr>
+          <a:xfrm flipV="1">
+            <a:off x="5832186" y="1347607"/>
+            <a:ext cx="0" cy="281518"/>
+          </a:xfrm>
+          <a:prstGeom prst="straightConnector1">
+            <a:avLst/>
+          </a:prstGeom>
+          <a:ln>
+            <a:tailEnd type="triangle"/>
+          </a:ln>
+        </p:spPr>
+        <p:style>
+          <a:lnRef idx="2">
+            <a:schemeClr val="dk1"/>
+          </a:lnRef>
+          <a:fillRef idx="0">
+            <a:schemeClr val="dk1"/>
+          </a:fillRef>
+          <a:effectRef idx="1">
+            <a:schemeClr val="dk1"/>
+          </a:effectRef>
+          <a:fontRef idx="minor">
+            <a:schemeClr val="tx1"/>
+          </a:fontRef>
+        </p:style>
+      </p:cxnSp>
+      <p:sp>
+        <p:nvSpPr>
+          <p:cNvPr id="14" name="TextBox 13">
+            <a:extLst>
+              <a:ext uri="{FF2B5EF4-FFF2-40B4-BE49-F238E27FC236}">
+                <a16:creationId xmlns:a16="http://schemas.microsoft.com/office/drawing/2014/main" id="{9767BA1A-5BC4-3B49-DDC3-1D835CF1BBF0}"/>
+              </a:ext>
+            </a:extLst>
+          </p:cNvPr>
+          <p:cNvSpPr txBox="1"/>
+          <p:nvPr/>
+        </p:nvSpPr>
+        <p:spPr>
+          <a:xfrm>
+            <a:off x="5236625" y="1625454"/>
+            <a:ext cx="1305888" cy="338554"/>
+          </a:xfrm>
+          <a:prstGeom prst="rect">
+            <a:avLst/>
+          </a:prstGeom>
+          <a:noFill/>
+        </p:spPr>
+        <p:txBody>
+          <a:bodyPr wrap="square" rtlCol="0">
+            <a:spAutoFit/>
+          </a:bodyPr>
+          <a:lstStyle/>
+          <a:p>
+            <a:r>
+              <a:rPr lang="en-IN" sz="1600" dirty="0">
+                <a:latin typeface="Times New Roman" panose="02020603050405020304" pitchFamily="18" charset="0"/>
+                <a:cs typeface="Times New Roman" panose="02020603050405020304" pitchFamily="18" charset="0"/>
+              </a:rPr>
+              <a:t>File attached</a:t>
+            </a:r>
+            <a:endParaRPr lang="en-GB" sz="1600" dirty="0">
+              <a:latin typeface="Times New Roman" panose="02020603050405020304" pitchFamily="18" charset="0"/>
+              <a:cs typeface="Times New Roman" panose="02020603050405020304" pitchFamily="18" charset="0"/>
+            </a:endParaRPr>
+          </a:p>
+        </p:txBody>
+      </p:sp>
     </p:spTree>
     <p:extLst>
       <p:ext uri="{BB962C8B-B14F-4D97-AF65-F5344CB8AC3E}">

--- a/PhishGuard.pptx
+++ b/PhishGuard.pptx
@@ -625,19 +625,11 @@
           <a:p>
             <a:r>
               <a:rPr lang="en-GB" b="1" dirty="0"/>
-              <a:t>DKIM (DomainKeys Identified </a:t>
-            </a:r>
-            <a:r>
-              <a:rPr lang="en-GB" b="1"/>
-              <a:t>Mail): </a:t>
-            </a:r>
-            <a:r>
-              <a:rPr lang="en-GB"/>
-              <a:t>“</a:t>
+              <a:t>DKIM (DomainKeys Identified Mail): </a:t>
             </a:r>
             <a:r>
               <a:rPr lang="en-GB" dirty="0"/>
-              <a:t>Was the email content modified?”</a:t>
+              <a:t>“Was the email content modified?”</a:t>
             </a:r>
           </a:p>
         </p:txBody>

--- a/PhishGuard.pptx
+++ b/PhishGuard.pptx
@@ -205,7 +205,7 @@
           <a:p>
             <a:fld id="{AE422D38-099D-4CB3-96FB-8395CF8B76A9}" type="datetimeFigureOut">
               <a:rPr lang="en-GB" smtClean="0"/>
-              <a:t>26/04/2026</a:t>
+              <a:t>28/04/2026</a:t>
             </a:fld>
             <a:endParaRPr lang="en-GB"/>
           </a:p>
@@ -838,7 +838,7 @@
           <a:p>
             <a:fld id="{B04D14A0-AE39-4FDC-BCBA-1D6173085475}" type="datetimeFigureOut">
               <a:rPr lang="en-GB" smtClean="0"/>
-              <a:t>26/04/2026</a:t>
+              <a:t>28/04/2026</a:t>
             </a:fld>
             <a:endParaRPr lang="en-GB"/>
           </a:p>
@@ -1066,7 +1066,7 @@
           <a:p>
             <a:fld id="{B04D14A0-AE39-4FDC-BCBA-1D6173085475}" type="datetimeFigureOut">
               <a:rPr lang="en-GB" smtClean="0"/>
-              <a:t>26/04/2026</a:t>
+              <a:t>28/04/2026</a:t>
             </a:fld>
             <a:endParaRPr lang="en-GB"/>
           </a:p>
@@ -1246,7 +1246,7 @@
           <a:p>
             <a:fld id="{B04D14A0-AE39-4FDC-BCBA-1D6173085475}" type="datetimeFigureOut">
               <a:rPr lang="en-GB" smtClean="0"/>
-              <a:t>26/04/2026</a:t>
+              <a:t>28/04/2026</a:t>
             </a:fld>
             <a:endParaRPr lang="en-GB"/>
           </a:p>
@@ -1416,7 +1416,7 @@
           <a:p>
             <a:fld id="{B04D14A0-AE39-4FDC-BCBA-1D6173085475}" type="datetimeFigureOut">
               <a:rPr lang="en-GB" smtClean="0"/>
-              <a:t>26/04/2026</a:t>
+              <a:t>28/04/2026</a:t>
             </a:fld>
             <a:endParaRPr lang="en-GB"/>
           </a:p>
@@ -1670,7 +1670,7 @@
           <a:p>
             <a:fld id="{B04D14A0-AE39-4FDC-BCBA-1D6173085475}" type="datetimeFigureOut">
               <a:rPr lang="en-GB" smtClean="0"/>
-              <a:t>26/04/2026</a:t>
+              <a:t>28/04/2026</a:t>
             </a:fld>
             <a:endParaRPr lang="en-GB"/>
           </a:p>
@@ -1996,7 +1996,7 @@
           <a:p>
             <a:fld id="{B04D14A0-AE39-4FDC-BCBA-1D6173085475}" type="datetimeFigureOut">
               <a:rPr lang="en-GB" smtClean="0"/>
-              <a:t>26/04/2026</a:t>
+              <a:t>28/04/2026</a:t>
             </a:fld>
             <a:endParaRPr lang="en-GB"/>
           </a:p>
@@ -2447,7 +2447,7 @@
           <a:p>
             <a:fld id="{B04D14A0-AE39-4FDC-BCBA-1D6173085475}" type="datetimeFigureOut">
               <a:rPr lang="en-GB" smtClean="0"/>
-              <a:t>26/04/2026</a:t>
+              <a:t>28/04/2026</a:t>
             </a:fld>
             <a:endParaRPr lang="en-GB"/>
           </a:p>
@@ -2565,7 +2565,7 @@
           <a:p>
             <a:fld id="{B04D14A0-AE39-4FDC-BCBA-1D6173085475}" type="datetimeFigureOut">
               <a:rPr lang="en-GB" smtClean="0"/>
-              <a:t>26/04/2026</a:t>
+              <a:t>28/04/2026</a:t>
             </a:fld>
             <a:endParaRPr lang="en-GB"/>
           </a:p>
@@ -2660,7 +2660,7 @@
           <a:p>
             <a:fld id="{B04D14A0-AE39-4FDC-BCBA-1D6173085475}" type="datetimeFigureOut">
               <a:rPr lang="en-GB" smtClean="0"/>
-              <a:t>26/04/2026</a:t>
+              <a:t>28/04/2026</a:t>
             </a:fld>
             <a:endParaRPr lang="en-GB"/>
           </a:p>
@@ -2947,7 +2947,7 @@
           <a:p>
             <a:fld id="{B04D14A0-AE39-4FDC-BCBA-1D6173085475}" type="datetimeFigureOut">
               <a:rPr lang="en-GB" smtClean="0"/>
-              <a:t>26/04/2026</a:t>
+              <a:t>28/04/2026</a:t>
             </a:fld>
             <a:endParaRPr lang="en-GB"/>
           </a:p>
@@ -3269,7 +3269,7 @@
           <a:p>
             <a:fld id="{B04D14A0-AE39-4FDC-BCBA-1D6173085475}" type="datetimeFigureOut">
               <a:rPr lang="en-GB" smtClean="0"/>
-              <a:t>26/04/2026</a:t>
+              <a:t>28/04/2026</a:t>
             </a:fld>
             <a:endParaRPr lang="en-GB"/>
           </a:p>
@@ -3523,7 +3523,7 @@
           <a:p>
             <a:fld id="{B04D14A0-AE39-4FDC-BCBA-1D6173085475}" type="datetimeFigureOut">
               <a:rPr lang="en-GB" smtClean="0"/>
-              <a:t>26/04/2026</a:t>
+              <a:t>28/04/2026</a:t>
             </a:fld>
             <a:endParaRPr lang="en-GB"/>
           </a:p>

--- a/PhishGuard.pptx
+++ b/PhishGuard.pptx
@@ -205,7 +205,7 @@
           <a:p>
             <a:fld id="{AE422D38-099D-4CB3-96FB-8395CF8B76A9}" type="datetimeFigureOut">
               <a:rPr lang="en-GB" smtClean="0"/>
-              <a:t>28/04/2026</a:t>
+              <a:t>14/05/2026</a:t>
             </a:fld>
             <a:endParaRPr lang="en-GB"/>
           </a:p>
@@ -838,7 +838,7 @@
           <a:p>
             <a:fld id="{B04D14A0-AE39-4FDC-BCBA-1D6173085475}" type="datetimeFigureOut">
               <a:rPr lang="en-GB" smtClean="0"/>
-              <a:t>28/04/2026</a:t>
+              <a:t>14/05/2026</a:t>
             </a:fld>
             <a:endParaRPr lang="en-GB"/>
           </a:p>
@@ -1066,7 +1066,7 @@
           <a:p>
             <a:fld id="{B04D14A0-AE39-4FDC-BCBA-1D6173085475}" type="datetimeFigureOut">
               <a:rPr lang="en-GB" smtClean="0"/>
-              <a:t>28/04/2026</a:t>
+              <a:t>14/05/2026</a:t>
             </a:fld>
             <a:endParaRPr lang="en-GB"/>
           </a:p>
@@ -1246,7 +1246,7 @@
           <a:p>
             <a:fld id="{B04D14A0-AE39-4FDC-BCBA-1D6173085475}" type="datetimeFigureOut">
               <a:rPr lang="en-GB" smtClean="0"/>
-              <a:t>28/04/2026</a:t>
+              <a:t>14/05/2026</a:t>
             </a:fld>
             <a:endParaRPr lang="en-GB"/>
           </a:p>
@@ -1416,7 +1416,7 @@
           <a:p>
             <a:fld id="{B04D14A0-AE39-4FDC-BCBA-1D6173085475}" type="datetimeFigureOut">
               <a:rPr lang="en-GB" smtClean="0"/>
-              <a:t>28/04/2026</a:t>
+              <a:t>14/05/2026</a:t>
             </a:fld>
             <a:endParaRPr lang="en-GB"/>
           </a:p>
@@ -1670,7 +1670,7 @@
           <a:p>
             <a:fld id="{B04D14A0-AE39-4FDC-BCBA-1D6173085475}" type="datetimeFigureOut">
               <a:rPr lang="en-GB" smtClean="0"/>
-              <a:t>28/04/2026</a:t>
+              <a:t>14/05/2026</a:t>
             </a:fld>
             <a:endParaRPr lang="en-GB"/>
           </a:p>
@@ -1996,7 +1996,7 @@
           <a:p>
             <a:fld id="{B04D14A0-AE39-4FDC-BCBA-1D6173085475}" type="datetimeFigureOut">
               <a:rPr lang="en-GB" smtClean="0"/>
-              <a:t>28/04/2026</a:t>
+              <a:t>14/05/2026</a:t>
             </a:fld>
             <a:endParaRPr lang="en-GB"/>
           </a:p>
@@ -2447,7 +2447,7 @@
           <a:p>
             <a:fld id="{B04D14A0-AE39-4FDC-BCBA-1D6173085475}" type="datetimeFigureOut">
               <a:rPr lang="en-GB" smtClean="0"/>
-              <a:t>28/04/2026</a:t>
+              <a:t>14/05/2026</a:t>
             </a:fld>
             <a:endParaRPr lang="en-GB"/>
           </a:p>
@@ -2565,7 +2565,7 @@
           <a:p>
             <a:fld id="{B04D14A0-AE39-4FDC-BCBA-1D6173085475}" type="datetimeFigureOut">
               <a:rPr lang="en-GB" smtClean="0"/>
-              <a:t>28/04/2026</a:t>
+              <a:t>14/05/2026</a:t>
             </a:fld>
             <a:endParaRPr lang="en-GB"/>
           </a:p>
@@ -2660,7 +2660,7 @@
           <a:p>
             <a:fld id="{B04D14A0-AE39-4FDC-BCBA-1D6173085475}" type="datetimeFigureOut">
               <a:rPr lang="en-GB" smtClean="0"/>
-              <a:t>28/04/2026</a:t>
+              <a:t>14/05/2026</a:t>
             </a:fld>
             <a:endParaRPr lang="en-GB"/>
           </a:p>
@@ -2947,7 +2947,7 @@
           <a:p>
             <a:fld id="{B04D14A0-AE39-4FDC-BCBA-1D6173085475}" type="datetimeFigureOut">
               <a:rPr lang="en-GB" smtClean="0"/>
-              <a:t>28/04/2026</a:t>
+              <a:t>14/05/2026</a:t>
             </a:fld>
             <a:endParaRPr lang="en-GB"/>
           </a:p>
@@ -3269,7 +3269,7 @@
           <a:p>
             <a:fld id="{B04D14A0-AE39-4FDC-BCBA-1D6173085475}" type="datetimeFigureOut">
               <a:rPr lang="en-GB" smtClean="0"/>
-              <a:t>28/04/2026</a:t>
+              <a:t>14/05/2026</a:t>
             </a:fld>
             <a:endParaRPr lang="en-GB"/>
           </a:p>
@@ -3523,7 +3523,7 @@
           <a:p>
             <a:fld id="{B04D14A0-AE39-4FDC-BCBA-1D6173085475}" type="datetimeFigureOut">
               <a:rPr lang="en-GB" smtClean="0"/>
-              <a:t>28/04/2026</a:t>
+              <a:t>14/05/2026</a:t>
             </a:fld>
             <a:endParaRPr lang="en-GB"/>
           </a:p>
@@ -4110,10 +4110,11 @@
         </p:spPr>
         <p:txBody>
           <a:bodyPr>
-            <a:normAutofit fontScale="92500" lnSpcReduction="10000"/>
+            <a:normAutofit/>
           </a:bodyPr>
           <a:lstStyle/>
           <a:p>
+            <a:pPr algn="r"/>
             <a:r>
               <a:rPr lang="en-IN" sz="1800" dirty="0">
                 <a:solidFill>
@@ -4124,86 +4125,15 @@
             </a:r>
           </a:p>
           <a:p>
+            <a:pPr algn="r"/>
             <a:r>
               <a:rPr lang="en-IN" sz="1800" dirty="0">
                 <a:solidFill>
                   <a:schemeClr val="tx1"/>
                 </a:solidFill>
               </a:rPr>
-              <a:t>Amin Preet Avanish – 23000771 </a:t>
+              <a:t>Amin Preet Avanish</a:t>
             </a:r>
-          </a:p>
-          <a:p>
-            <a:r>
-              <a:rPr lang="en-GB" sz="1800" dirty="0">
-                <a:solidFill>
-                  <a:schemeClr val="tx1"/>
-                </a:solidFill>
-              </a:rPr>
-              <a:t>Parisha </a:t>
-            </a:r>
-            <a:r>
-              <a:rPr lang="en-GB" sz="1800" dirty="0" err="1">
-                <a:solidFill>
-                  <a:schemeClr val="tx1"/>
-                </a:solidFill>
-              </a:rPr>
-              <a:t>Bhupendrabhai</a:t>
-            </a:r>
-            <a:r>
-              <a:rPr lang="en-GB" sz="1800" dirty="0">
-                <a:solidFill>
-                  <a:schemeClr val="tx1"/>
-                </a:solidFill>
-              </a:rPr>
-              <a:t> Parmar – 23001101 </a:t>
-            </a:r>
-          </a:p>
-          <a:p>
-            <a:r>
-              <a:rPr lang="en-GB" sz="1800" dirty="0">
-                <a:solidFill>
-                  <a:schemeClr val="tx1"/>
-                </a:solidFill>
-              </a:rPr>
-              <a:t>Maharshi Kalpesh Brahmbhatt – 23001092 </a:t>
-            </a:r>
-          </a:p>
-          <a:p>
-            <a:r>
-              <a:rPr lang="en-GB" sz="1800" dirty="0" err="1">
-                <a:solidFill>
-                  <a:schemeClr val="tx1"/>
-                </a:solidFill>
-              </a:rPr>
-              <a:t>Yaminkhan</a:t>
-            </a:r>
-            <a:r>
-              <a:rPr lang="en-GB" sz="1800" dirty="0">
-                <a:solidFill>
-                  <a:schemeClr val="tx1"/>
-                </a:solidFill>
-              </a:rPr>
-              <a:t> </a:t>
-            </a:r>
-            <a:r>
-              <a:rPr lang="en-GB" sz="1800" dirty="0" err="1">
-                <a:solidFill>
-                  <a:schemeClr val="tx1"/>
-                </a:solidFill>
-              </a:rPr>
-              <a:t>Adilrashid</a:t>
-            </a:r>
-            <a:r>
-              <a:rPr lang="en-GB" sz="1800" dirty="0">
-                <a:solidFill>
-                  <a:schemeClr val="tx1"/>
-                </a:solidFill>
-              </a:rPr>
-              <a:t> Pathan – 23000230 </a:t>
-            </a:r>
-          </a:p>
-          <a:p>
             <a:endParaRPr lang="en-GB" sz="1800" dirty="0">
               <a:solidFill>
                 <a:schemeClr val="tx1"/>
@@ -4211,6 +4141,7 @@
             </a:endParaRPr>
           </a:p>
           <a:p>
+            <a:pPr algn="r"/>
             <a:endParaRPr lang="en-GB" sz="1800" dirty="0">
               <a:solidFill>
                 <a:schemeClr val="tx1"/>
@@ -4218,6 +4149,7 @@
             </a:endParaRPr>
           </a:p>
           <a:p>
+            <a:pPr algn="r"/>
             <a:endParaRPr lang="en-GB" sz="1800" dirty="0">
               <a:solidFill>
                 <a:schemeClr val="tx1"/>
